--- a/dist/00 - Kickoff Deck.pptx
+++ b/dist/00 - Kickoff Deck.pptx
@@ -16,8 +16,6 @@
     <p:sldId id="264" r:id="rId15"/>
     <p:sldId id="265" r:id="rId16"/>
     <p:sldId id="266" r:id="rId17"/>
-    <p:sldId id="267" r:id="rId18"/>
-    <p:sldId id="268" r:id="rId19"/>
   </p:sldIdLst>
   <p:sldSz cx="12191695" cy="6858000" type="screen4x3"/>
   <p:notesSz cx="6858000" cy="9144000"/>
@@ -3309,7 +3307,7 @@
                 </a:solidFill>
                 <a:latin typeface="Playfair Display"/>
               </a:rPr>
-              <a:t>Care.</a:t>
+              <a:t>Support.</a:t>
             </a:r>
           </a:p>
         </p:txBody>
@@ -3671,7 +3669,7 @@
                 </a:solidFill>
                 <a:latin typeface="Inter"/>
               </a:rPr>
-              <a:t>All 7 pages are built and getting their final touches. Next, we put it live on your own domain with professional email and look after it once it's live.</a:t>
+              <a:t>All 7 pages are built and getting their final touches. Next, we take it live on your own domain with a professional mailbox, at no deployment cost.</a:t>
             </a:r>
           </a:p>
         </p:txBody>
@@ -4108,7 +4106,7 @@
                 </a:solidFill>
                 <a:latin typeface="Inter"/>
               </a:rPr>
-              <a:t>PAYMENT SCHEDULE</a:t>
+              <a:t>NEXT STEPS</a:t>
             </a:r>
           </a:p>
         </p:txBody>
@@ -4230,7 +4228,7 @@
                 </a:solidFill>
                 <a:latin typeface="Inter"/>
               </a:rPr>
-              <a:t>10 / 13</a:t>
+              <a:t>10 / 11</a:t>
             </a:r>
           </a:p>
         </p:txBody>
@@ -4269,7 +4267,7 @@
                 </a:solidFill>
                 <a:latin typeface="Inter"/>
               </a:rPr>
-              <a:t>09 · WHEN YOU PAY</a:t>
+              <a:t>09 · NEXT STEPS</a:t>
             </a:r>
           </a:p>
         </p:txBody>
@@ -4308,7 +4306,7 @@
                 </a:solidFill>
                 <a:latin typeface="Playfair Display"/>
               </a:rPr>
-              <a:t>Two simple </a:t>
+              <a:t>Three steps </a:t>
             </a:r>
             <a:r>
               <a:rPr sz="3400" b="0" i="1">
@@ -4317,7 +4315,7 @@
                 </a:solidFill>
                 <a:latin typeface="Playfair Display"/>
               </a:rPr>
-              <a:t>instalments.</a:t>
+              <a:t>to launch.</a:t>
             </a:r>
           </a:p>
         </p:txBody>
@@ -4419,412 +4417,7 @@
         <p:spPr>
           <a:xfrm>
             <a:off x="731520" y="2514600"/>
-            <a:ext cx="5257800" cy="2651760"/>
-          </a:xfrm>
-          <a:prstGeom prst="roundRect">
-            <a:avLst>
-              <a:gd name="adj" fmla="val 5000"/>
-            </a:avLst>
-          </a:prstGeom>
-          <a:solidFill>
-            <a:srgbClr val="FFFFFF"/>
-          </a:solidFill>
-          <a:ln w="9525">
-            <a:solidFill>
-              <a:srgbClr val="6A26D8"/>
-            </a:solidFill>
-          </a:ln>
-          <a:effectLst/>
-        </p:spPr>
-        <p:style>
-          <a:lnRef idx="1">
-            <a:schemeClr val="accent1"/>
-          </a:lnRef>
-          <a:fillRef idx="3">
-            <a:schemeClr val="accent1"/>
-          </a:fillRef>
-          <a:effectRef idx="2">
-            <a:schemeClr val="accent1"/>
-          </a:effectRef>
-          <a:fontRef idx="minor">
-            <a:schemeClr val="lt1"/>
-          </a:fontRef>
-        </p:style>
-        <p:txBody>
-          <a:bodyPr rtlCol="0" anchor="ctr"/>
-          <a:lstStyle/>
-          <a:p>
-            <a:pPr algn="ctr"/>
-          </a:p>
-        </p:txBody>
-      </p:sp>
-      <p:sp>
-        <p:nvSpPr>
-          <p:cNvPr id="14" name="TextBox 13"/>
-          <p:cNvSpPr txBox="1"/>
-          <p:nvPr/>
-        </p:nvSpPr>
-        <p:spPr>
-          <a:xfrm>
-            <a:off x="1097280" y="2743200"/>
-            <a:ext cx="2743200" cy="822960"/>
-          </a:xfrm>
-          <a:prstGeom prst="rect">
-            <a:avLst/>
-          </a:prstGeom>
-          <a:noFill/>
-        </p:spPr>
-        <p:txBody>
-          <a:bodyPr wrap="square" lIns="0" rIns="0" tIns="0" bIns="0" anchor="t">
-            <a:spAutoFit/>
-          </a:bodyPr>
-          <a:lstStyle/>
-          <a:p>
-            <a:pPr algn="l">
-              <a:lnSpc>
-                <a:spcPct val="110000"/>
-              </a:lnSpc>
-            </a:pPr>
-            <a:r>
-              <a:rPr sz="4000" b="0" i="0">
-                <a:solidFill>
-                  <a:srgbClr val="6A26D8"/>
-                </a:solidFill>
-                <a:latin typeface="Playfair Display"/>
-              </a:rPr>
-              <a:t>01</a:t>
-            </a:r>
-          </a:p>
-        </p:txBody>
-      </p:sp>
-      <p:sp>
-        <p:nvSpPr>
-          <p:cNvPr id="15" name="TextBox 14"/>
-          <p:cNvSpPr txBox="1"/>
-          <p:nvPr/>
-        </p:nvSpPr>
-        <p:spPr>
-          <a:xfrm>
-            <a:off x="2103120" y="2816352"/>
-            <a:ext cx="2743200" cy="274320"/>
-          </a:xfrm>
-          <a:prstGeom prst="rect">
-            <a:avLst/>
-          </a:prstGeom>
-          <a:noFill/>
-        </p:spPr>
-        <p:txBody>
-          <a:bodyPr wrap="square" lIns="0" rIns="0" tIns="0" bIns="0" anchor="t">
-            <a:spAutoFit/>
-          </a:bodyPr>
-          <a:lstStyle/>
-          <a:p>
-            <a:pPr algn="l">
-              <a:lnSpc>
-                <a:spcPct val="110000"/>
-              </a:lnSpc>
-            </a:pPr>
-            <a:r>
-              <a:rPr sz="1000" b="1" i="0">
-                <a:solidFill>
-                  <a:srgbClr val="6A26D8"/>
-                </a:solidFill>
-                <a:latin typeface="Inter"/>
-              </a:rPr>
-              <a:t>INSTALMENT 1</a:t>
-            </a:r>
-          </a:p>
-        </p:txBody>
-      </p:sp>
-      <p:sp>
-        <p:nvSpPr>
-          <p:cNvPr id="16" name="TextBox 15"/>
-          <p:cNvSpPr txBox="1"/>
-          <p:nvPr/>
-        </p:nvSpPr>
-        <p:spPr>
-          <a:xfrm>
-            <a:off x="2103120" y="3063240"/>
-            <a:ext cx="3657600" cy="457200"/>
-          </a:xfrm>
-          <a:prstGeom prst="rect">
-            <a:avLst/>
-          </a:prstGeom>
-          <a:noFill/>
-        </p:spPr>
-        <p:txBody>
-          <a:bodyPr wrap="square" lIns="0" rIns="0" tIns="0" bIns="0" anchor="t">
-            <a:spAutoFit/>
-          </a:bodyPr>
-          <a:lstStyle/>
-          <a:p>
-            <a:pPr algn="l">
-              <a:lnSpc>
-                <a:spcPct val="110000"/>
-              </a:lnSpc>
-            </a:pPr>
-            <a:r>
-              <a:rPr sz="2000" b="0" i="0">
-                <a:solidFill>
-                  <a:srgbClr val="141414"/>
-                </a:solidFill>
-                <a:latin typeface="Playfair Display"/>
-              </a:rPr>
-              <a:t>On signing</a:t>
-            </a:r>
-          </a:p>
-        </p:txBody>
-      </p:sp>
-      <p:sp>
-        <p:nvSpPr>
-          <p:cNvPr id="17" name="TextBox 16"/>
-          <p:cNvSpPr txBox="1"/>
-          <p:nvPr/>
-        </p:nvSpPr>
-        <p:spPr>
-          <a:xfrm>
-            <a:off x="1097280" y="3703320"/>
-            <a:ext cx="4572000" cy="640080"/>
-          </a:xfrm>
-          <a:prstGeom prst="rect">
-            <a:avLst/>
-          </a:prstGeom>
-          <a:noFill/>
-        </p:spPr>
-        <p:txBody>
-          <a:bodyPr wrap="square" lIns="0" rIns="0" tIns="0" bIns="0" anchor="t">
-            <a:spAutoFit/>
-          </a:bodyPr>
-          <a:lstStyle/>
-          <a:p>
-            <a:pPr algn="l">
-              <a:lnSpc>
-                <a:spcPct val="125000"/>
-              </a:lnSpc>
-            </a:pPr>
-            <a:r>
-              <a:rPr sz="1200" b="0" i="0">
-                <a:solidFill>
-                  <a:srgbClr val="6B6878"/>
-                </a:solidFill>
-                <a:latin typeface="Inter"/>
-              </a:rPr>
-              <a:t>Development fee (100%)
-+ deployment advance (50%)</a:t>
-            </a:r>
-          </a:p>
-        </p:txBody>
-      </p:sp>
-      <p:sp>
-        <p:nvSpPr>
-          <p:cNvPr id="18" name="Rectangle 17"/>
-          <p:cNvSpPr/>
-          <p:nvPr/>
-        </p:nvSpPr>
-        <p:spPr>
-          <a:xfrm>
-            <a:off x="1097280" y="4434840"/>
-            <a:ext cx="4526280" cy="7620"/>
-          </a:xfrm>
-          <a:prstGeom prst="rect">
-            <a:avLst/>
-          </a:prstGeom>
-          <a:solidFill>
-            <a:srgbClr val="E6E1F0"/>
-          </a:solidFill>
-          <a:ln>
-            <a:noFill/>
-          </a:ln>
-          <a:effectLst/>
-        </p:spPr>
-        <p:style>
-          <a:lnRef idx="1">
-            <a:schemeClr val="accent1"/>
-          </a:lnRef>
-          <a:fillRef idx="3">
-            <a:schemeClr val="accent1"/>
-          </a:fillRef>
-          <a:effectRef idx="2">
-            <a:schemeClr val="accent1"/>
-          </a:effectRef>
-          <a:fontRef idx="minor">
-            <a:schemeClr val="lt1"/>
-          </a:fontRef>
-        </p:style>
-        <p:txBody>
-          <a:bodyPr rtlCol="0" anchor="ctr"/>
-          <a:lstStyle/>
-          <a:p>
-            <a:pPr algn="ctr"/>
-          </a:p>
-        </p:txBody>
-      </p:sp>
-      <p:sp>
-        <p:nvSpPr>
-          <p:cNvPr id="19" name="TextBox 18"/>
-          <p:cNvSpPr txBox="1"/>
-          <p:nvPr/>
-        </p:nvSpPr>
-        <p:spPr>
-          <a:xfrm>
-            <a:off x="1097280" y="4553712"/>
-            <a:ext cx="2194560" cy="228600"/>
-          </a:xfrm>
-          <a:prstGeom prst="rect">
-            <a:avLst/>
-          </a:prstGeom>
-          <a:noFill/>
-        </p:spPr>
-        <p:txBody>
-          <a:bodyPr wrap="square" lIns="0" rIns="0" tIns="0" bIns="0" anchor="t">
-            <a:spAutoFit/>
-          </a:bodyPr>
-          <a:lstStyle/>
-          <a:p>
-            <a:pPr algn="l">
-              <a:lnSpc>
-                <a:spcPct val="110000"/>
-              </a:lnSpc>
-            </a:pPr>
-            <a:r>
-              <a:rPr sz="800" b="1" i="0">
-                <a:solidFill>
-                  <a:srgbClr val="6B6878"/>
-                </a:solidFill>
-                <a:latin typeface="Inter"/>
-              </a:rPr>
-              <a:t>OPTION A · COMPLETE CARE</a:t>
-            </a:r>
-          </a:p>
-        </p:txBody>
-      </p:sp>
-      <p:sp>
-        <p:nvSpPr>
-          <p:cNvPr id="20" name="TextBox 19"/>
-          <p:cNvSpPr txBox="1"/>
-          <p:nvPr/>
-        </p:nvSpPr>
-        <p:spPr>
-          <a:xfrm>
-            <a:off x="1097280" y="4754880"/>
-            <a:ext cx="2194560" cy="365760"/>
-          </a:xfrm>
-          <a:prstGeom prst="rect">
-            <a:avLst/>
-          </a:prstGeom>
-          <a:noFill/>
-        </p:spPr>
-        <p:txBody>
-          <a:bodyPr wrap="square" lIns="0" rIns="0" tIns="0" bIns="0" anchor="t">
-            <a:spAutoFit/>
-          </a:bodyPr>
-          <a:lstStyle/>
-          <a:p>
-            <a:pPr algn="l">
-              <a:lnSpc>
-                <a:spcPct val="110000"/>
-              </a:lnSpc>
-            </a:pPr>
-            <a:r>
-              <a:rPr sz="1700" b="1" i="0">
-                <a:solidFill>
-                  <a:srgbClr val="141414"/>
-                </a:solidFill>
-                <a:latin typeface="Inter"/>
-              </a:rPr>
-              <a:t>PKR 25,000</a:t>
-            </a:r>
-          </a:p>
-        </p:txBody>
-      </p:sp>
-      <p:sp>
-        <p:nvSpPr>
-          <p:cNvPr id="21" name="TextBox 20"/>
-          <p:cNvSpPr txBox="1"/>
-          <p:nvPr/>
-        </p:nvSpPr>
-        <p:spPr>
-          <a:xfrm>
-            <a:off x="3383280" y="4553712"/>
-            <a:ext cx="2194560" cy="228600"/>
-          </a:xfrm>
-          <a:prstGeom prst="rect">
-            <a:avLst/>
-          </a:prstGeom>
-          <a:noFill/>
-        </p:spPr>
-        <p:txBody>
-          <a:bodyPr wrap="square" lIns="0" rIns="0" tIns="0" bIns="0" anchor="t">
-            <a:spAutoFit/>
-          </a:bodyPr>
-          <a:lstStyle/>
-          <a:p>
-            <a:pPr algn="l">
-              <a:lnSpc>
-                <a:spcPct val="110000"/>
-              </a:lnSpc>
-            </a:pPr>
-            <a:r>
-              <a:rPr sz="800" b="1" i="0">
-                <a:solidFill>
-                  <a:srgbClr val="6B6878"/>
-                </a:solidFill>
-                <a:latin typeface="Inter"/>
-              </a:rPr>
-              <a:t>OPTION B · LAUNCH ESSENTIALS</a:t>
-            </a:r>
-          </a:p>
-        </p:txBody>
-      </p:sp>
-      <p:sp>
-        <p:nvSpPr>
-          <p:cNvPr id="22" name="TextBox 21"/>
-          <p:cNvSpPr txBox="1"/>
-          <p:nvPr/>
-        </p:nvSpPr>
-        <p:spPr>
-          <a:xfrm>
-            <a:off x="3383280" y="4754880"/>
-            <a:ext cx="2194560" cy="365760"/>
-          </a:xfrm>
-          <a:prstGeom prst="rect">
-            <a:avLst/>
-          </a:prstGeom>
-          <a:noFill/>
-        </p:spPr>
-        <p:txBody>
-          <a:bodyPr wrap="square" lIns="0" rIns="0" tIns="0" bIns="0" anchor="t">
-            <a:spAutoFit/>
-          </a:bodyPr>
-          <a:lstStyle/>
-          <a:p>
-            <a:pPr algn="l">
-              <a:lnSpc>
-                <a:spcPct val="110000"/>
-              </a:lnSpc>
-            </a:pPr>
-            <a:r>
-              <a:rPr sz="1700" b="1" i="0">
-                <a:solidFill>
-                  <a:srgbClr val="141414"/>
-                </a:solidFill>
-                <a:latin typeface="Inter"/>
-              </a:rPr>
-              <a:t>PKR 21,000</a:t>
-            </a:r>
-          </a:p>
-        </p:txBody>
-      </p:sp>
-      <p:sp>
-        <p:nvSpPr>
-          <p:cNvPr id="23" name="Rounded Rectangle 22"/>
-          <p:cNvSpPr/>
-          <p:nvPr/>
-        </p:nvSpPr>
-        <p:spPr>
-          <a:xfrm>
-            <a:off x="6172200" y="2514600"/>
-            <a:ext cx="5257800" cy="2651760"/>
+            <a:ext cx="3484778" cy="2057400"/>
           </a:xfrm>
           <a:prstGeom prst="roundRect">
             <a:avLst>
@@ -4865,180 +4458,144 @@
       </p:sp>
       <p:sp>
         <p:nvSpPr>
-          <p:cNvPr id="24" name="TextBox 23"/>
-          <p:cNvSpPr txBox="1"/>
-          <p:nvPr/>
-        </p:nvSpPr>
-        <p:spPr>
-          <a:xfrm>
-            <a:off x="6537960" y="2743200"/>
-            <a:ext cx="2743200" cy="822960"/>
-          </a:xfrm>
-          <a:prstGeom prst="rect">
-            <a:avLst/>
-          </a:prstGeom>
-          <a:noFill/>
-        </p:spPr>
-        <p:txBody>
-          <a:bodyPr wrap="square" lIns="0" rIns="0" tIns="0" bIns="0" anchor="t">
-            <a:spAutoFit/>
-          </a:bodyPr>
-          <a:lstStyle/>
-          <a:p>
-            <a:pPr algn="l">
-              <a:lnSpc>
-                <a:spcPct val="110000"/>
-              </a:lnSpc>
-            </a:pPr>
-            <a:r>
-              <a:rPr sz="4000" b="0" i="0">
+          <p:cNvPr id="14" name="TextBox 13"/>
+          <p:cNvSpPr txBox="1"/>
+          <p:nvPr/>
+        </p:nvSpPr>
+        <p:spPr>
+          <a:xfrm>
+            <a:off x="1051560" y="2697480"/>
+            <a:ext cx="914400" cy="731520"/>
+          </a:xfrm>
+          <a:prstGeom prst="rect">
+            <a:avLst/>
+          </a:prstGeom>
+          <a:noFill/>
+        </p:spPr>
+        <p:txBody>
+          <a:bodyPr wrap="square" lIns="0" rIns="0" tIns="0" bIns="0" anchor="t">
+            <a:spAutoFit/>
+          </a:bodyPr>
+          <a:lstStyle/>
+          <a:p>
+            <a:pPr algn="l">
+              <a:lnSpc>
+                <a:spcPct val="110000"/>
+              </a:lnSpc>
+            </a:pPr>
+            <a:r>
+              <a:rPr sz="3800" b="0" i="0">
                 <a:solidFill>
                   <a:srgbClr val="6A26D8"/>
                 </a:solidFill>
                 <a:latin typeface="Playfair Display"/>
               </a:rPr>
-              <a:t>02</a:t>
-            </a:r>
-          </a:p>
-        </p:txBody>
-      </p:sp>
-      <p:sp>
-        <p:nvSpPr>
-          <p:cNvPr id="25" name="TextBox 24"/>
-          <p:cNvSpPr txBox="1"/>
-          <p:nvPr/>
-        </p:nvSpPr>
-        <p:spPr>
-          <a:xfrm>
-            <a:off x="7543800" y="2816352"/>
-            <a:ext cx="2743200" cy="274320"/>
-          </a:xfrm>
-          <a:prstGeom prst="rect">
-            <a:avLst/>
-          </a:prstGeom>
-          <a:noFill/>
-        </p:spPr>
-        <p:txBody>
-          <a:bodyPr wrap="square" lIns="0" rIns="0" tIns="0" bIns="0" anchor="t">
-            <a:spAutoFit/>
-          </a:bodyPr>
-          <a:lstStyle/>
-          <a:p>
-            <a:pPr algn="l">
-              <a:lnSpc>
-                <a:spcPct val="110000"/>
-              </a:lnSpc>
-            </a:pPr>
-            <a:r>
-              <a:rPr sz="1000" b="1" i="0">
-                <a:solidFill>
-                  <a:srgbClr val="6A26D8"/>
+              <a:t>1</a:t>
+            </a:r>
+          </a:p>
+        </p:txBody>
+      </p:sp>
+      <p:sp>
+        <p:nvSpPr>
+          <p:cNvPr id="15" name="TextBox 14"/>
+          <p:cNvSpPr txBox="1"/>
+          <p:nvPr/>
+        </p:nvSpPr>
+        <p:spPr>
+          <a:xfrm>
+            <a:off x="1051560" y="3474720"/>
+            <a:ext cx="2936138" cy="365760"/>
+          </a:xfrm>
+          <a:prstGeom prst="rect">
+            <a:avLst/>
+          </a:prstGeom>
+          <a:noFill/>
+        </p:spPr>
+        <p:txBody>
+          <a:bodyPr wrap="square" lIns="0" rIns="0" tIns="0" bIns="0" anchor="t">
+            <a:spAutoFit/>
+          </a:bodyPr>
+          <a:lstStyle/>
+          <a:p>
+            <a:pPr algn="l">
+              <a:lnSpc>
+                <a:spcPct val="110000"/>
+              </a:lnSpc>
+            </a:pPr>
+            <a:r>
+              <a:rPr sz="1800" b="0" i="0">
+                <a:solidFill>
+                  <a:srgbClr val="141414"/>
+                </a:solidFill>
+                <a:latin typeface="Playfair Display"/>
+              </a:rPr>
+              <a:t>Sign</a:t>
+            </a:r>
+          </a:p>
+        </p:txBody>
+      </p:sp>
+      <p:sp>
+        <p:nvSpPr>
+          <p:cNvPr id="16" name="TextBox 15"/>
+          <p:cNvSpPr txBox="1"/>
+          <p:nvPr/>
+        </p:nvSpPr>
+        <p:spPr>
+          <a:xfrm>
+            <a:off x="1051560" y="3886200"/>
+            <a:ext cx="2936138" cy="731520"/>
+          </a:xfrm>
+          <a:prstGeom prst="rect">
+            <a:avLst/>
+          </a:prstGeom>
+          <a:noFill/>
+        </p:spPr>
+        <p:txBody>
+          <a:bodyPr wrap="square" lIns="0" rIns="0" tIns="0" bIns="0" anchor="t">
+            <a:spAutoFit/>
+          </a:bodyPr>
+          <a:lstStyle/>
+          <a:p>
+            <a:pPr algn="l">
+              <a:lnSpc>
+                <a:spcPct val="125000"/>
+              </a:lnSpc>
+            </a:pPr>
+            <a:r>
+              <a:rPr sz="1200" b="0" i="0">
+                <a:solidFill>
+                  <a:srgbClr val="6B6878"/>
                 </a:solidFill>
                 <a:latin typeface="Inter"/>
               </a:rPr>
-              <a:t>INSTALMENT 2</a:t>
-            </a:r>
-          </a:p>
-        </p:txBody>
-      </p:sp>
-      <p:sp>
-        <p:nvSpPr>
-          <p:cNvPr id="26" name="TextBox 25"/>
-          <p:cNvSpPr txBox="1"/>
-          <p:nvPr/>
-        </p:nvSpPr>
-        <p:spPr>
-          <a:xfrm>
-            <a:off x="7543800" y="3063240"/>
-            <a:ext cx="3657600" cy="457200"/>
-          </a:xfrm>
-          <a:prstGeom prst="rect">
-            <a:avLst/>
-          </a:prstGeom>
-          <a:noFill/>
-        </p:spPr>
-        <p:txBody>
-          <a:bodyPr wrap="square" lIns="0" rIns="0" tIns="0" bIns="0" anchor="t">
-            <a:spAutoFit/>
-          </a:bodyPr>
-          <a:lstStyle/>
-          <a:p>
-            <a:pPr algn="l">
-              <a:lnSpc>
-                <a:spcPct val="110000"/>
-              </a:lnSpc>
-            </a:pPr>
-            <a:r>
-              <a:rPr sz="2000" b="0" i="0">
-                <a:solidFill>
-                  <a:srgbClr val="141414"/>
-                </a:solidFill>
-                <a:latin typeface="Playfair Display"/>
-              </a:rPr>
-              <a:t>On go-live</a:t>
-            </a:r>
-          </a:p>
-        </p:txBody>
-      </p:sp>
-      <p:sp>
-        <p:nvSpPr>
-          <p:cNvPr id="27" name="TextBox 26"/>
-          <p:cNvSpPr txBox="1"/>
-          <p:nvPr/>
-        </p:nvSpPr>
-        <p:spPr>
-          <a:xfrm>
-            <a:off x="6537960" y="3703320"/>
-            <a:ext cx="4572000" cy="640080"/>
-          </a:xfrm>
-          <a:prstGeom prst="rect">
-            <a:avLst/>
-          </a:prstGeom>
-          <a:noFill/>
-        </p:spPr>
-        <p:txBody>
-          <a:bodyPr wrap="square" lIns="0" rIns="0" tIns="0" bIns="0" anchor="t">
-            <a:spAutoFit/>
-          </a:bodyPr>
-          <a:lstStyle/>
-          <a:p>
-            <a:pPr algn="l">
-              <a:lnSpc>
-                <a:spcPct val="125000"/>
-              </a:lnSpc>
-            </a:pPr>
-            <a:r>
-              <a:rPr sz="1200" b="0" i="0">
-                <a:solidFill>
-                  <a:srgbClr val="6B6878"/>
-                </a:solidFill>
-                <a:latin typeface="Inter"/>
-              </a:rPr>
-              <a:t>Deployment balance (50%)
-once your site is live</a:t>
-            </a:r>
-          </a:p>
-        </p:txBody>
-      </p:sp>
-      <p:sp>
-        <p:nvSpPr>
-          <p:cNvPr id="28" name="Rectangle 27"/>
+              <a:t>Review and sign the Service Agreement.</a:t>
+            </a:r>
+          </a:p>
+        </p:txBody>
+      </p:sp>
+      <p:sp>
+        <p:nvSpPr>
+          <p:cNvPr id="17" name="Rounded Rectangle 16"/>
           <p:cNvSpPr/>
           <p:nvPr/>
         </p:nvSpPr>
         <p:spPr>
           <a:xfrm>
-            <a:off x="6537960" y="4434840"/>
-            <a:ext cx="4526280" cy="7620"/>
-          </a:xfrm>
-          <a:prstGeom prst="rect">
-            <a:avLst/>
+            <a:off x="4353458" y="2514600"/>
+            <a:ext cx="3484778" cy="2057400"/>
+          </a:xfrm>
+          <a:prstGeom prst="roundRect">
+            <a:avLst>
+              <a:gd name="adj" fmla="val 5000"/>
+            </a:avLst>
           </a:prstGeom>
           <a:solidFill>
-            <a:srgbClr val="E6E1F0"/>
+            <a:srgbClr val="F8F6FD"/>
           </a:solidFill>
-          <a:ln>
-            <a:noFill/>
+          <a:ln w="9525">
+            <a:solidFill>
+              <a:srgbClr val="E6E1F0"/>
+            </a:solidFill>
           </a:ln>
           <a:effectLst/>
         </p:spPr>
@@ -5066,195 +4623,405 @@
       </p:sp>
       <p:sp>
         <p:nvSpPr>
-          <p:cNvPr id="29" name="TextBox 28"/>
-          <p:cNvSpPr txBox="1"/>
-          <p:nvPr/>
-        </p:nvSpPr>
-        <p:spPr>
-          <a:xfrm>
-            <a:off x="6537960" y="4553712"/>
-            <a:ext cx="2194560" cy="228600"/>
-          </a:xfrm>
-          <a:prstGeom prst="rect">
-            <a:avLst/>
-          </a:prstGeom>
-          <a:noFill/>
-        </p:spPr>
-        <p:txBody>
-          <a:bodyPr wrap="square" lIns="0" rIns="0" tIns="0" bIns="0" anchor="t">
-            <a:spAutoFit/>
-          </a:bodyPr>
-          <a:lstStyle/>
-          <a:p>
-            <a:pPr algn="l">
-              <a:lnSpc>
-                <a:spcPct val="110000"/>
-              </a:lnSpc>
-            </a:pPr>
-            <a:r>
-              <a:rPr sz="800" b="1" i="0">
+          <p:cNvPr id="18" name="TextBox 17"/>
+          <p:cNvSpPr txBox="1"/>
+          <p:nvPr/>
+        </p:nvSpPr>
+        <p:spPr>
+          <a:xfrm>
+            <a:off x="4673498" y="2697480"/>
+            <a:ext cx="914400" cy="731520"/>
+          </a:xfrm>
+          <a:prstGeom prst="rect">
+            <a:avLst/>
+          </a:prstGeom>
+          <a:noFill/>
+        </p:spPr>
+        <p:txBody>
+          <a:bodyPr wrap="square" lIns="0" rIns="0" tIns="0" bIns="0" anchor="t">
+            <a:spAutoFit/>
+          </a:bodyPr>
+          <a:lstStyle/>
+          <a:p>
+            <a:pPr algn="l">
+              <a:lnSpc>
+                <a:spcPct val="110000"/>
+              </a:lnSpc>
+            </a:pPr>
+            <a:r>
+              <a:rPr sz="3800" b="0" i="0">
+                <a:solidFill>
+                  <a:srgbClr val="6A26D8"/>
+                </a:solidFill>
+                <a:latin typeface="Playfair Display"/>
+              </a:rPr>
+              <a:t>2</a:t>
+            </a:r>
+          </a:p>
+        </p:txBody>
+      </p:sp>
+      <p:sp>
+        <p:nvSpPr>
+          <p:cNvPr id="19" name="TextBox 18"/>
+          <p:cNvSpPr txBox="1"/>
+          <p:nvPr/>
+        </p:nvSpPr>
+        <p:spPr>
+          <a:xfrm>
+            <a:off x="4673498" y="3474720"/>
+            <a:ext cx="2936138" cy="365760"/>
+          </a:xfrm>
+          <a:prstGeom prst="rect">
+            <a:avLst/>
+          </a:prstGeom>
+          <a:noFill/>
+        </p:spPr>
+        <p:txBody>
+          <a:bodyPr wrap="square" lIns="0" rIns="0" tIns="0" bIns="0" anchor="t">
+            <a:spAutoFit/>
+          </a:bodyPr>
+          <a:lstStyle/>
+          <a:p>
+            <a:pPr algn="l">
+              <a:lnSpc>
+                <a:spcPct val="110000"/>
+              </a:lnSpc>
+            </a:pPr>
+            <a:r>
+              <a:rPr sz="1800" b="0" i="0">
+                <a:solidFill>
+                  <a:srgbClr val="141414"/>
+                </a:solidFill>
+                <a:latin typeface="Playfair Display"/>
+              </a:rPr>
+              <a:t>Pay</a:t>
+            </a:r>
+          </a:p>
+        </p:txBody>
+      </p:sp>
+      <p:sp>
+        <p:nvSpPr>
+          <p:cNvPr id="20" name="TextBox 19"/>
+          <p:cNvSpPr txBox="1"/>
+          <p:nvPr/>
+        </p:nvSpPr>
+        <p:spPr>
+          <a:xfrm>
+            <a:off x="4673498" y="3886200"/>
+            <a:ext cx="2936138" cy="731520"/>
+          </a:xfrm>
+          <a:prstGeom prst="rect">
+            <a:avLst/>
+          </a:prstGeom>
+          <a:noFill/>
+        </p:spPr>
+        <p:txBody>
+          <a:bodyPr wrap="square" lIns="0" rIns="0" tIns="0" bIns="0" anchor="t">
+            <a:spAutoFit/>
+          </a:bodyPr>
+          <a:lstStyle/>
+          <a:p>
+            <a:pPr algn="l">
+              <a:lnSpc>
+                <a:spcPct val="125000"/>
+              </a:lnSpc>
+            </a:pPr>
+            <a:r>
+              <a:rPr sz="1200" b="0" i="0">
                 <a:solidFill>
                   <a:srgbClr val="6B6878"/>
                 </a:solidFill>
                 <a:latin typeface="Inter"/>
               </a:rPr>
-              <a:t>OPTION A · COMPLETE CARE</a:t>
-            </a:r>
-          </a:p>
-        </p:txBody>
-      </p:sp>
-      <p:sp>
-        <p:nvSpPr>
-          <p:cNvPr id="30" name="TextBox 29"/>
-          <p:cNvSpPr txBox="1"/>
-          <p:nvPr/>
-        </p:nvSpPr>
-        <p:spPr>
-          <a:xfrm>
-            <a:off x="6537960" y="4754880"/>
-            <a:ext cx="2194560" cy="365760"/>
-          </a:xfrm>
-          <a:prstGeom prst="rect">
-            <a:avLst/>
-          </a:prstGeom>
-          <a:noFill/>
-        </p:spPr>
-        <p:txBody>
-          <a:bodyPr wrap="square" lIns="0" rIns="0" tIns="0" bIns="0" anchor="t">
-            <a:spAutoFit/>
-          </a:bodyPr>
-          <a:lstStyle/>
-          <a:p>
-            <a:pPr algn="l">
-              <a:lnSpc>
-                <a:spcPct val="110000"/>
-              </a:lnSpc>
-            </a:pPr>
-            <a:r>
-              <a:rPr sz="1700" b="1" i="0">
+              <a:t>Settle the development fee of PKR 15,000.</a:t>
+            </a:r>
+          </a:p>
+        </p:txBody>
+      </p:sp>
+      <p:sp>
+        <p:nvSpPr>
+          <p:cNvPr id="21" name="Rounded Rectangle 20"/>
+          <p:cNvSpPr/>
+          <p:nvPr/>
+        </p:nvSpPr>
+        <p:spPr>
+          <a:xfrm>
+            <a:off x="7975396" y="2514600"/>
+            <a:ext cx="3484778" cy="2057400"/>
+          </a:xfrm>
+          <a:prstGeom prst="roundRect">
+            <a:avLst>
+              <a:gd name="adj" fmla="val 5000"/>
+            </a:avLst>
+          </a:prstGeom>
+          <a:solidFill>
+            <a:srgbClr val="F8F6FD"/>
+          </a:solidFill>
+          <a:ln w="9525">
+            <a:solidFill>
+              <a:srgbClr val="E6E1F0"/>
+            </a:solidFill>
+          </a:ln>
+          <a:effectLst/>
+        </p:spPr>
+        <p:style>
+          <a:lnRef idx="1">
+            <a:schemeClr val="accent1"/>
+          </a:lnRef>
+          <a:fillRef idx="3">
+            <a:schemeClr val="accent1"/>
+          </a:fillRef>
+          <a:effectRef idx="2">
+            <a:schemeClr val="accent1"/>
+          </a:effectRef>
+          <a:fontRef idx="minor">
+            <a:schemeClr val="lt1"/>
+          </a:fontRef>
+        </p:style>
+        <p:txBody>
+          <a:bodyPr rtlCol="0" anchor="ctr"/>
+          <a:lstStyle/>
+          <a:p>
+            <a:pPr algn="ctr"/>
+          </a:p>
+        </p:txBody>
+      </p:sp>
+      <p:sp>
+        <p:nvSpPr>
+          <p:cNvPr id="22" name="TextBox 21"/>
+          <p:cNvSpPr txBox="1"/>
+          <p:nvPr/>
+        </p:nvSpPr>
+        <p:spPr>
+          <a:xfrm>
+            <a:off x="8295436" y="2697480"/>
+            <a:ext cx="914400" cy="731520"/>
+          </a:xfrm>
+          <a:prstGeom prst="rect">
+            <a:avLst/>
+          </a:prstGeom>
+          <a:noFill/>
+        </p:spPr>
+        <p:txBody>
+          <a:bodyPr wrap="square" lIns="0" rIns="0" tIns="0" bIns="0" anchor="t">
+            <a:spAutoFit/>
+          </a:bodyPr>
+          <a:lstStyle/>
+          <a:p>
+            <a:pPr algn="l">
+              <a:lnSpc>
+                <a:spcPct val="110000"/>
+              </a:lnSpc>
+            </a:pPr>
+            <a:r>
+              <a:rPr sz="3800" b="0" i="0">
+                <a:solidFill>
+                  <a:srgbClr val="6A26D8"/>
+                </a:solidFill>
+                <a:latin typeface="Playfair Display"/>
+              </a:rPr>
+              <a:t>3</a:t>
+            </a:r>
+          </a:p>
+        </p:txBody>
+      </p:sp>
+      <p:sp>
+        <p:nvSpPr>
+          <p:cNvPr id="23" name="TextBox 22"/>
+          <p:cNvSpPr txBox="1"/>
+          <p:nvPr/>
+        </p:nvSpPr>
+        <p:spPr>
+          <a:xfrm>
+            <a:off x="8295436" y="3474720"/>
+            <a:ext cx="2936138" cy="365760"/>
+          </a:xfrm>
+          <a:prstGeom prst="rect">
+            <a:avLst/>
+          </a:prstGeom>
+          <a:noFill/>
+        </p:spPr>
+        <p:txBody>
+          <a:bodyPr wrap="square" lIns="0" rIns="0" tIns="0" bIns="0" anchor="t">
+            <a:spAutoFit/>
+          </a:bodyPr>
+          <a:lstStyle/>
+          <a:p>
+            <a:pPr algn="l">
+              <a:lnSpc>
+                <a:spcPct val="110000"/>
+              </a:lnSpc>
+            </a:pPr>
+            <a:r>
+              <a:rPr sz="1800" b="0" i="0">
                 <a:solidFill>
                   <a:srgbClr val="141414"/>
                 </a:solidFill>
+                <a:latin typeface="Playfair Display"/>
+              </a:rPr>
+              <a:t>Launch</a:t>
+            </a:r>
+          </a:p>
+        </p:txBody>
+      </p:sp>
+      <p:sp>
+        <p:nvSpPr>
+          <p:cNvPr id="24" name="TextBox 23"/>
+          <p:cNvSpPr txBox="1"/>
+          <p:nvPr/>
+        </p:nvSpPr>
+        <p:spPr>
+          <a:xfrm>
+            <a:off x="8295436" y="3886200"/>
+            <a:ext cx="2936138" cy="731520"/>
+          </a:xfrm>
+          <a:prstGeom prst="rect">
+            <a:avLst/>
+          </a:prstGeom>
+          <a:noFill/>
+        </p:spPr>
+        <p:txBody>
+          <a:bodyPr wrap="square" lIns="0" rIns="0" tIns="0" bIns="0" anchor="t">
+            <a:spAutoFit/>
+          </a:bodyPr>
+          <a:lstStyle/>
+          <a:p>
+            <a:pPr algn="l">
+              <a:lnSpc>
+                <a:spcPct val="125000"/>
+              </a:lnSpc>
+            </a:pPr>
+            <a:r>
+              <a:rPr sz="1200" b="0" i="0">
+                <a:solidFill>
+                  <a:srgbClr val="6B6878"/>
+                </a:solidFill>
                 <a:latin typeface="Inter"/>
               </a:rPr>
-              <a:t>PKR 10,000</a:t>
-            </a:r>
-          </a:p>
-        </p:txBody>
-      </p:sp>
-      <p:sp>
-        <p:nvSpPr>
-          <p:cNvPr id="31" name="TextBox 30"/>
-          <p:cNvSpPr txBox="1"/>
-          <p:nvPr/>
-        </p:nvSpPr>
-        <p:spPr>
-          <a:xfrm>
-            <a:off x="8823960" y="4553712"/>
-            <a:ext cx="2194560" cy="228600"/>
-          </a:xfrm>
-          <a:prstGeom prst="rect">
-            <a:avLst/>
-          </a:prstGeom>
-          <a:noFill/>
-        </p:spPr>
-        <p:txBody>
-          <a:bodyPr wrap="square" lIns="0" rIns="0" tIns="0" bIns="0" anchor="t">
-            <a:spAutoFit/>
-          </a:bodyPr>
-          <a:lstStyle/>
-          <a:p>
-            <a:pPr algn="l">
-              <a:lnSpc>
-                <a:spcPct val="110000"/>
-              </a:lnSpc>
-            </a:pPr>
-            <a:r>
-              <a:rPr sz="800" b="1" i="0">
-                <a:solidFill>
-                  <a:srgbClr val="6B6878"/>
+              <a:t>Short call to purchase the domain &amp; hosting. We then take the website live.</a:t>
+            </a:r>
+          </a:p>
+        </p:txBody>
+      </p:sp>
+      <p:sp>
+        <p:nvSpPr>
+          <p:cNvPr id="25" name="TextBox 24"/>
+          <p:cNvSpPr txBox="1"/>
+          <p:nvPr/>
+        </p:nvSpPr>
+        <p:spPr>
+          <a:xfrm>
+            <a:off x="731520" y="4892040"/>
+            <a:ext cx="3657600" cy="274320"/>
+          </a:xfrm>
+          <a:prstGeom prst="rect">
+            <a:avLst/>
+          </a:prstGeom>
+          <a:noFill/>
+        </p:spPr>
+        <p:txBody>
+          <a:bodyPr wrap="square" lIns="0" rIns="0" tIns="0" bIns="0" anchor="t">
+            <a:spAutoFit/>
+          </a:bodyPr>
+          <a:lstStyle/>
+          <a:p>
+            <a:pPr algn="l">
+              <a:lnSpc>
+                <a:spcPct val="110000"/>
+              </a:lnSpc>
+            </a:pPr>
+            <a:r>
+              <a:rPr sz="900" b="1" i="0">
+                <a:solidFill>
+                  <a:srgbClr val="6A26D8"/>
                 </a:solidFill>
                 <a:latin typeface="Inter"/>
               </a:rPr>
-              <a:t>OPTION B · LAUNCH ESSENTIALS</a:t>
-            </a:r>
-          </a:p>
-        </p:txBody>
-      </p:sp>
-      <p:sp>
-        <p:nvSpPr>
-          <p:cNvPr id="32" name="TextBox 31"/>
-          <p:cNvSpPr txBox="1"/>
-          <p:nvPr/>
-        </p:nvSpPr>
-        <p:spPr>
-          <a:xfrm>
-            <a:off x="8823960" y="4754880"/>
-            <a:ext cx="2194560" cy="365760"/>
-          </a:xfrm>
-          <a:prstGeom prst="rect">
-            <a:avLst/>
-          </a:prstGeom>
-          <a:noFill/>
-        </p:spPr>
-        <p:txBody>
-          <a:bodyPr wrap="square" lIns="0" rIns="0" tIns="0" bIns="0" anchor="t">
-            <a:spAutoFit/>
-          </a:bodyPr>
-          <a:lstStyle/>
-          <a:p>
-            <a:pPr algn="l">
-              <a:lnSpc>
-                <a:spcPct val="110000"/>
-              </a:lnSpc>
-            </a:pPr>
-            <a:r>
-              <a:rPr sz="1700" b="1" i="0">
+              <a:t>YOUR DOCUMENTS</a:t>
+            </a:r>
+          </a:p>
+        </p:txBody>
+      </p:sp>
+      <p:sp>
+        <p:nvSpPr>
+          <p:cNvPr id="26" name="TextBox 25"/>
+          <p:cNvSpPr txBox="1"/>
+          <p:nvPr/>
+        </p:nvSpPr>
+        <p:spPr>
+          <a:xfrm>
+            <a:off x="731520" y="5212080"/>
+            <a:ext cx="10728655" cy="365760"/>
+          </a:xfrm>
+          <a:prstGeom prst="rect">
+            <a:avLst/>
+          </a:prstGeom>
+          <a:noFill/>
+        </p:spPr>
+        <p:txBody>
+          <a:bodyPr wrap="square" lIns="0" rIns="0" tIns="0" bIns="0" anchor="t">
+            <a:spAutoFit/>
+          </a:bodyPr>
+          <a:lstStyle/>
+          <a:p>
+            <a:pPr algn="l">
+              <a:lnSpc>
+                <a:spcPct val="110000"/>
+              </a:lnSpc>
+            </a:pPr>
+            <a:r>
+              <a:rPr sz="1100" b="1" i="0">
+                <a:solidFill>
+                  <a:srgbClr val="6A26D8"/>
+                </a:solidFill>
+                <a:latin typeface="Inter"/>
+              </a:rPr>
+              <a:t>01 </a:t>
+            </a:r>
+            <a:r>
+              <a:rPr sz="1100" b="0" i="0">
                 <a:solidFill>
                   <a:srgbClr val="141414"/>
                 </a:solidFill>
                 <a:latin typeface="Inter"/>
               </a:rPr>
-              <a:t>PKR 6,000</a:t>
-            </a:r>
-          </a:p>
-        </p:txBody>
-      </p:sp>
-      <p:sp>
-        <p:nvSpPr>
-          <p:cNvPr id="33" name="TextBox 32"/>
-          <p:cNvSpPr txBox="1"/>
-          <p:nvPr/>
-        </p:nvSpPr>
-        <p:spPr>
-          <a:xfrm>
-            <a:off x="731520" y="5440680"/>
-            <a:ext cx="10728655" cy="457200"/>
-          </a:xfrm>
-          <a:prstGeom prst="rect">
-            <a:avLst/>
-          </a:prstGeom>
-          <a:noFill/>
-        </p:spPr>
-        <p:txBody>
-          <a:bodyPr wrap="square" lIns="0" rIns="0" tIns="0" bIns="0" anchor="t">
-            <a:spAutoFit/>
-          </a:bodyPr>
-          <a:lstStyle/>
-          <a:p>
-            <a:pPr algn="ctr">
-              <a:lnSpc>
-                <a:spcPct val="110000"/>
-              </a:lnSpc>
-            </a:pPr>
-            <a:r>
-              <a:rPr sz="1150" b="0" i="0">
-                <a:solidFill>
-                  <a:srgbClr val="6B6878"/>
+              <a:t>Welcome Pack      </a:t>
+            </a:r>
+            <a:r>
+              <a:rPr sz="1100" b="1" i="0">
+                <a:solidFill>
+                  <a:srgbClr val="6A26D8"/>
                 </a:solidFill>
                 <a:latin typeface="Inter"/>
               </a:rPr>
-              <a:t>Bank transfer, Easypaisa, JazzCash or cash  ·  A receipt for every payment  ·  A signed agreement for both sides' records.</a:t>
+              <a:t>02 </a:t>
+            </a:r>
+            <a:r>
+              <a:rPr sz="1100" b="0" i="0">
+                <a:solidFill>
+                  <a:srgbClr val="141414"/>
+                </a:solidFill>
+                <a:latin typeface="Inter"/>
+              </a:rPr>
+              <a:t>Service Agreement      </a:t>
+            </a:r>
+            <a:r>
+              <a:rPr sz="1100" b="1" i="0">
+                <a:solidFill>
+                  <a:srgbClr val="6A26D8"/>
+                </a:solidFill>
+                <a:latin typeface="Inter"/>
+              </a:rPr>
+              <a:t>03 </a:t>
+            </a:r>
+            <a:r>
+              <a:rPr sz="1100" b="0" i="0">
+                <a:solidFill>
+                  <a:srgbClr val="141414"/>
+                </a:solidFill>
+                <a:latin typeface="Inter"/>
+              </a:rPr>
+              <a:t>Go-Live &amp; Handover</a:t>
             </a:r>
           </a:p>
         </p:txBody>
@@ -5268,2629 +5035,6 @@
 </file>
 
 <file path=ppt/slides/slide11.xml><?xml version="1.0" encoding="utf-8"?>
-<p:sld xmlns:a="http://schemas.openxmlformats.org/drawingml/2006/main" xmlns:p="http://schemas.openxmlformats.org/presentationml/2006/main" xmlns:r="http://schemas.openxmlformats.org/officeDocument/2006/relationships">
-  <p:cSld>
-    <p:spTree>
-      <p:nvGrpSpPr>
-        <p:cNvPr id="1" name=""/>
-        <p:cNvGrpSpPr/>
-        <p:nvPr/>
-      </p:nvGrpSpPr>
-      <p:grpSpPr/>
-      <p:pic>
-        <p:nvPicPr>
-          <p:cNvPr id="2" name="Picture 1" descr="obd-mark.png"/>
-          <p:cNvPicPr>
-            <a:picLocks noChangeAspect="1"/>
-          </p:cNvPicPr>
-          <p:nvPr/>
-        </p:nvPicPr>
-        <p:blipFill>
-          <a:blip r:embed="rId2"/>
-          <a:stretch>
-            <a:fillRect/>
-          </a:stretch>
-        </p:blipFill>
-        <p:spPr>
-          <a:xfrm>
-            <a:off x="731520" y="384048"/>
-            <a:ext cx="394836" cy="384048"/>
-          </a:xfrm>
-          <a:prstGeom prst="rect">
-            <a:avLst/>
-          </a:prstGeom>
-        </p:spPr>
-      </p:pic>
-      <p:sp>
-        <p:nvSpPr>
-          <p:cNvPr id="3" name="TextBox 2"/>
-          <p:cNvSpPr txBox="1"/>
-          <p:nvPr/>
-        </p:nvSpPr>
-        <p:spPr>
-          <a:xfrm>
-            <a:off x="1255105" y="376368"/>
-            <a:ext cx="2286000" cy="274320"/>
-          </a:xfrm>
-          <a:prstGeom prst="rect">
-            <a:avLst/>
-          </a:prstGeom>
-          <a:noFill/>
-        </p:spPr>
-        <p:txBody>
-          <a:bodyPr wrap="square" lIns="0" rIns="0" tIns="0" bIns="0" anchor="t">
-            <a:spAutoFit/>
-          </a:bodyPr>
-          <a:lstStyle/>
-          <a:p>
-            <a:pPr algn="l">
-              <a:lnSpc>
-                <a:spcPct val="110000"/>
-              </a:lnSpc>
-            </a:pPr>
-            <a:r>
-              <a:rPr sz="1200" b="1" i="0">
-                <a:solidFill>
-                  <a:srgbClr val="141414"/>
-                </a:solidFill>
-                <a:latin typeface="Playfair Display"/>
-              </a:rPr>
-              <a:t>OBD</a:t>
-            </a:r>
-          </a:p>
-        </p:txBody>
-      </p:sp>
-      <p:sp>
-        <p:nvSpPr>
-          <p:cNvPr id="4" name="TextBox 3"/>
-          <p:cNvSpPr txBox="1"/>
-          <p:nvPr/>
-        </p:nvSpPr>
-        <p:spPr>
-          <a:xfrm>
-            <a:off x="1255105" y="606795"/>
-            <a:ext cx="2286000" cy="182880"/>
-          </a:xfrm>
-          <a:prstGeom prst="rect">
-            <a:avLst/>
-          </a:prstGeom>
-          <a:noFill/>
-        </p:spPr>
-        <p:txBody>
-          <a:bodyPr wrap="square" lIns="0" rIns="0" tIns="0" bIns="0" anchor="t">
-            <a:spAutoFit/>
-          </a:bodyPr>
-          <a:lstStyle/>
-          <a:p>
-            <a:pPr algn="l">
-              <a:lnSpc>
-                <a:spcPct val="110000"/>
-              </a:lnSpc>
-            </a:pPr>
-            <a:r>
-              <a:rPr sz="700" b="1" i="0">
-                <a:solidFill>
-                  <a:srgbClr val="6A26D8"/>
-                </a:solidFill>
-                <a:latin typeface="Inter"/>
-              </a:rPr>
-              <a:t>A I   S O L U T I O N S</a:t>
-            </a:r>
-          </a:p>
-        </p:txBody>
-      </p:sp>
-      <p:sp>
-        <p:nvSpPr>
-          <p:cNvPr id="5" name="TextBox 4"/>
-          <p:cNvSpPr txBox="1"/>
-          <p:nvPr/>
-        </p:nvSpPr>
-        <p:spPr>
-          <a:xfrm>
-            <a:off x="7802575" y="475488"/>
-            <a:ext cx="3657600" cy="274320"/>
-          </a:xfrm>
-          <a:prstGeom prst="rect">
-            <a:avLst/>
-          </a:prstGeom>
-          <a:noFill/>
-        </p:spPr>
-        <p:txBody>
-          <a:bodyPr wrap="square" lIns="0" rIns="0" tIns="0" bIns="0" anchor="t">
-            <a:spAutoFit/>
-          </a:bodyPr>
-          <a:lstStyle/>
-          <a:p>
-            <a:pPr algn="r">
-              <a:lnSpc>
-                <a:spcPct val="110000"/>
-              </a:lnSpc>
-            </a:pPr>
-            <a:r>
-              <a:rPr sz="900" b="1" i="0">
-                <a:solidFill>
-                  <a:srgbClr val="6B6878"/>
-                </a:solidFill>
-                <a:latin typeface="Inter"/>
-              </a:rPr>
-              <a:t>CARE &amp; SUPPORT</a:t>
-            </a:r>
-          </a:p>
-        </p:txBody>
-      </p:sp>
-      <p:sp>
-        <p:nvSpPr>
-          <p:cNvPr id="6" name="Rectangle 5"/>
-          <p:cNvSpPr/>
-          <p:nvPr/>
-        </p:nvSpPr>
-        <p:spPr>
-          <a:xfrm>
-            <a:off x="731520" y="6291072"/>
-            <a:ext cx="10728655" cy="7620"/>
-          </a:xfrm>
-          <a:prstGeom prst="rect">
-            <a:avLst/>
-          </a:prstGeom>
-          <a:solidFill>
-            <a:srgbClr val="E6E1F0"/>
-          </a:solidFill>
-          <a:ln>
-            <a:noFill/>
-          </a:ln>
-          <a:effectLst/>
-        </p:spPr>
-        <p:style>
-          <a:lnRef idx="1">
-            <a:schemeClr val="accent1"/>
-          </a:lnRef>
-          <a:fillRef idx="3">
-            <a:schemeClr val="accent1"/>
-          </a:fillRef>
-          <a:effectRef idx="2">
-            <a:schemeClr val="accent1"/>
-          </a:effectRef>
-          <a:fontRef idx="minor">
-            <a:schemeClr val="lt1"/>
-          </a:fontRef>
-        </p:style>
-        <p:txBody>
-          <a:bodyPr rtlCol="0" anchor="ctr"/>
-          <a:lstStyle/>
-          <a:p>
-            <a:pPr algn="ctr"/>
-          </a:p>
-        </p:txBody>
-      </p:sp>
-      <p:sp>
-        <p:nvSpPr>
-          <p:cNvPr id="7" name="TextBox 6"/>
-          <p:cNvSpPr txBox="1"/>
-          <p:nvPr/>
-        </p:nvSpPr>
-        <p:spPr>
-          <a:xfrm>
-            <a:off x="731520" y="6400800"/>
-            <a:ext cx="5486400" cy="274320"/>
-          </a:xfrm>
-          <a:prstGeom prst="rect">
-            <a:avLst/>
-          </a:prstGeom>
-          <a:noFill/>
-        </p:spPr>
-        <p:txBody>
-          <a:bodyPr wrap="square" lIns="0" rIns="0" tIns="0" bIns="0" anchor="t">
-            <a:spAutoFit/>
-          </a:bodyPr>
-          <a:lstStyle/>
-          <a:p>
-            <a:pPr algn="l">
-              <a:lnSpc>
-                <a:spcPct val="110000"/>
-              </a:lnSpc>
-            </a:pPr>
-            <a:r>
-              <a:rPr sz="850" b="0" i="0">
-                <a:solidFill>
-                  <a:srgbClr val="6B6878"/>
-                </a:solidFill>
-                <a:latin typeface="Inter"/>
-              </a:rPr>
-              <a:t>OBD AI Solutions  ·  OBD-GFXT-2026</a:t>
-            </a:r>
-          </a:p>
-        </p:txBody>
-      </p:sp>
-      <p:sp>
-        <p:nvSpPr>
-          <p:cNvPr id="8" name="TextBox 7"/>
-          <p:cNvSpPr txBox="1"/>
-          <p:nvPr/>
-        </p:nvSpPr>
-        <p:spPr>
-          <a:xfrm>
-            <a:off x="9631375" y="6400800"/>
-            <a:ext cx="1828800" cy="274320"/>
-          </a:xfrm>
-          <a:prstGeom prst="rect">
-            <a:avLst/>
-          </a:prstGeom>
-          <a:noFill/>
-        </p:spPr>
-        <p:txBody>
-          <a:bodyPr wrap="square" lIns="0" rIns="0" tIns="0" bIns="0" anchor="t">
-            <a:spAutoFit/>
-          </a:bodyPr>
-          <a:lstStyle/>
-          <a:p>
-            <a:pPr algn="r">
-              <a:lnSpc>
-                <a:spcPct val="110000"/>
-              </a:lnSpc>
-            </a:pPr>
-            <a:r>
-              <a:rPr sz="850" b="0" i="0">
-                <a:solidFill>
-                  <a:srgbClr val="6B6878"/>
-                </a:solidFill>
-                <a:latin typeface="Inter"/>
-              </a:rPr>
-              <a:t>11 / 13</a:t>
-            </a:r>
-          </a:p>
-        </p:txBody>
-      </p:sp>
-      <p:sp>
-        <p:nvSpPr>
-          <p:cNvPr id="9" name="TextBox 8"/>
-          <p:cNvSpPr txBox="1"/>
-          <p:nvPr/>
-        </p:nvSpPr>
-        <p:spPr>
-          <a:xfrm>
-            <a:off x="731520" y="1143000"/>
-            <a:ext cx="7315200" cy="274320"/>
-          </a:xfrm>
-          <a:prstGeom prst="rect">
-            <a:avLst/>
-          </a:prstGeom>
-          <a:noFill/>
-        </p:spPr>
-        <p:txBody>
-          <a:bodyPr wrap="square" lIns="0" rIns="0" tIns="0" bIns="0" anchor="t">
-            <a:spAutoFit/>
-          </a:bodyPr>
-          <a:lstStyle/>
-          <a:p>
-            <a:pPr algn="l">
-              <a:lnSpc>
-                <a:spcPct val="110000"/>
-              </a:lnSpc>
-            </a:pPr>
-            <a:r>
-              <a:rPr sz="1000" b="1" i="0">
-                <a:solidFill>
-                  <a:srgbClr val="6A26D8"/>
-                </a:solidFill>
-                <a:latin typeface="Inter"/>
-              </a:rPr>
-              <a:t>10 · AFTER LAUNCH</a:t>
-            </a:r>
-          </a:p>
-        </p:txBody>
-      </p:sp>
-      <p:sp>
-        <p:nvSpPr>
-          <p:cNvPr id="10" name="TextBox 9"/>
-          <p:cNvSpPr txBox="1"/>
-          <p:nvPr/>
-        </p:nvSpPr>
-        <p:spPr>
-          <a:xfrm>
-            <a:off x="731520" y="1435608"/>
-            <a:ext cx="10515600" cy="822960"/>
-          </a:xfrm>
-          <a:prstGeom prst="rect">
-            <a:avLst/>
-          </a:prstGeom>
-          <a:noFill/>
-        </p:spPr>
-        <p:txBody>
-          <a:bodyPr wrap="square" lIns="0" rIns="0" tIns="0" bIns="0" anchor="t">
-            <a:spAutoFit/>
-          </a:bodyPr>
-          <a:lstStyle/>
-          <a:p>
-            <a:pPr algn="l">
-              <a:lnSpc>
-                <a:spcPct val="110000"/>
-              </a:lnSpc>
-            </a:pPr>
-            <a:r>
-              <a:rPr sz="3400" b="0" i="0">
-                <a:solidFill>
-                  <a:srgbClr val="141414"/>
-                </a:solidFill>
-                <a:latin typeface="Playfair Display"/>
-              </a:rPr>
-              <a:t>Care that doesn't stop </a:t>
-            </a:r>
-            <a:r>
-              <a:rPr sz="3400" b="0" i="1">
-                <a:solidFill>
-                  <a:srgbClr val="6A26D8"/>
-                </a:solidFill>
-                <a:latin typeface="Playfair Display"/>
-              </a:rPr>
-              <a:t>at go-live.</a:t>
-            </a:r>
-          </a:p>
-        </p:txBody>
-      </p:sp>
-      <p:sp>
-        <p:nvSpPr>
-          <p:cNvPr id="11" name="Rectangle 10"/>
-          <p:cNvSpPr/>
-          <p:nvPr/>
-        </p:nvSpPr>
-        <p:spPr>
-          <a:xfrm>
-            <a:off x="731520" y="2221992"/>
-            <a:ext cx="320040" cy="30480"/>
-          </a:xfrm>
-          <a:prstGeom prst="rect">
-            <a:avLst/>
-          </a:prstGeom>
-          <a:solidFill>
-            <a:srgbClr val="6A26D8"/>
-          </a:solidFill>
-          <a:ln>
-            <a:noFill/>
-          </a:ln>
-          <a:effectLst/>
-        </p:spPr>
-        <p:style>
-          <a:lnRef idx="1">
-            <a:schemeClr val="accent1"/>
-          </a:lnRef>
-          <a:fillRef idx="3">
-            <a:schemeClr val="accent1"/>
-          </a:fillRef>
-          <a:effectRef idx="2">
-            <a:schemeClr val="accent1"/>
-          </a:effectRef>
-          <a:fontRef idx="minor">
-            <a:schemeClr val="lt1"/>
-          </a:fontRef>
-        </p:style>
-        <p:txBody>
-          <a:bodyPr rtlCol="0" anchor="ctr"/>
-          <a:lstStyle/>
-          <a:p>
-            <a:pPr algn="ctr"/>
-          </a:p>
-        </p:txBody>
-      </p:sp>
-      <p:sp>
-        <p:nvSpPr>
-          <p:cNvPr id="12" name="Rectangle 11"/>
-          <p:cNvSpPr/>
-          <p:nvPr/>
-        </p:nvSpPr>
-        <p:spPr>
-          <a:xfrm>
-            <a:off x="1051560" y="2221992"/>
-            <a:ext cx="228600" cy="30480"/>
-          </a:xfrm>
-          <a:prstGeom prst="rect">
-            <a:avLst/>
-          </a:prstGeom>
-          <a:solidFill>
-            <a:srgbClr val="2B3BB8"/>
-          </a:solidFill>
-          <a:ln>
-            <a:noFill/>
-          </a:ln>
-          <a:effectLst/>
-        </p:spPr>
-        <p:style>
-          <a:lnRef idx="1">
-            <a:schemeClr val="accent1"/>
-          </a:lnRef>
-          <a:fillRef idx="3">
-            <a:schemeClr val="accent1"/>
-          </a:fillRef>
-          <a:effectRef idx="2">
-            <a:schemeClr val="accent1"/>
-          </a:effectRef>
-          <a:fontRef idx="minor">
-            <a:schemeClr val="lt1"/>
-          </a:fontRef>
-        </p:style>
-        <p:txBody>
-          <a:bodyPr rtlCol="0" anchor="ctr"/>
-          <a:lstStyle/>
-          <a:p>
-            <a:pPr algn="ctr"/>
-          </a:p>
-        </p:txBody>
-      </p:sp>
-      <p:sp>
-        <p:nvSpPr>
-          <p:cNvPr id="13" name="Rounded Rectangle 12"/>
-          <p:cNvSpPr/>
-          <p:nvPr/>
-        </p:nvSpPr>
-        <p:spPr>
-          <a:xfrm>
-            <a:off x="731520" y="2514600"/>
-            <a:ext cx="3931920" cy="3429000"/>
-          </a:xfrm>
-          <a:prstGeom prst="roundRect">
-            <a:avLst>
-              <a:gd name="adj" fmla="val 5000"/>
-            </a:avLst>
-          </a:prstGeom>
-          <a:solidFill>
-            <a:srgbClr val="6A26D8"/>
-          </a:solidFill>
-          <a:ln w="9525">
-            <a:solidFill>
-              <a:srgbClr val="6A26D8"/>
-            </a:solidFill>
-          </a:ln>
-          <a:effectLst/>
-        </p:spPr>
-        <p:style>
-          <a:lnRef idx="1">
-            <a:schemeClr val="accent1"/>
-          </a:lnRef>
-          <a:fillRef idx="3">
-            <a:schemeClr val="accent1"/>
-          </a:fillRef>
-          <a:effectRef idx="2">
-            <a:schemeClr val="accent1"/>
-          </a:effectRef>
-          <a:fontRef idx="minor">
-            <a:schemeClr val="lt1"/>
-          </a:fontRef>
-        </p:style>
-        <p:txBody>
-          <a:bodyPr rtlCol="0" anchor="ctr"/>
-          <a:lstStyle/>
-          <a:p>
-            <a:pPr algn="ctr"/>
-          </a:p>
-        </p:txBody>
-      </p:sp>
-      <p:sp>
-        <p:nvSpPr>
-          <p:cNvPr id="14" name="TextBox 13"/>
-          <p:cNvSpPr txBox="1"/>
-          <p:nvPr/>
-        </p:nvSpPr>
-        <p:spPr>
-          <a:xfrm>
-            <a:off x="1097280" y="2788920"/>
-            <a:ext cx="3291840" cy="274320"/>
-          </a:xfrm>
-          <a:prstGeom prst="rect">
-            <a:avLst/>
-          </a:prstGeom>
-          <a:noFill/>
-        </p:spPr>
-        <p:txBody>
-          <a:bodyPr wrap="square" lIns="0" rIns="0" tIns="0" bIns="0" anchor="t">
-            <a:spAutoFit/>
-          </a:bodyPr>
-          <a:lstStyle/>
-          <a:p>
-            <a:pPr algn="l">
-              <a:lnSpc>
-                <a:spcPct val="110000"/>
-              </a:lnSpc>
-            </a:pPr>
-            <a:r>
-              <a:rPr sz="950" b="1" i="0">
-                <a:solidFill>
-                  <a:srgbClr val="C9B4FF"/>
-                </a:solidFill>
-                <a:latin typeface="Inter"/>
-              </a:rPr>
-              <a:t>SUPPORTED UNTIL</a:t>
-            </a:r>
-          </a:p>
-        </p:txBody>
-      </p:sp>
-      <p:sp>
-        <p:nvSpPr>
-          <p:cNvPr id="15" name="TextBox 14"/>
-          <p:cNvSpPr txBox="1"/>
-          <p:nvPr/>
-        </p:nvSpPr>
-        <p:spPr>
-          <a:xfrm>
-            <a:off x="1097280" y="3108960"/>
-            <a:ext cx="3291840" cy="1280160"/>
-          </a:xfrm>
-          <a:prstGeom prst="rect">
-            <a:avLst/>
-          </a:prstGeom>
-          <a:noFill/>
-        </p:spPr>
-        <p:txBody>
-          <a:bodyPr wrap="square" lIns="0" rIns="0" tIns="0" bIns="0" anchor="t">
-            <a:spAutoFit/>
-          </a:bodyPr>
-          <a:lstStyle/>
-          <a:p>
-            <a:pPr algn="l">
-              <a:lnSpc>
-                <a:spcPct val="100000"/>
-              </a:lnSpc>
-            </a:pPr>
-            <a:r>
-              <a:rPr sz="3000" b="0" i="0">
-                <a:solidFill>
-                  <a:srgbClr val="FFFFFF"/>
-                </a:solidFill>
-                <a:latin typeface="Playfair Display"/>
-              </a:rPr>
-              <a:t>30 September 2027</a:t>
-            </a:r>
-          </a:p>
-        </p:txBody>
-      </p:sp>
-      <p:sp>
-        <p:nvSpPr>
-          <p:cNvPr id="16" name="TextBox 15"/>
-          <p:cNvSpPr txBox="1"/>
-          <p:nvPr/>
-        </p:nvSpPr>
-        <p:spPr>
-          <a:xfrm>
-            <a:off x="1097280" y="4343400"/>
-            <a:ext cx="3200400" cy="1463040"/>
-          </a:xfrm>
-          <a:prstGeom prst="rect">
-            <a:avLst/>
-          </a:prstGeom>
-          <a:noFill/>
-        </p:spPr>
-        <p:txBody>
-          <a:bodyPr wrap="square" lIns="0" rIns="0" tIns="0" bIns="0" anchor="t">
-            <a:spAutoFit/>
-          </a:bodyPr>
-          <a:lstStyle/>
-          <a:p>
-            <a:pPr algn="l">
-              <a:lnSpc>
-                <a:spcPct val="130000"/>
-              </a:lnSpc>
-              <a:spcAft>
-                <a:spcPts val="400"/>
-              </a:spcAft>
-            </a:pPr>
-            <a:r>
-              <a:rPr sz="1150" b="1" i="0">
-                <a:solidFill>
-                  <a:srgbClr val="FFFFFF"/>
-                </a:solidFill>
-                <a:latin typeface="Inter"/>
-              </a:rPr>
-              <a:t>+ Free minor UI/content changes for the first 30 days. </a:t>
-            </a:r>
-          </a:p>
-          <a:p>
-            <a:pPr algn="l">
-              <a:lnSpc>
-                <a:spcPct val="130000"/>
-              </a:lnSpc>
-              <a:spcAft>
-                <a:spcPts val="400"/>
-              </a:spcAft>
-            </a:pPr>
-            <a:r>
-              <a:rPr sz="1150" b="0" i="0">
-                <a:solidFill>
-                  <a:srgbClr val="C9B4FF"/>
-                </a:solidFill>
-                <a:latin typeface="Inter"/>
-              </a:rPr>
-              <a:t>Something we don't normally include. Complete Care package.</a:t>
-            </a:r>
-          </a:p>
-        </p:txBody>
-      </p:sp>
-      <p:sp>
-        <p:nvSpPr>
-          <p:cNvPr id="17" name="TextBox 16"/>
-          <p:cNvSpPr txBox="1"/>
-          <p:nvPr/>
-        </p:nvSpPr>
-        <p:spPr>
-          <a:xfrm>
-            <a:off x="4983480" y="2514600"/>
-            <a:ext cx="1828800" cy="274320"/>
-          </a:xfrm>
-          <a:prstGeom prst="rect">
-            <a:avLst/>
-          </a:prstGeom>
-          <a:noFill/>
-        </p:spPr>
-        <p:txBody>
-          <a:bodyPr wrap="square" lIns="0" rIns="0" tIns="0" bIns="0" anchor="t">
-            <a:spAutoFit/>
-          </a:bodyPr>
-          <a:lstStyle/>
-          <a:p>
-            <a:pPr algn="l">
-              <a:lnSpc>
-                <a:spcPct val="110000"/>
-              </a:lnSpc>
-            </a:pPr>
-            <a:r>
-              <a:rPr sz="900" b="1" i="0">
-                <a:solidFill>
-                  <a:srgbClr val="6B6878"/>
-                </a:solidFill>
-                <a:latin typeface="Inter"/>
-              </a:rPr>
-              <a:t>PRIORITY</a:t>
-            </a:r>
-          </a:p>
-        </p:txBody>
-      </p:sp>
-      <p:sp>
-        <p:nvSpPr>
-          <p:cNvPr id="18" name="TextBox 17"/>
-          <p:cNvSpPr txBox="1"/>
-          <p:nvPr/>
-        </p:nvSpPr>
-        <p:spPr>
-          <a:xfrm>
-            <a:off x="6446520" y="2514600"/>
-            <a:ext cx="2743200" cy="274320"/>
-          </a:xfrm>
-          <a:prstGeom prst="rect">
-            <a:avLst/>
-          </a:prstGeom>
-          <a:noFill/>
-        </p:spPr>
-        <p:txBody>
-          <a:bodyPr wrap="square" lIns="0" rIns="0" tIns="0" bIns="0" anchor="t">
-            <a:spAutoFit/>
-          </a:bodyPr>
-          <a:lstStyle/>
-          <a:p>
-            <a:pPr algn="l">
-              <a:lnSpc>
-                <a:spcPct val="110000"/>
-              </a:lnSpc>
-            </a:pPr>
-            <a:r>
-              <a:rPr sz="900" b="1" i="0">
-                <a:solidFill>
-                  <a:srgbClr val="6B6878"/>
-                </a:solidFill>
-                <a:latin typeface="Inter"/>
-              </a:rPr>
-              <a:t>EXAMPLE</a:t>
-            </a:r>
-          </a:p>
-        </p:txBody>
-      </p:sp>
-      <p:sp>
-        <p:nvSpPr>
-          <p:cNvPr id="19" name="TextBox 18"/>
-          <p:cNvSpPr txBox="1"/>
-          <p:nvPr/>
-        </p:nvSpPr>
-        <p:spPr>
-          <a:xfrm>
-            <a:off x="9464040" y="2514600"/>
-            <a:ext cx="2011680" cy="274320"/>
-          </a:xfrm>
-          <a:prstGeom prst="rect">
-            <a:avLst/>
-          </a:prstGeom>
-          <a:noFill/>
-        </p:spPr>
-        <p:txBody>
-          <a:bodyPr wrap="square" lIns="0" rIns="0" tIns="0" bIns="0" anchor="t">
-            <a:spAutoFit/>
-          </a:bodyPr>
-          <a:lstStyle/>
-          <a:p>
-            <a:pPr algn="r">
-              <a:lnSpc>
-                <a:spcPct val="110000"/>
-              </a:lnSpc>
-            </a:pPr>
-            <a:r>
-              <a:rPr sz="900" b="1" i="0">
-                <a:solidFill>
-                  <a:srgbClr val="6B6878"/>
-                </a:solidFill>
-                <a:latin typeface="Inter"/>
-              </a:rPr>
-              <a:t>FIRST RESPONSE</a:t>
-            </a:r>
-          </a:p>
-        </p:txBody>
-      </p:sp>
-      <p:sp>
-        <p:nvSpPr>
-          <p:cNvPr id="20" name="Rectangle 19"/>
-          <p:cNvSpPr/>
-          <p:nvPr/>
-        </p:nvSpPr>
-        <p:spPr>
-          <a:xfrm>
-            <a:off x="4983480" y="2807208"/>
-            <a:ext cx="6473952" cy="15240"/>
-          </a:xfrm>
-          <a:prstGeom prst="rect">
-            <a:avLst/>
-          </a:prstGeom>
-          <a:solidFill>
-            <a:srgbClr val="141414"/>
-          </a:solidFill>
-          <a:ln>
-            <a:noFill/>
-          </a:ln>
-          <a:effectLst/>
-        </p:spPr>
-        <p:style>
-          <a:lnRef idx="1">
-            <a:schemeClr val="accent1"/>
-          </a:lnRef>
-          <a:fillRef idx="3">
-            <a:schemeClr val="accent1"/>
-          </a:fillRef>
-          <a:effectRef idx="2">
-            <a:schemeClr val="accent1"/>
-          </a:effectRef>
-          <a:fontRef idx="minor">
-            <a:schemeClr val="lt1"/>
-          </a:fontRef>
-        </p:style>
-        <p:txBody>
-          <a:bodyPr rtlCol="0" anchor="ctr"/>
-          <a:lstStyle/>
-          <a:p>
-            <a:pPr algn="ctr"/>
-          </a:p>
-        </p:txBody>
-      </p:sp>
-      <p:sp>
-        <p:nvSpPr>
-          <p:cNvPr id="21" name="TextBox 20"/>
-          <p:cNvSpPr txBox="1"/>
-          <p:nvPr/>
-        </p:nvSpPr>
-        <p:spPr>
-          <a:xfrm>
-            <a:off x="4983480" y="2971800"/>
-            <a:ext cx="1371600" cy="365760"/>
-          </a:xfrm>
-          <a:prstGeom prst="rect">
-            <a:avLst/>
-          </a:prstGeom>
-          <a:noFill/>
-        </p:spPr>
-        <p:txBody>
-          <a:bodyPr wrap="square" lIns="0" rIns="0" tIns="0" bIns="0" anchor="t">
-            <a:spAutoFit/>
-          </a:bodyPr>
-          <a:lstStyle/>
-          <a:p>
-            <a:pPr algn="l">
-              <a:lnSpc>
-                <a:spcPct val="110000"/>
-              </a:lnSpc>
-            </a:pPr>
-            <a:r>
-              <a:rPr sz="1400" b="1" i="0">
-                <a:solidFill>
-                  <a:srgbClr val="6A26D8"/>
-                </a:solidFill>
-                <a:latin typeface="Inter"/>
-              </a:rPr>
-              <a:t>Critical</a:t>
-            </a:r>
-          </a:p>
-        </p:txBody>
-      </p:sp>
-      <p:sp>
-        <p:nvSpPr>
-          <p:cNvPr id="22" name="TextBox 21"/>
-          <p:cNvSpPr txBox="1"/>
-          <p:nvPr/>
-        </p:nvSpPr>
-        <p:spPr>
-          <a:xfrm>
-            <a:off x="6446520" y="2971800"/>
-            <a:ext cx="3017520" cy="365760"/>
-          </a:xfrm>
-          <a:prstGeom prst="rect">
-            <a:avLst/>
-          </a:prstGeom>
-          <a:noFill/>
-        </p:spPr>
-        <p:txBody>
-          <a:bodyPr wrap="square" lIns="0" rIns="0" tIns="0" bIns="0" anchor="t">
-            <a:spAutoFit/>
-          </a:bodyPr>
-          <a:lstStyle/>
-          <a:p>
-            <a:pPr algn="l">
-              <a:lnSpc>
-                <a:spcPct val="110000"/>
-              </a:lnSpc>
-            </a:pPr>
-            <a:r>
-              <a:rPr sz="1300" b="0" i="0">
-                <a:solidFill>
-                  <a:srgbClr val="2A2A2D"/>
-                </a:solidFill>
-                <a:latin typeface="Inter"/>
-              </a:rPr>
-              <a:t>Website or email down</a:t>
-            </a:r>
-          </a:p>
-        </p:txBody>
-      </p:sp>
-      <p:sp>
-        <p:nvSpPr>
-          <p:cNvPr id="23" name="TextBox 22"/>
-          <p:cNvSpPr txBox="1"/>
-          <p:nvPr/>
-        </p:nvSpPr>
-        <p:spPr>
-          <a:xfrm>
-            <a:off x="9464040" y="2971800"/>
-            <a:ext cx="1993392" cy="365760"/>
-          </a:xfrm>
-          <a:prstGeom prst="rect">
-            <a:avLst/>
-          </a:prstGeom>
-          <a:noFill/>
-        </p:spPr>
-        <p:txBody>
-          <a:bodyPr wrap="square" lIns="0" rIns="0" tIns="0" bIns="0" anchor="t">
-            <a:spAutoFit/>
-          </a:bodyPr>
-          <a:lstStyle/>
-          <a:p>
-            <a:pPr algn="r">
-              <a:lnSpc>
-                <a:spcPct val="110000"/>
-              </a:lnSpc>
-            </a:pPr>
-            <a:r>
-              <a:rPr sz="1300" b="0" i="0">
-                <a:solidFill>
-                  <a:srgbClr val="141414"/>
-                </a:solidFill>
-                <a:latin typeface="Inter"/>
-              </a:rPr>
-              <a:t>Same business day</a:t>
-            </a:r>
-          </a:p>
-        </p:txBody>
-      </p:sp>
-      <p:sp>
-        <p:nvSpPr>
-          <p:cNvPr id="24" name="Rectangle 23"/>
-          <p:cNvSpPr/>
-          <p:nvPr/>
-        </p:nvSpPr>
-        <p:spPr>
-          <a:xfrm>
-            <a:off x="4983480" y="3383280"/>
-            <a:ext cx="6473952" cy="7620"/>
-          </a:xfrm>
-          <a:prstGeom prst="rect">
-            <a:avLst/>
-          </a:prstGeom>
-          <a:solidFill>
-            <a:srgbClr val="E6E1F0"/>
-          </a:solidFill>
-          <a:ln>
-            <a:noFill/>
-          </a:ln>
-          <a:effectLst/>
-        </p:spPr>
-        <p:style>
-          <a:lnRef idx="1">
-            <a:schemeClr val="accent1"/>
-          </a:lnRef>
-          <a:fillRef idx="3">
-            <a:schemeClr val="accent1"/>
-          </a:fillRef>
-          <a:effectRef idx="2">
-            <a:schemeClr val="accent1"/>
-          </a:effectRef>
-          <a:fontRef idx="minor">
-            <a:schemeClr val="lt1"/>
-          </a:fontRef>
-        </p:style>
-        <p:txBody>
-          <a:bodyPr rtlCol="0" anchor="ctr"/>
-          <a:lstStyle/>
-          <a:p>
-            <a:pPr algn="ctr"/>
-          </a:p>
-        </p:txBody>
-      </p:sp>
-      <p:sp>
-        <p:nvSpPr>
-          <p:cNvPr id="25" name="TextBox 24"/>
-          <p:cNvSpPr txBox="1"/>
-          <p:nvPr/>
-        </p:nvSpPr>
-        <p:spPr>
-          <a:xfrm>
-            <a:off x="4983480" y="3520440"/>
-            <a:ext cx="1371600" cy="365760"/>
-          </a:xfrm>
-          <a:prstGeom prst="rect">
-            <a:avLst/>
-          </a:prstGeom>
-          <a:noFill/>
-        </p:spPr>
-        <p:txBody>
-          <a:bodyPr wrap="square" lIns="0" rIns="0" tIns="0" bIns="0" anchor="t">
-            <a:spAutoFit/>
-          </a:bodyPr>
-          <a:lstStyle/>
-          <a:p>
-            <a:pPr algn="l">
-              <a:lnSpc>
-                <a:spcPct val="110000"/>
-              </a:lnSpc>
-            </a:pPr>
-            <a:r>
-              <a:rPr sz="1400" b="1" i="0">
-                <a:solidFill>
-                  <a:srgbClr val="141414"/>
-                </a:solidFill>
-                <a:latin typeface="Inter"/>
-              </a:rPr>
-              <a:t>High</a:t>
-            </a:r>
-          </a:p>
-        </p:txBody>
-      </p:sp>
-      <p:sp>
-        <p:nvSpPr>
-          <p:cNvPr id="26" name="TextBox 25"/>
-          <p:cNvSpPr txBox="1"/>
-          <p:nvPr/>
-        </p:nvSpPr>
-        <p:spPr>
-          <a:xfrm>
-            <a:off x="6446520" y="3520440"/>
-            <a:ext cx="3017520" cy="365760"/>
-          </a:xfrm>
-          <a:prstGeom prst="rect">
-            <a:avLst/>
-          </a:prstGeom>
-          <a:noFill/>
-        </p:spPr>
-        <p:txBody>
-          <a:bodyPr wrap="square" lIns="0" rIns="0" tIns="0" bIns="0" anchor="t">
-            <a:spAutoFit/>
-          </a:bodyPr>
-          <a:lstStyle/>
-          <a:p>
-            <a:pPr algn="l">
-              <a:lnSpc>
-                <a:spcPct val="110000"/>
-              </a:lnSpc>
-            </a:pPr>
-            <a:r>
-              <a:rPr sz="1300" b="0" i="0">
-                <a:solidFill>
-                  <a:srgbClr val="2A2A2D"/>
-                </a:solidFill>
-                <a:latin typeface="Inter"/>
-              </a:rPr>
-              <a:t>Key page or form broken</a:t>
-            </a:r>
-          </a:p>
-        </p:txBody>
-      </p:sp>
-      <p:sp>
-        <p:nvSpPr>
-          <p:cNvPr id="27" name="TextBox 26"/>
-          <p:cNvSpPr txBox="1"/>
-          <p:nvPr/>
-        </p:nvSpPr>
-        <p:spPr>
-          <a:xfrm>
-            <a:off x="9464040" y="3520440"/>
-            <a:ext cx="1993392" cy="365760"/>
-          </a:xfrm>
-          <a:prstGeom prst="rect">
-            <a:avLst/>
-          </a:prstGeom>
-          <a:noFill/>
-        </p:spPr>
-        <p:txBody>
-          <a:bodyPr wrap="square" lIns="0" rIns="0" tIns="0" bIns="0" anchor="t">
-            <a:spAutoFit/>
-          </a:bodyPr>
-          <a:lstStyle/>
-          <a:p>
-            <a:pPr algn="r">
-              <a:lnSpc>
-                <a:spcPct val="110000"/>
-              </a:lnSpc>
-            </a:pPr>
-            <a:r>
-              <a:rPr sz="1300" b="0" i="0">
-                <a:solidFill>
-                  <a:srgbClr val="141414"/>
-                </a:solidFill>
-                <a:latin typeface="Inter"/>
-              </a:rPr>
-              <a:t>Within 1 business day</a:t>
-            </a:r>
-          </a:p>
-        </p:txBody>
-      </p:sp>
-      <p:sp>
-        <p:nvSpPr>
-          <p:cNvPr id="28" name="Rectangle 27"/>
-          <p:cNvSpPr/>
-          <p:nvPr/>
-        </p:nvSpPr>
-        <p:spPr>
-          <a:xfrm>
-            <a:off x="4983480" y="3931920"/>
-            <a:ext cx="6473952" cy="7620"/>
-          </a:xfrm>
-          <a:prstGeom prst="rect">
-            <a:avLst/>
-          </a:prstGeom>
-          <a:solidFill>
-            <a:srgbClr val="E6E1F0"/>
-          </a:solidFill>
-          <a:ln>
-            <a:noFill/>
-          </a:ln>
-          <a:effectLst/>
-        </p:spPr>
-        <p:style>
-          <a:lnRef idx="1">
-            <a:schemeClr val="accent1"/>
-          </a:lnRef>
-          <a:fillRef idx="3">
-            <a:schemeClr val="accent1"/>
-          </a:fillRef>
-          <a:effectRef idx="2">
-            <a:schemeClr val="accent1"/>
-          </a:effectRef>
-          <a:fontRef idx="minor">
-            <a:schemeClr val="lt1"/>
-          </a:fontRef>
-        </p:style>
-        <p:txBody>
-          <a:bodyPr rtlCol="0" anchor="ctr"/>
-          <a:lstStyle/>
-          <a:p>
-            <a:pPr algn="ctr"/>
-          </a:p>
-        </p:txBody>
-      </p:sp>
-      <p:sp>
-        <p:nvSpPr>
-          <p:cNvPr id="29" name="TextBox 28"/>
-          <p:cNvSpPr txBox="1"/>
-          <p:nvPr/>
-        </p:nvSpPr>
-        <p:spPr>
-          <a:xfrm>
-            <a:off x="4983480" y="4069080"/>
-            <a:ext cx="1371600" cy="365760"/>
-          </a:xfrm>
-          <a:prstGeom prst="rect">
-            <a:avLst/>
-          </a:prstGeom>
-          <a:noFill/>
-        </p:spPr>
-        <p:txBody>
-          <a:bodyPr wrap="square" lIns="0" rIns="0" tIns="0" bIns="0" anchor="t">
-            <a:spAutoFit/>
-          </a:bodyPr>
-          <a:lstStyle/>
-          <a:p>
-            <a:pPr algn="l">
-              <a:lnSpc>
-                <a:spcPct val="110000"/>
-              </a:lnSpc>
-            </a:pPr>
-            <a:r>
-              <a:rPr sz="1400" b="1" i="0">
-                <a:solidFill>
-                  <a:srgbClr val="141414"/>
-                </a:solidFill>
-                <a:latin typeface="Inter"/>
-              </a:rPr>
-              <a:t>Normal</a:t>
-            </a:r>
-          </a:p>
-        </p:txBody>
-      </p:sp>
-      <p:sp>
-        <p:nvSpPr>
-          <p:cNvPr id="30" name="TextBox 29"/>
-          <p:cNvSpPr txBox="1"/>
-          <p:nvPr/>
-        </p:nvSpPr>
-        <p:spPr>
-          <a:xfrm>
-            <a:off x="6446520" y="4069080"/>
-            <a:ext cx="3017520" cy="365760"/>
-          </a:xfrm>
-          <a:prstGeom prst="rect">
-            <a:avLst/>
-          </a:prstGeom>
-          <a:noFill/>
-        </p:spPr>
-        <p:txBody>
-          <a:bodyPr wrap="square" lIns="0" rIns="0" tIns="0" bIns="0" anchor="t">
-            <a:spAutoFit/>
-          </a:bodyPr>
-          <a:lstStyle/>
-          <a:p>
-            <a:pPr algn="l">
-              <a:lnSpc>
-                <a:spcPct val="110000"/>
-              </a:lnSpc>
-            </a:pPr>
-            <a:r>
-              <a:rPr sz="1300" b="0" i="0">
-                <a:solidFill>
-                  <a:srgbClr val="2A2A2D"/>
-                </a:solidFill>
-                <a:latin typeface="Inter"/>
-              </a:rPr>
-              <a:t>Minor change or question</a:t>
-            </a:r>
-          </a:p>
-        </p:txBody>
-      </p:sp>
-      <p:sp>
-        <p:nvSpPr>
-          <p:cNvPr id="31" name="TextBox 30"/>
-          <p:cNvSpPr txBox="1"/>
-          <p:nvPr/>
-        </p:nvSpPr>
-        <p:spPr>
-          <a:xfrm>
-            <a:off x="9464040" y="4069080"/>
-            <a:ext cx="1993392" cy="365760"/>
-          </a:xfrm>
-          <a:prstGeom prst="rect">
-            <a:avLst/>
-          </a:prstGeom>
-          <a:noFill/>
-        </p:spPr>
-        <p:txBody>
-          <a:bodyPr wrap="square" lIns="0" rIns="0" tIns="0" bIns="0" anchor="t">
-            <a:spAutoFit/>
-          </a:bodyPr>
-          <a:lstStyle/>
-          <a:p>
-            <a:pPr algn="r">
-              <a:lnSpc>
-                <a:spcPct val="110000"/>
-              </a:lnSpc>
-            </a:pPr>
-            <a:r>
-              <a:rPr sz="1300" b="0" i="0">
-                <a:solidFill>
-                  <a:srgbClr val="141414"/>
-                </a:solidFill>
-                <a:latin typeface="Inter"/>
-              </a:rPr>
-              <a:t>Within 1 business day</a:t>
-            </a:r>
-          </a:p>
-        </p:txBody>
-      </p:sp>
-      <p:sp>
-        <p:nvSpPr>
-          <p:cNvPr id="32" name="Rectangle 31"/>
-          <p:cNvSpPr/>
-          <p:nvPr/>
-        </p:nvSpPr>
-        <p:spPr>
-          <a:xfrm>
-            <a:off x="4983480" y="4480560"/>
-            <a:ext cx="6473952" cy="7620"/>
-          </a:xfrm>
-          <a:prstGeom prst="rect">
-            <a:avLst/>
-          </a:prstGeom>
-          <a:solidFill>
-            <a:srgbClr val="E6E1F0"/>
-          </a:solidFill>
-          <a:ln>
-            <a:noFill/>
-          </a:ln>
-          <a:effectLst/>
-        </p:spPr>
-        <p:style>
-          <a:lnRef idx="1">
-            <a:schemeClr val="accent1"/>
-          </a:lnRef>
-          <a:fillRef idx="3">
-            <a:schemeClr val="accent1"/>
-          </a:fillRef>
-          <a:effectRef idx="2">
-            <a:schemeClr val="accent1"/>
-          </a:effectRef>
-          <a:fontRef idx="minor">
-            <a:schemeClr val="lt1"/>
-          </a:fontRef>
-        </p:style>
-        <p:txBody>
-          <a:bodyPr rtlCol="0" anchor="ctr"/>
-          <a:lstStyle/>
-          <a:p>
-            <a:pPr algn="ctr"/>
-          </a:p>
-        </p:txBody>
-      </p:sp>
-      <p:sp>
-        <p:nvSpPr>
-          <p:cNvPr id="33" name="TextBox 32"/>
-          <p:cNvSpPr txBox="1"/>
-          <p:nvPr/>
-        </p:nvSpPr>
-        <p:spPr>
-          <a:xfrm>
-            <a:off x="4983480" y="4754880"/>
-            <a:ext cx="6473952" cy="1188720"/>
-          </a:xfrm>
-          <a:prstGeom prst="rect">
-            <a:avLst/>
-          </a:prstGeom>
-          <a:noFill/>
-        </p:spPr>
-        <p:txBody>
-          <a:bodyPr wrap="square" lIns="0" rIns="0" tIns="0" bIns="0" anchor="t">
-            <a:spAutoFit/>
-          </a:bodyPr>
-          <a:lstStyle/>
-          <a:p>
-            <a:pPr algn="l">
-              <a:lnSpc>
-                <a:spcPct val="130000"/>
-              </a:lnSpc>
-              <a:spcAft>
-                <a:spcPts val="600"/>
-              </a:spcAft>
-            </a:pPr>
-            <a:r>
-              <a:rPr sz="1200" b="1" i="0">
-                <a:solidFill>
-                  <a:srgbClr val="141414"/>
-                </a:solidFill>
-                <a:latin typeface="Inter"/>
-              </a:rPr>
-              <a:t>Channels:  </a:t>
-            </a:r>
-            <a:r>
-              <a:rPr sz="1200" b="0" i="0">
-                <a:solidFill>
-                  <a:srgbClr val="6B6878"/>
-                </a:solidFill>
-                <a:latin typeface="Inter"/>
-              </a:rPr>
-              <a:t>WhatsApp project group  ·  Hira (account manager)  ·  Omer Bin Dawood (escalations)</a:t>
-            </a:r>
-          </a:p>
-          <a:p>
-            <a:pPr algn="l">
-              <a:lnSpc>
-                <a:spcPct val="130000"/>
-              </a:lnSpc>
-              <a:spcAft>
-                <a:spcPts val="600"/>
-              </a:spcAft>
-            </a:pPr>
-            <a:r>
-              <a:rPr sz="1200" b="1" i="0">
-                <a:solidFill>
-                  <a:srgbClr val="141414"/>
-                </a:solidFill>
-                <a:latin typeface="Inter"/>
-              </a:rPr>
-              <a:t>Hours:  </a:t>
-            </a:r>
-            <a:r>
-              <a:rPr sz="1200" b="0" i="0">
-                <a:solidFill>
-                  <a:srgbClr val="6B6878"/>
-                </a:solidFill>
-                <a:latin typeface="Inter"/>
-              </a:rPr>
-              <a:t>Monday–Saturday, 10:00–19:00 PKT</a:t>
-            </a:r>
-          </a:p>
-        </p:txBody>
-      </p:sp>
-    </p:spTree>
-  </p:cSld>
-  <p:clrMapOvr>
-    <a:masterClrMapping/>
-  </p:clrMapOvr>
-</p:sld>
-</file>
-
-<file path=ppt/slides/slide12.xml><?xml version="1.0" encoding="utf-8"?>
-<p:sld xmlns:a="http://schemas.openxmlformats.org/drawingml/2006/main" xmlns:p="http://schemas.openxmlformats.org/presentationml/2006/main" xmlns:r="http://schemas.openxmlformats.org/officeDocument/2006/relationships">
-  <p:cSld>
-    <p:spTree>
-      <p:nvGrpSpPr>
-        <p:cNvPr id="1" name=""/>
-        <p:cNvGrpSpPr/>
-        <p:nvPr/>
-      </p:nvGrpSpPr>
-      <p:grpSpPr/>
-      <p:pic>
-        <p:nvPicPr>
-          <p:cNvPr id="2" name="Picture 1" descr="obd-mark.png"/>
-          <p:cNvPicPr>
-            <a:picLocks noChangeAspect="1"/>
-          </p:cNvPicPr>
-          <p:nvPr/>
-        </p:nvPicPr>
-        <p:blipFill>
-          <a:blip r:embed="rId2"/>
-          <a:stretch>
-            <a:fillRect/>
-          </a:stretch>
-        </p:blipFill>
-        <p:spPr>
-          <a:xfrm>
-            <a:off x="731520" y="384048"/>
-            <a:ext cx="394836" cy="384048"/>
-          </a:xfrm>
-          <a:prstGeom prst="rect">
-            <a:avLst/>
-          </a:prstGeom>
-        </p:spPr>
-      </p:pic>
-      <p:sp>
-        <p:nvSpPr>
-          <p:cNvPr id="3" name="TextBox 2"/>
-          <p:cNvSpPr txBox="1"/>
-          <p:nvPr/>
-        </p:nvSpPr>
-        <p:spPr>
-          <a:xfrm>
-            <a:off x="1255105" y="376368"/>
-            <a:ext cx="2286000" cy="274320"/>
-          </a:xfrm>
-          <a:prstGeom prst="rect">
-            <a:avLst/>
-          </a:prstGeom>
-          <a:noFill/>
-        </p:spPr>
-        <p:txBody>
-          <a:bodyPr wrap="square" lIns="0" rIns="0" tIns="0" bIns="0" anchor="t">
-            <a:spAutoFit/>
-          </a:bodyPr>
-          <a:lstStyle/>
-          <a:p>
-            <a:pPr algn="l">
-              <a:lnSpc>
-                <a:spcPct val="110000"/>
-              </a:lnSpc>
-            </a:pPr>
-            <a:r>
-              <a:rPr sz="1200" b="1" i="0">
-                <a:solidFill>
-                  <a:srgbClr val="141414"/>
-                </a:solidFill>
-                <a:latin typeface="Playfair Display"/>
-              </a:rPr>
-              <a:t>OBD</a:t>
-            </a:r>
-          </a:p>
-        </p:txBody>
-      </p:sp>
-      <p:sp>
-        <p:nvSpPr>
-          <p:cNvPr id="4" name="TextBox 3"/>
-          <p:cNvSpPr txBox="1"/>
-          <p:nvPr/>
-        </p:nvSpPr>
-        <p:spPr>
-          <a:xfrm>
-            <a:off x="1255105" y="606795"/>
-            <a:ext cx="2286000" cy="182880"/>
-          </a:xfrm>
-          <a:prstGeom prst="rect">
-            <a:avLst/>
-          </a:prstGeom>
-          <a:noFill/>
-        </p:spPr>
-        <p:txBody>
-          <a:bodyPr wrap="square" lIns="0" rIns="0" tIns="0" bIns="0" anchor="t">
-            <a:spAutoFit/>
-          </a:bodyPr>
-          <a:lstStyle/>
-          <a:p>
-            <a:pPr algn="l">
-              <a:lnSpc>
-                <a:spcPct val="110000"/>
-              </a:lnSpc>
-            </a:pPr>
-            <a:r>
-              <a:rPr sz="700" b="1" i="0">
-                <a:solidFill>
-                  <a:srgbClr val="6A26D8"/>
-                </a:solidFill>
-                <a:latin typeface="Inter"/>
-              </a:rPr>
-              <a:t>A I   S O L U T I O N S</a:t>
-            </a:r>
-          </a:p>
-        </p:txBody>
-      </p:sp>
-      <p:sp>
-        <p:nvSpPr>
-          <p:cNvPr id="5" name="TextBox 4"/>
-          <p:cNvSpPr txBox="1"/>
-          <p:nvPr/>
-        </p:nvSpPr>
-        <p:spPr>
-          <a:xfrm>
-            <a:off x="7802575" y="475488"/>
-            <a:ext cx="3657600" cy="274320"/>
-          </a:xfrm>
-          <a:prstGeom prst="rect">
-            <a:avLst/>
-          </a:prstGeom>
-          <a:noFill/>
-        </p:spPr>
-        <p:txBody>
-          <a:bodyPr wrap="square" lIns="0" rIns="0" tIns="0" bIns="0" anchor="t">
-            <a:spAutoFit/>
-          </a:bodyPr>
-          <a:lstStyle/>
-          <a:p>
-            <a:pPr algn="r">
-              <a:lnSpc>
-                <a:spcPct val="110000"/>
-              </a:lnSpc>
-            </a:pPr>
-            <a:r>
-              <a:rPr sz="900" b="1" i="0">
-                <a:solidFill>
-                  <a:srgbClr val="6B6878"/>
-                </a:solidFill>
-                <a:latin typeface="Inter"/>
-              </a:rPr>
-              <a:t>NEXT STEPS</a:t>
-            </a:r>
-          </a:p>
-        </p:txBody>
-      </p:sp>
-      <p:sp>
-        <p:nvSpPr>
-          <p:cNvPr id="6" name="Rectangle 5"/>
-          <p:cNvSpPr/>
-          <p:nvPr/>
-        </p:nvSpPr>
-        <p:spPr>
-          <a:xfrm>
-            <a:off x="731520" y="6291072"/>
-            <a:ext cx="10728655" cy="7620"/>
-          </a:xfrm>
-          <a:prstGeom prst="rect">
-            <a:avLst/>
-          </a:prstGeom>
-          <a:solidFill>
-            <a:srgbClr val="E6E1F0"/>
-          </a:solidFill>
-          <a:ln>
-            <a:noFill/>
-          </a:ln>
-          <a:effectLst/>
-        </p:spPr>
-        <p:style>
-          <a:lnRef idx="1">
-            <a:schemeClr val="accent1"/>
-          </a:lnRef>
-          <a:fillRef idx="3">
-            <a:schemeClr val="accent1"/>
-          </a:fillRef>
-          <a:effectRef idx="2">
-            <a:schemeClr val="accent1"/>
-          </a:effectRef>
-          <a:fontRef idx="minor">
-            <a:schemeClr val="lt1"/>
-          </a:fontRef>
-        </p:style>
-        <p:txBody>
-          <a:bodyPr rtlCol="0" anchor="ctr"/>
-          <a:lstStyle/>
-          <a:p>
-            <a:pPr algn="ctr"/>
-          </a:p>
-        </p:txBody>
-      </p:sp>
-      <p:sp>
-        <p:nvSpPr>
-          <p:cNvPr id="7" name="TextBox 6"/>
-          <p:cNvSpPr txBox="1"/>
-          <p:nvPr/>
-        </p:nvSpPr>
-        <p:spPr>
-          <a:xfrm>
-            <a:off x="731520" y="6400800"/>
-            <a:ext cx="5486400" cy="274320"/>
-          </a:xfrm>
-          <a:prstGeom prst="rect">
-            <a:avLst/>
-          </a:prstGeom>
-          <a:noFill/>
-        </p:spPr>
-        <p:txBody>
-          <a:bodyPr wrap="square" lIns="0" rIns="0" tIns="0" bIns="0" anchor="t">
-            <a:spAutoFit/>
-          </a:bodyPr>
-          <a:lstStyle/>
-          <a:p>
-            <a:pPr algn="l">
-              <a:lnSpc>
-                <a:spcPct val="110000"/>
-              </a:lnSpc>
-            </a:pPr>
-            <a:r>
-              <a:rPr sz="850" b="0" i="0">
-                <a:solidFill>
-                  <a:srgbClr val="6B6878"/>
-                </a:solidFill>
-                <a:latin typeface="Inter"/>
-              </a:rPr>
-              <a:t>OBD AI Solutions  ·  OBD-GFXT-2026</a:t>
-            </a:r>
-          </a:p>
-        </p:txBody>
-      </p:sp>
-      <p:sp>
-        <p:nvSpPr>
-          <p:cNvPr id="8" name="TextBox 7"/>
-          <p:cNvSpPr txBox="1"/>
-          <p:nvPr/>
-        </p:nvSpPr>
-        <p:spPr>
-          <a:xfrm>
-            <a:off x="9631375" y="6400800"/>
-            <a:ext cx="1828800" cy="274320"/>
-          </a:xfrm>
-          <a:prstGeom prst="rect">
-            <a:avLst/>
-          </a:prstGeom>
-          <a:noFill/>
-        </p:spPr>
-        <p:txBody>
-          <a:bodyPr wrap="square" lIns="0" rIns="0" tIns="0" bIns="0" anchor="t">
-            <a:spAutoFit/>
-          </a:bodyPr>
-          <a:lstStyle/>
-          <a:p>
-            <a:pPr algn="r">
-              <a:lnSpc>
-                <a:spcPct val="110000"/>
-              </a:lnSpc>
-            </a:pPr>
-            <a:r>
-              <a:rPr sz="850" b="0" i="0">
-                <a:solidFill>
-                  <a:srgbClr val="6B6878"/>
-                </a:solidFill>
-                <a:latin typeface="Inter"/>
-              </a:rPr>
-              <a:t>12 / 13</a:t>
-            </a:r>
-          </a:p>
-        </p:txBody>
-      </p:sp>
-      <p:sp>
-        <p:nvSpPr>
-          <p:cNvPr id="9" name="TextBox 8"/>
-          <p:cNvSpPr txBox="1"/>
-          <p:nvPr/>
-        </p:nvSpPr>
-        <p:spPr>
-          <a:xfrm>
-            <a:off x="731520" y="1143000"/>
-            <a:ext cx="7315200" cy="274320"/>
-          </a:xfrm>
-          <a:prstGeom prst="rect">
-            <a:avLst/>
-          </a:prstGeom>
-          <a:noFill/>
-        </p:spPr>
-        <p:txBody>
-          <a:bodyPr wrap="square" lIns="0" rIns="0" tIns="0" bIns="0" anchor="t">
-            <a:spAutoFit/>
-          </a:bodyPr>
-          <a:lstStyle/>
-          <a:p>
-            <a:pPr algn="l">
-              <a:lnSpc>
-                <a:spcPct val="110000"/>
-              </a:lnSpc>
-            </a:pPr>
-            <a:r>
-              <a:rPr sz="1000" b="1" i="0">
-                <a:solidFill>
-                  <a:srgbClr val="6A26D8"/>
-                </a:solidFill>
-                <a:latin typeface="Inter"/>
-              </a:rPr>
-              <a:t>11 · LET'S GET YOU LIVE</a:t>
-            </a:r>
-          </a:p>
-        </p:txBody>
-      </p:sp>
-      <p:sp>
-        <p:nvSpPr>
-          <p:cNvPr id="10" name="TextBox 9"/>
-          <p:cNvSpPr txBox="1"/>
-          <p:nvPr/>
-        </p:nvSpPr>
-        <p:spPr>
-          <a:xfrm>
-            <a:off x="731520" y="1435608"/>
-            <a:ext cx="10515600" cy="822960"/>
-          </a:xfrm>
-          <a:prstGeom prst="rect">
-            <a:avLst/>
-          </a:prstGeom>
-          <a:noFill/>
-        </p:spPr>
-        <p:txBody>
-          <a:bodyPr wrap="square" lIns="0" rIns="0" tIns="0" bIns="0" anchor="t">
-            <a:spAutoFit/>
-          </a:bodyPr>
-          <a:lstStyle/>
-          <a:p>
-            <a:pPr algn="l">
-              <a:lnSpc>
-                <a:spcPct val="110000"/>
-              </a:lnSpc>
-            </a:pPr>
-            <a:r>
-              <a:rPr sz="3400" b="0" i="0">
-                <a:solidFill>
-                  <a:srgbClr val="141414"/>
-                </a:solidFill>
-                <a:latin typeface="Playfair Display"/>
-              </a:rPr>
-              <a:t>Four steps </a:t>
-            </a:r>
-            <a:r>
-              <a:rPr sz="3400" b="0" i="1">
-                <a:solidFill>
-                  <a:srgbClr val="6A26D8"/>
-                </a:solidFill>
-                <a:latin typeface="Playfair Display"/>
-              </a:rPr>
-              <a:t>from here.</a:t>
-            </a:r>
-          </a:p>
-        </p:txBody>
-      </p:sp>
-      <p:sp>
-        <p:nvSpPr>
-          <p:cNvPr id="11" name="Rectangle 10"/>
-          <p:cNvSpPr/>
-          <p:nvPr/>
-        </p:nvSpPr>
-        <p:spPr>
-          <a:xfrm>
-            <a:off x="731520" y="2221992"/>
-            <a:ext cx="320040" cy="30480"/>
-          </a:xfrm>
-          <a:prstGeom prst="rect">
-            <a:avLst/>
-          </a:prstGeom>
-          <a:solidFill>
-            <a:srgbClr val="6A26D8"/>
-          </a:solidFill>
-          <a:ln>
-            <a:noFill/>
-          </a:ln>
-          <a:effectLst/>
-        </p:spPr>
-        <p:style>
-          <a:lnRef idx="1">
-            <a:schemeClr val="accent1"/>
-          </a:lnRef>
-          <a:fillRef idx="3">
-            <a:schemeClr val="accent1"/>
-          </a:fillRef>
-          <a:effectRef idx="2">
-            <a:schemeClr val="accent1"/>
-          </a:effectRef>
-          <a:fontRef idx="minor">
-            <a:schemeClr val="lt1"/>
-          </a:fontRef>
-        </p:style>
-        <p:txBody>
-          <a:bodyPr rtlCol="0" anchor="ctr"/>
-          <a:lstStyle/>
-          <a:p>
-            <a:pPr algn="ctr"/>
-          </a:p>
-        </p:txBody>
-      </p:sp>
-      <p:sp>
-        <p:nvSpPr>
-          <p:cNvPr id="12" name="Rectangle 11"/>
-          <p:cNvSpPr/>
-          <p:nvPr/>
-        </p:nvSpPr>
-        <p:spPr>
-          <a:xfrm>
-            <a:off x="1051560" y="2221992"/>
-            <a:ext cx="228600" cy="30480"/>
-          </a:xfrm>
-          <a:prstGeom prst="rect">
-            <a:avLst/>
-          </a:prstGeom>
-          <a:solidFill>
-            <a:srgbClr val="2B3BB8"/>
-          </a:solidFill>
-          <a:ln>
-            <a:noFill/>
-          </a:ln>
-          <a:effectLst/>
-        </p:spPr>
-        <p:style>
-          <a:lnRef idx="1">
-            <a:schemeClr val="accent1"/>
-          </a:lnRef>
-          <a:fillRef idx="3">
-            <a:schemeClr val="accent1"/>
-          </a:fillRef>
-          <a:effectRef idx="2">
-            <a:schemeClr val="accent1"/>
-          </a:effectRef>
-          <a:fontRef idx="minor">
-            <a:schemeClr val="lt1"/>
-          </a:fontRef>
-        </p:style>
-        <p:txBody>
-          <a:bodyPr rtlCol="0" anchor="ctr"/>
-          <a:lstStyle/>
-          <a:p>
-            <a:pPr algn="ctr"/>
-          </a:p>
-        </p:txBody>
-      </p:sp>
-      <p:sp>
-        <p:nvSpPr>
-          <p:cNvPr id="13" name="Rounded Rectangle 12"/>
-          <p:cNvSpPr/>
-          <p:nvPr/>
-        </p:nvSpPr>
-        <p:spPr>
-          <a:xfrm>
-            <a:off x="731520" y="2514600"/>
-            <a:ext cx="2579293" cy="2057400"/>
-          </a:xfrm>
-          <a:prstGeom prst="roundRect">
-            <a:avLst>
-              <a:gd name="adj" fmla="val 5000"/>
-            </a:avLst>
-          </a:prstGeom>
-          <a:solidFill>
-            <a:srgbClr val="F8F6FD"/>
-          </a:solidFill>
-          <a:ln w="9525">
-            <a:solidFill>
-              <a:srgbClr val="E6E1F0"/>
-            </a:solidFill>
-          </a:ln>
-          <a:effectLst/>
-        </p:spPr>
-        <p:style>
-          <a:lnRef idx="1">
-            <a:schemeClr val="accent1"/>
-          </a:lnRef>
-          <a:fillRef idx="3">
-            <a:schemeClr val="accent1"/>
-          </a:fillRef>
-          <a:effectRef idx="2">
-            <a:schemeClr val="accent1"/>
-          </a:effectRef>
-          <a:fontRef idx="minor">
-            <a:schemeClr val="lt1"/>
-          </a:fontRef>
-        </p:style>
-        <p:txBody>
-          <a:bodyPr rtlCol="0" anchor="ctr"/>
-          <a:lstStyle/>
-          <a:p>
-            <a:pPr algn="ctr"/>
-          </a:p>
-        </p:txBody>
-      </p:sp>
-      <p:sp>
-        <p:nvSpPr>
-          <p:cNvPr id="14" name="TextBox 13"/>
-          <p:cNvSpPr txBox="1"/>
-          <p:nvPr/>
-        </p:nvSpPr>
-        <p:spPr>
-          <a:xfrm>
-            <a:off x="1005840" y="2697480"/>
-            <a:ext cx="914400" cy="731520"/>
-          </a:xfrm>
-          <a:prstGeom prst="rect">
-            <a:avLst/>
-          </a:prstGeom>
-          <a:noFill/>
-        </p:spPr>
-        <p:txBody>
-          <a:bodyPr wrap="square" lIns="0" rIns="0" tIns="0" bIns="0" anchor="t">
-            <a:spAutoFit/>
-          </a:bodyPr>
-          <a:lstStyle/>
-          <a:p>
-            <a:pPr algn="l">
-              <a:lnSpc>
-                <a:spcPct val="110000"/>
-              </a:lnSpc>
-            </a:pPr>
-            <a:r>
-              <a:rPr sz="3800" b="0" i="0">
-                <a:solidFill>
-                  <a:srgbClr val="6A26D8"/>
-                </a:solidFill>
-                <a:latin typeface="Playfair Display"/>
-              </a:rPr>
-              <a:t>1</a:t>
-            </a:r>
-          </a:p>
-        </p:txBody>
-      </p:sp>
-      <p:sp>
-        <p:nvSpPr>
-          <p:cNvPr id="15" name="TextBox 14"/>
-          <p:cNvSpPr txBox="1"/>
-          <p:nvPr/>
-        </p:nvSpPr>
-        <p:spPr>
-          <a:xfrm>
-            <a:off x="1005840" y="3474720"/>
-            <a:ext cx="2122093" cy="365760"/>
-          </a:xfrm>
-          <a:prstGeom prst="rect">
-            <a:avLst/>
-          </a:prstGeom>
-          <a:noFill/>
-        </p:spPr>
-        <p:txBody>
-          <a:bodyPr wrap="square" lIns="0" rIns="0" tIns="0" bIns="0" anchor="t">
-            <a:spAutoFit/>
-          </a:bodyPr>
-          <a:lstStyle/>
-          <a:p>
-            <a:pPr algn="l">
-              <a:lnSpc>
-                <a:spcPct val="110000"/>
-              </a:lnSpc>
-            </a:pPr>
-            <a:r>
-              <a:rPr sz="1700" b="0" i="0">
-                <a:solidFill>
-                  <a:srgbClr val="141414"/>
-                </a:solidFill>
-                <a:latin typeface="Playfair Display"/>
-              </a:rPr>
-              <a:t>Review</a:t>
-            </a:r>
-          </a:p>
-        </p:txBody>
-      </p:sp>
-      <p:sp>
-        <p:nvSpPr>
-          <p:cNvPr id="16" name="TextBox 15"/>
-          <p:cNvSpPr txBox="1"/>
-          <p:nvPr/>
-        </p:nvSpPr>
-        <p:spPr>
-          <a:xfrm>
-            <a:off x="1005840" y="3840480"/>
-            <a:ext cx="2122093" cy="731520"/>
-          </a:xfrm>
-          <a:prstGeom prst="rect">
-            <a:avLst/>
-          </a:prstGeom>
-          <a:noFill/>
-        </p:spPr>
-        <p:txBody>
-          <a:bodyPr wrap="square" lIns="0" rIns="0" tIns="0" bIns="0" anchor="t">
-            <a:spAutoFit/>
-          </a:bodyPr>
-          <a:lstStyle/>
-          <a:p>
-            <a:pPr algn="l">
-              <a:lnSpc>
-                <a:spcPct val="125000"/>
-              </a:lnSpc>
-            </a:pPr>
-            <a:r>
-              <a:rPr sz="1100" b="0" i="0">
-                <a:solidFill>
-                  <a:srgbClr val="6B6878"/>
-                </a:solidFill>
-                <a:latin typeface="Inter"/>
-              </a:rPr>
-              <a:t>This deck and the Welcome Pack.</a:t>
-            </a:r>
-          </a:p>
-        </p:txBody>
-      </p:sp>
-      <p:sp>
-        <p:nvSpPr>
-          <p:cNvPr id="17" name="Rounded Rectangle 16"/>
-          <p:cNvSpPr/>
-          <p:nvPr/>
-        </p:nvSpPr>
-        <p:spPr>
-          <a:xfrm>
-            <a:off x="3447973" y="2514600"/>
-            <a:ext cx="2579293" cy="2057400"/>
-          </a:xfrm>
-          <a:prstGeom prst="roundRect">
-            <a:avLst>
-              <a:gd name="adj" fmla="val 5000"/>
-            </a:avLst>
-          </a:prstGeom>
-          <a:solidFill>
-            <a:srgbClr val="F8F6FD"/>
-          </a:solidFill>
-          <a:ln w="9525">
-            <a:solidFill>
-              <a:srgbClr val="E6E1F0"/>
-            </a:solidFill>
-          </a:ln>
-          <a:effectLst/>
-        </p:spPr>
-        <p:style>
-          <a:lnRef idx="1">
-            <a:schemeClr val="accent1"/>
-          </a:lnRef>
-          <a:fillRef idx="3">
-            <a:schemeClr val="accent1"/>
-          </a:fillRef>
-          <a:effectRef idx="2">
-            <a:schemeClr val="accent1"/>
-          </a:effectRef>
-          <a:fontRef idx="minor">
-            <a:schemeClr val="lt1"/>
-          </a:fontRef>
-        </p:style>
-        <p:txBody>
-          <a:bodyPr rtlCol="0" anchor="ctr"/>
-          <a:lstStyle/>
-          <a:p>
-            <a:pPr algn="ctr"/>
-          </a:p>
-        </p:txBody>
-      </p:sp>
-      <p:sp>
-        <p:nvSpPr>
-          <p:cNvPr id="18" name="TextBox 17"/>
-          <p:cNvSpPr txBox="1"/>
-          <p:nvPr/>
-        </p:nvSpPr>
-        <p:spPr>
-          <a:xfrm>
-            <a:off x="3722293" y="2697480"/>
-            <a:ext cx="914400" cy="731520"/>
-          </a:xfrm>
-          <a:prstGeom prst="rect">
-            <a:avLst/>
-          </a:prstGeom>
-          <a:noFill/>
-        </p:spPr>
-        <p:txBody>
-          <a:bodyPr wrap="square" lIns="0" rIns="0" tIns="0" bIns="0" anchor="t">
-            <a:spAutoFit/>
-          </a:bodyPr>
-          <a:lstStyle/>
-          <a:p>
-            <a:pPr algn="l">
-              <a:lnSpc>
-                <a:spcPct val="110000"/>
-              </a:lnSpc>
-            </a:pPr>
-            <a:r>
-              <a:rPr sz="3800" b="0" i="0">
-                <a:solidFill>
-                  <a:srgbClr val="6A26D8"/>
-                </a:solidFill>
-                <a:latin typeface="Playfair Display"/>
-              </a:rPr>
-              <a:t>2</a:t>
-            </a:r>
-          </a:p>
-        </p:txBody>
-      </p:sp>
-      <p:sp>
-        <p:nvSpPr>
-          <p:cNvPr id="19" name="TextBox 18"/>
-          <p:cNvSpPr txBox="1"/>
-          <p:nvPr/>
-        </p:nvSpPr>
-        <p:spPr>
-          <a:xfrm>
-            <a:off x="3722293" y="3474720"/>
-            <a:ext cx="2122093" cy="365760"/>
-          </a:xfrm>
-          <a:prstGeom prst="rect">
-            <a:avLst/>
-          </a:prstGeom>
-          <a:noFill/>
-        </p:spPr>
-        <p:txBody>
-          <a:bodyPr wrap="square" lIns="0" rIns="0" tIns="0" bIns="0" anchor="t">
-            <a:spAutoFit/>
-          </a:bodyPr>
-          <a:lstStyle/>
-          <a:p>
-            <a:pPr algn="l">
-              <a:lnSpc>
-                <a:spcPct val="110000"/>
-              </a:lnSpc>
-            </a:pPr>
-            <a:r>
-              <a:rPr sz="1700" b="0" i="0">
-                <a:solidFill>
-                  <a:srgbClr val="141414"/>
-                </a:solidFill>
-                <a:latin typeface="Playfair Display"/>
-              </a:rPr>
-              <a:t>Fill in</a:t>
-            </a:r>
-          </a:p>
-        </p:txBody>
-      </p:sp>
-      <p:sp>
-        <p:nvSpPr>
-          <p:cNvPr id="20" name="TextBox 19"/>
-          <p:cNvSpPr txBox="1"/>
-          <p:nvPr/>
-        </p:nvSpPr>
-        <p:spPr>
-          <a:xfrm>
-            <a:off x="3722293" y="3840480"/>
-            <a:ext cx="2122093" cy="731520"/>
-          </a:xfrm>
-          <a:prstGeom prst="rect">
-            <a:avLst/>
-          </a:prstGeom>
-          <a:noFill/>
-        </p:spPr>
-        <p:txBody>
-          <a:bodyPr wrap="square" lIns="0" rIns="0" tIns="0" bIns="0" anchor="t">
-            <a:spAutoFit/>
-          </a:bodyPr>
-          <a:lstStyle/>
-          <a:p>
-            <a:pPr algn="l">
-              <a:lnSpc>
-                <a:spcPct val="125000"/>
-              </a:lnSpc>
-            </a:pPr>
-            <a:r>
-              <a:rPr sz="1100" b="0" i="0">
-                <a:solidFill>
-                  <a:srgbClr val="6B6878"/>
-                </a:solidFill>
-                <a:latin typeface="Inter"/>
-              </a:rPr>
-              <a:t>The short onboarding form: details, domain, email accounts.</a:t>
-            </a:r>
-          </a:p>
-        </p:txBody>
-      </p:sp>
-      <p:sp>
-        <p:nvSpPr>
-          <p:cNvPr id="21" name="Rounded Rectangle 20"/>
-          <p:cNvSpPr/>
-          <p:nvPr/>
-        </p:nvSpPr>
-        <p:spPr>
-          <a:xfrm>
-            <a:off x="6164427" y="2514600"/>
-            <a:ext cx="2579293" cy="2057400"/>
-          </a:xfrm>
-          <a:prstGeom prst="roundRect">
-            <a:avLst>
-              <a:gd name="adj" fmla="val 5000"/>
-            </a:avLst>
-          </a:prstGeom>
-          <a:solidFill>
-            <a:srgbClr val="F8F6FD"/>
-          </a:solidFill>
-          <a:ln w="9525">
-            <a:solidFill>
-              <a:srgbClr val="E6E1F0"/>
-            </a:solidFill>
-          </a:ln>
-          <a:effectLst/>
-        </p:spPr>
-        <p:style>
-          <a:lnRef idx="1">
-            <a:schemeClr val="accent1"/>
-          </a:lnRef>
-          <a:fillRef idx="3">
-            <a:schemeClr val="accent1"/>
-          </a:fillRef>
-          <a:effectRef idx="2">
-            <a:schemeClr val="accent1"/>
-          </a:effectRef>
-          <a:fontRef idx="minor">
-            <a:schemeClr val="lt1"/>
-          </a:fontRef>
-        </p:style>
-        <p:txBody>
-          <a:bodyPr rtlCol="0" anchor="ctr"/>
-          <a:lstStyle/>
-          <a:p>
-            <a:pPr algn="ctr"/>
-          </a:p>
-        </p:txBody>
-      </p:sp>
-      <p:sp>
-        <p:nvSpPr>
-          <p:cNvPr id="22" name="TextBox 21"/>
-          <p:cNvSpPr txBox="1"/>
-          <p:nvPr/>
-        </p:nvSpPr>
-        <p:spPr>
-          <a:xfrm>
-            <a:off x="6438747" y="2697480"/>
-            <a:ext cx="914400" cy="731520"/>
-          </a:xfrm>
-          <a:prstGeom prst="rect">
-            <a:avLst/>
-          </a:prstGeom>
-          <a:noFill/>
-        </p:spPr>
-        <p:txBody>
-          <a:bodyPr wrap="square" lIns="0" rIns="0" tIns="0" bIns="0" anchor="t">
-            <a:spAutoFit/>
-          </a:bodyPr>
-          <a:lstStyle/>
-          <a:p>
-            <a:pPr algn="l">
-              <a:lnSpc>
-                <a:spcPct val="110000"/>
-              </a:lnSpc>
-            </a:pPr>
-            <a:r>
-              <a:rPr sz="3800" b="0" i="0">
-                <a:solidFill>
-                  <a:srgbClr val="6A26D8"/>
-                </a:solidFill>
-                <a:latin typeface="Playfair Display"/>
-              </a:rPr>
-              <a:t>3</a:t>
-            </a:r>
-          </a:p>
-        </p:txBody>
-      </p:sp>
-      <p:sp>
-        <p:nvSpPr>
-          <p:cNvPr id="23" name="TextBox 22"/>
-          <p:cNvSpPr txBox="1"/>
-          <p:nvPr/>
-        </p:nvSpPr>
-        <p:spPr>
-          <a:xfrm>
-            <a:off x="6438747" y="3474720"/>
-            <a:ext cx="2122093" cy="365760"/>
-          </a:xfrm>
-          <a:prstGeom prst="rect">
-            <a:avLst/>
-          </a:prstGeom>
-          <a:noFill/>
-        </p:spPr>
-        <p:txBody>
-          <a:bodyPr wrap="square" lIns="0" rIns="0" tIns="0" bIns="0" anchor="t">
-            <a:spAutoFit/>
-          </a:bodyPr>
-          <a:lstStyle/>
-          <a:p>
-            <a:pPr algn="l">
-              <a:lnSpc>
-                <a:spcPct val="110000"/>
-              </a:lnSpc>
-            </a:pPr>
-            <a:r>
-              <a:rPr sz="1700" b="0" i="0">
-                <a:solidFill>
-                  <a:srgbClr val="141414"/>
-                </a:solidFill>
-                <a:latin typeface="Playfair Display"/>
-              </a:rPr>
-              <a:t>Sign</a:t>
-            </a:r>
-          </a:p>
-        </p:txBody>
-      </p:sp>
-      <p:sp>
-        <p:nvSpPr>
-          <p:cNvPr id="24" name="TextBox 23"/>
-          <p:cNvSpPr txBox="1"/>
-          <p:nvPr/>
-        </p:nvSpPr>
-        <p:spPr>
-          <a:xfrm>
-            <a:off x="6438747" y="3840480"/>
-            <a:ext cx="2122093" cy="731520"/>
-          </a:xfrm>
-          <a:prstGeom prst="rect">
-            <a:avLst/>
-          </a:prstGeom>
-          <a:noFill/>
-        </p:spPr>
-        <p:txBody>
-          <a:bodyPr wrap="square" lIns="0" rIns="0" tIns="0" bIns="0" anchor="t">
-            <a:spAutoFit/>
-          </a:bodyPr>
-          <a:lstStyle/>
-          <a:p>
-            <a:pPr algn="l">
-              <a:lnSpc>
-                <a:spcPct val="125000"/>
-              </a:lnSpc>
-            </a:pPr>
-            <a:r>
-              <a:rPr sz="1100" b="0" i="0">
-                <a:solidFill>
-                  <a:srgbClr val="6B6878"/>
-                </a:solidFill>
-                <a:latin typeface="Inter"/>
-              </a:rPr>
-              <a:t>Choose a package and sign the Service Agreement. Pay instalment 1.</a:t>
-            </a:r>
-          </a:p>
-        </p:txBody>
-      </p:sp>
-      <p:sp>
-        <p:nvSpPr>
-          <p:cNvPr id="25" name="Rounded Rectangle 24"/>
-          <p:cNvSpPr/>
-          <p:nvPr/>
-        </p:nvSpPr>
-        <p:spPr>
-          <a:xfrm>
-            <a:off x="8880881" y="2514600"/>
-            <a:ext cx="2579293" cy="2057400"/>
-          </a:xfrm>
-          <a:prstGeom prst="roundRect">
-            <a:avLst>
-              <a:gd name="adj" fmla="val 5000"/>
-            </a:avLst>
-          </a:prstGeom>
-          <a:solidFill>
-            <a:srgbClr val="F8F6FD"/>
-          </a:solidFill>
-          <a:ln w="9525">
-            <a:solidFill>
-              <a:srgbClr val="E6E1F0"/>
-            </a:solidFill>
-          </a:ln>
-          <a:effectLst/>
-        </p:spPr>
-        <p:style>
-          <a:lnRef idx="1">
-            <a:schemeClr val="accent1"/>
-          </a:lnRef>
-          <a:fillRef idx="3">
-            <a:schemeClr val="accent1"/>
-          </a:fillRef>
-          <a:effectRef idx="2">
-            <a:schemeClr val="accent1"/>
-          </a:effectRef>
-          <a:fontRef idx="minor">
-            <a:schemeClr val="lt1"/>
-          </a:fontRef>
-        </p:style>
-        <p:txBody>
-          <a:bodyPr rtlCol="0" anchor="ctr"/>
-          <a:lstStyle/>
-          <a:p>
-            <a:pPr algn="ctr"/>
-          </a:p>
-        </p:txBody>
-      </p:sp>
-      <p:sp>
-        <p:nvSpPr>
-          <p:cNvPr id="26" name="TextBox 25"/>
-          <p:cNvSpPr txBox="1"/>
-          <p:nvPr/>
-        </p:nvSpPr>
-        <p:spPr>
-          <a:xfrm>
-            <a:off x="9155201" y="2697480"/>
-            <a:ext cx="914400" cy="731520"/>
-          </a:xfrm>
-          <a:prstGeom prst="rect">
-            <a:avLst/>
-          </a:prstGeom>
-          <a:noFill/>
-        </p:spPr>
-        <p:txBody>
-          <a:bodyPr wrap="square" lIns="0" rIns="0" tIns="0" bIns="0" anchor="t">
-            <a:spAutoFit/>
-          </a:bodyPr>
-          <a:lstStyle/>
-          <a:p>
-            <a:pPr algn="l">
-              <a:lnSpc>
-                <a:spcPct val="110000"/>
-              </a:lnSpc>
-            </a:pPr>
-            <a:r>
-              <a:rPr sz="3800" b="0" i="0">
-                <a:solidFill>
-                  <a:srgbClr val="6A26D8"/>
-                </a:solidFill>
-                <a:latin typeface="Playfair Display"/>
-              </a:rPr>
-              <a:t>4</a:t>
-            </a:r>
-          </a:p>
-        </p:txBody>
-      </p:sp>
-      <p:sp>
-        <p:nvSpPr>
-          <p:cNvPr id="27" name="TextBox 26"/>
-          <p:cNvSpPr txBox="1"/>
-          <p:nvPr/>
-        </p:nvSpPr>
-        <p:spPr>
-          <a:xfrm>
-            <a:off x="9155201" y="3474720"/>
-            <a:ext cx="2122093" cy="365760"/>
-          </a:xfrm>
-          <a:prstGeom prst="rect">
-            <a:avLst/>
-          </a:prstGeom>
-          <a:noFill/>
-        </p:spPr>
-        <p:txBody>
-          <a:bodyPr wrap="square" lIns="0" rIns="0" tIns="0" bIns="0" anchor="t">
-            <a:spAutoFit/>
-          </a:bodyPr>
-          <a:lstStyle/>
-          <a:p>
-            <a:pPr algn="l">
-              <a:lnSpc>
-                <a:spcPct val="110000"/>
-              </a:lnSpc>
-            </a:pPr>
-            <a:r>
-              <a:rPr sz="1700" b="0" i="0">
-                <a:solidFill>
-                  <a:srgbClr val="141414"/>
-                </a:solidFill>
-                <a:latin typeface="Playfair Display"/>
-              </a:rPr>
-              <a:t>Launch</a:t>
-            </a:r>
-          </a:p>
-        </p:txBody>
-      </p:sp>
-      <p:sp>
-        <p:nvSpPr>
-          <p:cNvPr id="28" name="TextBox 27"/>
-          <p:cNvSpPr txBox="1"/>
-          <p:nvPr/>
-        </p:nvSpPr>
-        <p:spPr>
-          <a:xfrm>
-            <a:off x="9155201" y="3840480"/>
-            <a:ext cx="2122093" cy="731520"/>
-          </a:xfrm>
-          <a:prstGeom prst="rect">
-            <a:avLst/>
-          </a:prstGeom>
-          <a:noFill/>
-        </p:spPr>
-        <p:txBody>
-          <a:bodyPr wrap="square" lIns="0" rIns="0" tIns="0" bIns="0" anchor="t">
-            <a:spAutoFit/>
-          </a:bodyPr>
-          <a:lstStyle/>
-          <a:p>
-            <a:pPr algn="l">
-              <a:lnSpc>
-                <a:spcPct val="125000"/>
-              </a:lnSpc>
-            </a:pPr>
-            <a:r>
-              <a:rPr sz="1100" b="0" i="0">
-                <a:solidFill>
-                  <a:srgbClr val="6B6878"/>
-                </a:solidFill>
-                <a:latin typeface="Inter"/>
-              </a:rPr>
-              <a:t>Book the domain &amp; hosting call. We go live within 5 working days.</a:t>
-            </a:r>
-          </a:p>
-        </p:txBody>
-      </p:sp>
-      <p:sp>
-        <p:nvSpPr>
-          <p:cNvPr id="29" name="TextBox 28"/>
-          <p:cNvSpPr txBox="1"/>
-          <p:nvPr/>
-        </p:nvSpPr>
-        <p:spPr>
-          <a:xfrm>
-            <a:off x="731520" y="4892040"/>
-            <a:ext cx="3657600" cy="274320"/>
-          </a:xfrm>
-          <a:prstGeom prst="rect">
-            <a:avLst/>
-          </a:prstGeom>
-          <a:noFill/>
-        </p:spPr>
-        <p:txBody>
-          <a:bodyPr wrap="square" lIns="0" rIns="0" tIns="0" bIns="0" anchor="t">
-            <a:spAutoFit/>
-          </a:bodyPr>
-          <a:lstStyle/>
-          <a:p>
-            <a:pPr algn="l">
-              <a:lnSpc>
-                <a:spcPct val="110000"/>
-              </a:lnSpc>
-            </a:pPr>
-            <a:r>
-              <a:rPr sz="900" b="1" i="0">
-                <a:solidFill>
-                  <a:srgbClr val="6A26D8"/>
-                </a:solidFill>
-                <a:latin typeface="Inter"/>
-              </a:rPr>
-              <a:t>YOUR ONBOARDING DOCUMENTS</a:t>
-            </a:r>
-          </a:p>
-        </p:txBody>
-      </p:sp>
-      <p:sp>
-        <p:nvSpPr>
-          <p:cNvPr id="30" name="TextBox 29"/>
-          <p:cNvSpPr txBox="1"/>
-          <p:nvPr/>
-        </p:nvSpPr>
-        <p:spPr>
-          <a:xfrm>
-            <a:off x="731520" y="5212080"/>
-            <a:ext cx="10728655" cy="365760"/>
-          </a:xfrm>
-          <a:prstGeom prst="rect">
-            <a:avLst/>
-          </a:prstGeom>
-          <a:noFill/>
-        </p:spPr>
-        <p:txBody>
-          <a:bodyPr wrap="square" lIns="0" rIns="0" tIns="0" bIns="0" anchor="t">
-            <a:spAutoFit/>
-          </a:bodyPr>
-          <a:lstStyle/>
-          <a:p>
-            <a:pPr algn="l">
-              <a:lnSpc>
-                <a:spcPct val="110000"/>
-              </a:lnSpc>
-            </a:pPr>
-            <a:r>
-              <a:rPr sz="1000" b="1" i="0">
-                <a:solidFill>
-                  <a:srgbClr val="6A26D8"/>
-                </a:solidFill>
-                <a:latin typeface="Inter"/>
-              </a:rPr>
-              <a:t>01 </a:t>
-            </a:r>
-            <a:r>
-              <a:rPr sz="1000" b="0" i="0">
-                <a:solidFill>
-                  <a:srgbClr val="141414"/>
-                </a:solidFill>
-                <a:latin typeface="Inter"/>
-              </a:rPr>
-              <a:t>Welcome Pack      </a:t>
-            </a:r>
-            <a:r>
-              <a:rPr sz="1000" b="1" i="0">
-                <a:solidFill>
-                  <a:srgbClr val="6A26D8"/>
-                </a:solidFill>
-                <a:latin typeface="Inter"/>
-              </a:rPr>
-              <a:t>02 </a:t>
-            </a:r>
-            <a:r>
-              <a:rPr sz="1000" b="0" i="0">
-                <a:solidFill>
-                  <a:srgbClr val="141414"/>
-                </a:solidFill>
-                <a:latin typeface="Inter"/>
-              </a:rPr>
-              <a:t>Onboarding Form      </a:t>
-            </a:r>
-            <a:r>
-              <a:rPr sz="1000" b="1" i="0">
-                <a:solidFill>
-                  <a:srgbClr val="6A26D8"/>
-                </a:solidFill>
-                <a:latin typeface="Inter"/>
-              </a:rPr>
-              <a:t>03 </a:t>
-            </a:r>
-            <a:r>
-              <a:rPr sz="1000" b="0" i="0">
-                <a:solidFill>
-                  <a:srgbClr val="141414"/>
-                </a:solidFill>
-                <a:latin typeface="Inter"/>
-              </a:rPr>
-              <a:t>Service Agreement      </a:t>
-            </a:r>
-            <a:r>
-              <a:rPr sz="1000" b="1" i="0">
-                <a:solidFill>
-                  <a:srgbClr val="6A26D8"/>
-                </a:solidFill>
-                <a:latin typeface="Inter"/>
-              </a:rPr>
-              <a:t>04 </a:t>
-            </a:r>
-            <a:r>
-              <a:rPr sz="1000" b="0" i="0">
-                <a:solidFill>
-                  <a:srgbClr val="141414"/>
-                </a:solidFill>
-                <a:latin typeface="Inter"/>
-              </a:rPr>
-              <a:t>Go-Live &amp; Handover</a:t>
-            </a:r>
-          </a:p>
-        </p:txBody>
-      </p:sp>
-    </p:spTree>
-  </p:cSld>
-  <p:clrMapOvr>
-    <a:masterClrMapping/>
-  </p:clrMapOvr>
-</p:sld>
-</file>
-
-<file path=ppt/slides/slide13.xml><?xml version="1.0" encoding="utf-8"?>
 <p:sld xmlns:a="http://schemas.openxmlformats.org/drawingml/2006/main" xmlns:p="http://schemas.openxmlformats.org/presentationml/2006/main" xmlns:r="http://schemas.openxmlformats.org/officeDocument/2006/relationships">
   <p:cSld>
     <p:spTree>
@@ -8644,7 +5788,7 @@
                 </a:solidFill>
                 <a:latin typeface="Inter"/>
               </a:rPr>
-              <a:t>02 / 13</a:t>
+              <a:t>02 / 11</a:t>
             </a:r>
           </a:p>
         </p:txBody>
@@ -9910,7 +7054,7 @@
                 </a:solidFill>
                 <a:latin typeface="Inter"/>
               </a:rPr>
-              <a:t>03 / 13</a:t>
+              <a:t>03 / 11</a:t>
             </a:r>
           </a:p>
         </p:txBody>
@@ -11228,7 +8372,7 @@
                 </a:solidFill>
                 <a:latin typeface="Inter"/>
               </a:rPr>
-              <a:t>04 / 13</a:t>
+              <a:t>04 / 11</a:t>
             </a:r>
           </a:p>
         </p:txBody>
@@ -12302,7 +9446,7 @@
                 </a:solidFill>
                 <a:latin typeface="Inter"/>
               </a:rPr>
-              <a:t>05 / 13</a:t>
+              <a:t>05 / 11</a:t>
             </a:r>
           </a:p>
         </p:txBody>
@@ -14142,7 +11286,7 @@
                 </a:solidFill>
                 <a:latin typeface="Inter"/>
               </a:rPr>
-              <a:t>06 / 13</a:t>
+              <a:t>06 / 11</a:t>
             </a:r>
           </a:p>
         </p:txBody>
@@ -14220,7 +11364,7 @@
                 </a:solidFill>
                 <a:latin typeface="Playfair Display"/>
               </a:rPr>
-              <a:t>Five working days </a:t>
+              <a:t>A clear path </a:t>
             </a:r>
             <a:r>
               <a:rPr sz="3400" b="0" i="1">
@@ -14446,7 +11590,7 @@
                 </a:solidFill>
                 <a:latin typeface="Inter"/>
               </a:rPr>
-              <a:t>DAY 0</a:t>
+              <a:t>STEP 1</a:t>
             </a:r>
           </a:p>
         </p:txBody>
@@ -14485,7 +11629,7 @@
                 </a:solidFill>
                 <a:latin typeface="Playfair Display"/>
               </a:rPr>
-              <a:t>Onboard &amp; sign</a:t>
+              <a:t>Agreement</a:t>
             </a:r>
           </a:p>
         </p:txBody>
@@ -14524,7 +11668,7 @@
                 </a:solidFill>
                 <a:latin typeface="Inter"/>
               </a:rPr>
-              <a:t>Review pack, onboarding form, agreement, first instalment.</a:t>
+              <a:t>Sign the Service Agreement and settle the development fee.</a:t>
             </a:r>
           </a:p>
         </p:txBody>
@@ -14609,7 +11753,7 @@
                 </a:solidFill>
                 <a:latin typeface="Inter"/>
               </a:rPr>
-              <a:t>DAY 1–2</a:t>
+              <a:t>1–2 WORKING DAYS</a:t>
             </a:r>
           </a:p>
         </p:txBody>
@@ -14687,7 +11831,7 @@
                 </a:solidFill>
                 <a:latin typeface="Inter"/>
               </a:rPr>
-              <a:t>Guided purchase, in your name, on a short call.</a:t>
+              <a:t>Guided purchase, registered in your name.</a:t>
             </a:r>
           </a:p>
         </p:txBody>
@@ -14772,7 +11916,7 @@
                 </a:solidFill>
                 <a:latin typeface="Inter"/>
               </a:rPr>
-              <a:t>DAY 2–4</a:t>
+              <a:t>2–3 WORKING DAYS</a:t>
             </a:r>
           </a:p>
         </p:txBody>
@@ -14811,7 +11955,7 @@
                 </a:solidFill>
                 <a:latin typeface="Playfair Display"/>
               </a:rPr>
-              <a:t>Deploy &amp; configure</a:t>
+              <a:t>Deployment</a:t>
             </a:r>
           </a:p>
         </p:txBody>
@@ -14850,7 +11994,7 @@
                 </a:solidFill>
                 <a:latin typeface="Inter"/>
               </a:rPr>
-              <a:t>Production deploy, DNS, SSL, email and devices.</a:t>
+              <a:t>Go-live with SSL, plus your mailbox on phone and laptop.</a:t>
             </a:r>
           </a:p>
         </p:txBody>
@@ -14935,7 +12079,7 @@
                 </a:solidFill>
                 <a:latin typeface="Inter"/>
               </a:rPr>
-              <a:t>DAY 5</a:t>
+              <a:t>LAUNCH DAY</a:t>
             </a:r>
           </a:p>
         </p:txBody>
@@ -14974,7 +12118,7 @@
                 </a:solidFill>
                 <a:latin typeface="Playfair Display"/>
               </a:rPr>
-              <a:t>Review &amp; go-live</a:t>
+              <a:t>Handover</a:t>
             </a:r>
           </a:p>
         </p:txBody>
@@ -15013,7 +12157,7 @@
                 </a:solidFill>
                 <a:latin typeface="Inter"/>
               </a:rPr>
-              <a:t>Final review, launch, walkthrough and handover.</a:t>
+              <a:t>Final review together and handover of all access.</a:t>
             </a:r>
           </a:p>
         </p:txBody>
@@ -15098,7 +12242,7 @@
                 </a:solidFill>
                 <a:latin typeface="Inter"/>
               </a:rPr>
-              <a:t>TO SEPTEMBER 2027</a:t>
+              <a:t>14 DAYS</a:t>
             </a:r>
           </a:p>
         </p:txBody>
@@ -15137,7 +12281,7 @@
                 </a:solidFill>
                 <a:latin typeface="Playfair Display"/>
               </a:rPr>
-              <a:t>Care period</a:t>
+              <a:t>Launch support</a:t>
             </a:r>
           </a:p>
         </p:txBody>
@@ -15176,7 +12320,7 @@
                 </a:solidFill>
                 <a:latin typeface="Inter"/>
               </a:rPr>
-              <a:t>Support &amp; maintenance, free minor changes in month one.</a:t>
+              <a:t>Any reported issues fixed at no cost.</a:t>
             </a:r>
           </a:p>
         </p:txBody>
@@ -16411,7 +13555,7 @@
                 </a:solidFill>
                 <a:latin typeface="Inter"/>
               </a:rPr>
-              <a:t>We don't resell or mark up domains, hosting or email.</a:t>
+              <a:t>Mailbox subscriptions are paid to the email provider as per their pricing.</a:t>
             </a:r>
           </a:p>
         </p:txBody>
@@ -16450,7 +13594,7 @@
                 </a:solidFill>
                 <a:latin typeface="Inter"/>
               </a:rPr>
-              <a:t>07 / 13</a:t>
+              <a:t>07 / 11</a:t>
             </a:r>
           </a:p>
         </p:txBody>
@@ -16731,7 +13875,7 @@
                 </a:solidFill>
                 <a:latin typeface="Inter"/>
               </a:rPr>
-              <a:t>08 / 13</a:t>
+              <a:t>08 / 11</a:t>
             </a:r>
           </a:p>
         </p:txBody>
@@ -16770,7 +13914,7 @@
                 </a:solidFill>
                 <a:latin typeface="Inter"/>
               </a:rPr>
-              <a:t>07 · REFERRAL PRICING</a:t>
+              <a:t>07 · INVESTMENT</a:t>
             </a:r>
           </a:p>
         </p:txBody>
@@ -16809,7 +13953,7 @@
                 </a:solidFill>
                 <a:latin typeface="Playfair Display"/>
               </a:rPr>
-              <a:t>Below our standard rates, </a:t>
+              <a:t>Simple, </a:t>
             </a:r>
             <a:r>
               <a:rPr sz="3400" b="0" i="1">
@@ -16818,7 +13962,7 @@
                 </a:solidFill>
                 <a:latin typeface="Playfair Display"/>
               </a:rPr>
-              <a:t>by design.</a:t>
+              <a:t>transparent pricing.</a:t>
             </a:r>
           </a:p>
         </p:txBody>
@@ -16935,20 +14079,20 @@
           <a:p>
             <a:pPr algn="l">
               <a:lnSpc>
-                <a:spcPct val="110000"/>
-              </a:lnSpc>
-            </a:pPr>
-            <a:r>
-              <a:rPr sz="1400" b="0" i="0">
+                <a:spcPct val="130000"/>
+              </a:lnSpc>
+            </a:pPr>
+            <a:r>
+              <a:rPr sz="1300" b="0" i="0">
                 <a:solidFill>
                   <a:srgbClr val="6B6878"/>
                 </a:solidFill>
                 <a:latin typeface="Inter"/>
               </a:rPr>
-              <a:t>Because you were referred by </a:t>
-            </a:r>
-            <a:r>
-              <a:rPr sz="1400" b="1" i="0">
+              <a:t>As a referral from </a:t>
+            </a:r>
+            <a:r>
+              <a:rPr sz="1300" b="1" i="0">
                 <a:solidFill>
                   <a:srgbClr val="6A26D8"/>
                 </a:solidFill>
@@ -16957,13 +14101,13 @@
               <a:t>Isha (Wajeeha Baig)</a:t>
             </a:r>
             <a:r>
-              <a:rPr sz="1400" b="0" i="0">
+              <a:rPr sz="1300" b="0" i="0">
                 <a:solidFill>
                   <a:srgbClr val="6B6878"/>
                 </a:solidFill>
                 <a:latin typeface="Inter"/>
               </a:rPr>
-              <a:t>, preferential rates apply to both development and deployment.</a:t>
+              <a:t>, you receive preferential pricing. Because the deployment charges were not communicated clearly at the start, we have waived the deployment fee in full.</a:t>
             </a:r>
           </a:p>
         </p:txBody>
@@ -16976,8 +14120,8 @@
         </p:nvSpPr>
         <p:spPr>
           <a:xfrm>
-            <a:off x="731520" y="3063240"/>
-            <a:ext cx="4572000" cy="274320"/>
+            <a:off x="731520" y="3246120"/>
+            <a:ext cx="3657600" cy="274320"/>
           </a:xfrm>
           <a:prstGeom prst="rect">
             <a:avLst/>
@@ -17015,8 +14159,8 @@
         </p:nvSpPr>
         <p:spPr>
           <a:xfrm>
-            <a:off x="7040880" y="3063240"/>
-            <a:ext cx="2194560" cy="274320"/>
+            <a:off x="3931920" y="3246120"/>
+            <a:ext cx="1463040" cy="274320"/>
           </a:xfrm>
           <a:prstGeom prst="rect">
             <a:avLst/>
@@ -17054,8 +14198,8 @@
         </p:nvSpPr>
         <p:spPr>
           <a:xfrm>
-            <a:off x="9235440" y="3063240"/>
-            <a:ext cx="2194560" cy="274320"/>
+            <a:off x="5669280" y="3246120"/>
+            <a:ext cx="1463040" cy="274320"/>
           </a:xfrm>
           <a:prstGeom prst="rect">
             <a:avLst/>
@@ -17093,8 +14237,8 @@
         </p:nvSpPr>
         <p:spPr>
           <a:xfrm>
-            <a:off x="731520" y="3355848"/>
-            <a:ext cx="10728655" cy="15240"/>
+            <a:off x="731520" y="3538728"/>
+            <a:ext cx="6400800" cy="15240"/>
           </a:xfrm>
           <a:prstGeom prst="rect">
             <a:avLst/>
@@ -17137,8 +14281,8 @@
         </p:nvSpPr>
         <p:spPr>
           <a:xfrm>
-            <a:off x="731520" y="3520440"/>
-            <a:ext cx="5943600" cy="365760"/>
+            <a:off x="731520" y="3703320"/>
+            <a:ext cx="4023360" cy="365760"/>
           </a:xfrm>
           <a:prstGeom prst="rect">
             <a:avLst/>
@@ -17176,8 +14320,8 @@
         </p:nvSpPr>
         <p:spPr>
           <a:xfrm>
-            <a:off x="731520" y="3849624"/>
-            <a:ext cx="5943600" cy="274320"/>
+            <a:off x="731520" y="4032504"/>
+            <a:ext cx="4023360" cy="274320"/>
           </a:xfrm>
           <a:prstGeom prst="rect">
             <a:avLst/>
@@ -17202,7 +14346,7 @@
                 </a:solidFill>
                 <a:latin typeface="Inter"/>
               </a:rPr>
-              <a:t>Almost ready, built from your content</a:t>
+              <a:t>7-page website, built from your content</a:t>
             </a:r>
           </a:p>
         </p:txBody>
@@ -17215,8 +14359,8 @@
         </p:nvSpPr>
         <p:spPr>
           <a:xfrm>
-            <a:off x="7040880" y="3566160"/>
-            <a:ext cx="2194560" cy="365760"/>
+            <a:off x="3931920" y="3749040"/>
+            <a:ext cx="1463040" cy="365760"/>
           </a:xfrm>
           <a:prstGeom prst="rect">
             <a:avLst/>
@@ -17235,7 +14379,7 @@
               </a:lnSpc>
             </a:pPr>
             <a:r>
-              <a:rPr sz="1400" b="0" i="0" strike="sngStrike">
+              <a:rPr sz="1300" b="0" i="0" strike="sngStrike">
                 <a:solidFill>
                   <a:srgbClr val="A29C9E"/>
                 </a:solidFill>
@@ -17254,8 +14398,8 @@
         </p:nvSpPr>
         <p:spPr>
           <a:xfrm>
-            <a:off x="9235440" y="3538728"/>
-            <a:ext cx="2221992" cy="365760"/>
+            <a:off x="5669280" y="3721608"/>
+            <a:ext cx="1463040" cy="365760"/>
           </a:xfrm>
           <a:prstGeom prst="rect">
             <a:avLst/>
@@ -17293,8 +14437,8 @@
         </p:nvSpPr>
         <p:spPr>
           <a:xfrm>
-            <a:off x="731520" y="4160520"/>
-            <a:ext cx="10728655" cy="7620"/>
+            <a:off x="731520" y="4343400"/>
+            <a:ext cx="6400800" cy="7620"/>
           </a:xfrm>
           <a:prstGeom prst="rect">
             <a:avLst/>
@@ -17337,8 +14481,8 @@
         </p:nvSpPr>
         <p:spPr>
           <a:xfrm>
-            <a:off x="731520" y="4233672"/>
-            <a:ext cx="5943600" cy="365760"/>
+            <a:off x="731520" y="4416552"/>
+            <a:ext cx="4023360" cy="365760"/>
           </a:xfrm>
           <a:prstGeom prst="rect">
             <a:avLst/>
@@ -17363,7 +14507,7 @@
                 </a:solidFill>
                 <a:latin typeface="Playfair Display"/>
               </a:rPr>
-              <a:t>Deployment · Complete Care</a:t>
+              <a:t>Deployment</a:t>
             </a:r>
           </a:p>
         </p:txBody>
@@ -17376,8 +14520,8 @@
         </p:nvSpPr>
         <p:spPr>
           <a:xfrm>
-            <a:off x="731520" y="4562856"/>
-            <a:ext cx="5943600" cy="274320"/>
+            <a:off x="731520" y="4745736"/>
+            <a:ext cx="4023360" cy="274320"/>
           </a:xfrm>
           <a:prstGeom prst="rect">
             <a:avLst/>
@@ -17402,7 +14546,7 @@
                 </a:solidFill>
                 <a:latin typeface="Inter"/>
               </a:rPr>
-              <a:t>Option A  ·  Recommended</a:t>
+              <a:t>Waived  ·  includes 1 professional mailbox</a:t>
             </a:r>
           </a:p>
         </p:txBody>
@@ -17415,8 +14559,8 @@
         </p:nvSpPr>
         <p:spPr>
           <a:xfrm>
-            <a:off x="7040880" y="4279392"/>
-            <a:ext cx="2194560" cy="365760"/>
+            <a:off x="3931920" y="4462272"/>
+            <a:ext cx="1463040" cy="365760"/>
           </a:xfrm>
           <a:prstGeom prst="rect">
             <a:avLst/>
@@ -17435,7 +14579,7 @@
               </a:lnSpc>
             </a:pPr>
             <a:r>
-              <a:rPr sz="1400" b="0" i="0" strike="sngStrike">
+              <a:rPr sz="1300" b="0" i="0" strike="sngStrike">
                 <a:solidFill>
                   <a:srgbClr val="A29C9E"/>
                 </a:solidFill>
@@ -17454,8 +14598,8 @@
         </p:nvSpPr>
         <p:spPr>
           <a:xfrm>
-            <a:off x="9235440" y="4251960"/>
-            <a:ext cx="2221992" cy="365760"/>
+            <a:off x="5669280" y="4434840"/>
+            <a:ext cx="1463040" cy="365760"/>
           </a:xfrm>
           <a:prstGeom prst="rect">
             <a:avLst/>
@@ -17480,7 +14624,7 @@
                 </a:solidFill>
                 <a:latin typeface="Inter"/>
               </a:rPr>
-              <a:t>PKR 20,000</a:t>
+              <a:t>PKR 0</a:t>
             </a:r>
           </a:p>
         </p:txBody>
@@ -17493,8 +14637,8 @@
         </p:nvSpPr>
         <p:spPr>
           <a:xfrm>
-            <a:off x="731520" y="4873752"/>
-            <a:ext cx="10728655" cy="7620"/>
+            <a:off x="731520" y="5056632"/>
+            <a:ext cx="6400800" cy="7620"/>
           </a:xfrm>
           <a:prstGeom prst="rect">
             <a:avLst/>
@@ -17537,173 +14681,99 @@
         </p:nvSpPr>
         <p:spPr>
           <a:xfrm>
-            <a:off x="731520" y="4946904"/>
-            <a:ext cx="5943600" cy="365760"/>
-          </a:xfrm>
-          <a:prstGeom prst="rect">
-            <a:avLst/>
-          </a:prstGeom>
-          <a:noFill/>
-        </p:spPr>
-        <p:txBody>
-          <a:bodyPr wrap="square" lIns="0" rIns="0" tIns="0" bIns="0" anchor="t">
-            <a:spAutoFit/>
-          </a:bodyPr>
-          <a:lstStyle/>
-          <a:p>
-            <a:pPr algn="l">
-              <a:lnSpc>
-                <a:spcPct val="110000"/>
-              </a:lnSpc>
-            </a:pPr>
-            <a:r>
-              <a:rPr sz="1600" b="0" i="0">
+            <a:off x="731520" y="5166360"/>
+            <a:ext cx="3657600" cy="365760"/>
+          </a:xfrm>
+          <a:prstGeom prst="rect">
+            <a:avLst/>
+          </a:prstGeom>
+          <a:noFill/>
+        </p:spPr>
+        <p:txBody>
+          <a:bodyPr wrap="square" lIns="0" rIns="0" tIns="0" bIns="0" anchor="t">
+            <a:spAutoFit/>
+          </a:bodyPr>
+          <a:lstStyle/>
+          <a:p>
+            <a:pPr algn="l">
+              <a:lnSpc>
+                <a:spcPct val="110000"/>
+              </a:lnSpc>
+            </a:pPr>
+            <a:r>
+              <a:rPr sz="1300" b="1" i="0">
                 <a:solidFill>
                   <a:srgbClr val="141414"/>
                 </a:solidFill>
+                <a:latin typeface="Inter"/>
+              </a:rPr>
+              <a:t>Total, payable on signing</a:t>
+            </a:r>
+          </a:p>
+        </p:txBody>
+      </p:sp>
+      <p:sp>
+        <p:nvSpPr>
+          <p:cNvPr id="29" name="TextBox 28"/>
+          <p:cNvSpPr txBox="1"/>
+          <p:nvPr/>
+        </p:nvSpPr>
+        <p:spPr>
+          <a:xfrm>
+            <a:off x="4754880" y="5120640"/>
+            <a:ext cx="2377440" cy="457200"/>
+          </a:xfrm>
+          <a:prstGeom prst="rect">
+            <a:avLst/>
+          </a:prstGeom>
+          <a:noFill/>
+        </p:spPr>
+        <p:txBody>
+          <a:bodyPr wrap="square" lIns="0" rIns="0" tIns="0" bIns="0" anchor="t">
+            <a:spAutoFit/>
+          </a:bodyPr>
+          <a:lstStyle/>
+          <a:p>
+            <a:pPr algn="r">
+              <a:lnSpc>
+                <a:spcPct val="110000"/>
+              </a:lnSpc>
+            </a:pPr>
+            <a:r>
+              <a:rPr sz="2200" b="0" i="0">
+                <a:solidFill>
+                  <a:srgbClr val="6A26D8"/>
+                </a:solidFill>
                 <a:latin typeface="Playfair Display"/>
               </a:rPr>
-              <a:t>Deployment · Launch Essentials</a:t>
-            </a:r>
-          </a:p>
-        </p:txBody>
-      </p:sp>
-      <p:sp>
-        <p:nvSpPr>
-          <p:cNvPr id="29" name="TextBox 28"/>
-          <p:cNvSpPr txBox="1"/>
-          <p:nvPr/>
-        </p:nvSpPr>
-        <p:spPr>
-          <a:xfrm>
-            <a:off x="731520" y="5276088"/>
-            <a:ext cx="5943600" cy="274320"/>
-          </a:xfrm>
-          <a:prstGeom prst="rect">
-            <a:avLst/>
-          </a:prstGeom>
-          <a:noFill/>
-        </p:spPr>
-        <p:txBody>
-          <a:bodyPr wrap="square" lIns="0" rIns="0" tIns="0" bIns="0" anchor="t">
-            <a:spAutoFit/>
-          </a:bodyPr>
-          <a:lstStyle/>
-          <a:p>
-            <a:pPr algn="l">
-              <a:lnSpc>
-                <a:spcPct val="110000"/>
-              </a:lnSpc>
-            </a:pPr>
-            <a:r>
-              <a:rPr sz="1050" b="0" i="0">
-                <a:solidFill>
-                  <a:srgbClr val="6B6878"/>
-                </a:solidFill>
-                <a:latin typeface="Inter"/>
-              </a:rPr>
-              <a:t>Option B</a:t>
-            </a:r>
-          </a:p>
-        </p:txBody>
-      </p:sp>
-      <p:sp>
-        <p:nvSpPr>
-          <p:cNvPr id="30" name="TextBox 29"/>
-          <p:cNvSpPr txBox="1"/>
-          <p:nvPr/>
-        </p:nvSpPr>
-        <p:spPr>
-          <a:xfrm>
-            <a:off x="7040880" y="4992624"/>
-            <a:ext cx="2194560" cy="365760"/>
-          </a:xfrm>
-          <a:prstGeom prst="rect">
-            <a:avLst/>
-          </a:prstGeom>
-          <a:noFill/>
-        </p:spPr>
-        <p:txBody>
-          <a:bodyPr wrap="square" lIns="0" rIns="0" tIns="0" bIns="0" anchor="t">
-            <a:spAutoFit/>
-          </a:bodyPr>
-          <a:lstStyle/>
-          <a:p>
-            <a:pPr algn="r">
-              <a:lnSpc>
-                <a:spcPct val="110000"/>
-              </a:lnSpc>
-            </a:pPr>
-            <a:r>
-              <a:rPr sz="1400" b="0" i="0" strike="sngStrike">
-                <a:solidFill>
-                  <a:srgbClr val="A29C9E"/>
-                </a:solidFill>
-                <a:latin typeface="Inter"/>
-              </a:rPr>
-              <a:t>PKR 25,000</a:t>
-            </a:r>
-          </a:p>
-        </p:txBody>
-      </p:sp>
-      <p:sp>
-        <p:nvSpPr>
-          <p:cNvPr id="31" name="TextBox 30"/>
-          <p:cNvSpPr txBox="1"/>
-          <p:nvPr/>
-        </p:nvSpPr>
-        <p:spPr>
-          <a:xfrm>
-            <a:off x="9235440" y="4965192"/>
-            <a:ext cx="2221992" cy="365760"/>
-          </a:xfrm>
-          <a:prstGeom prst="rect">
-            <a:avLst/>
-          </a:prstGeom>
-          <a:noFill/>
-        </p:spPr>
-        <p:txBody>
-          <a:bodyPr wrap="square" lIns="0" rIns="0" tIns="0" bIns="0" anchor="t">
-            <a:spAutoFit/>
-          </a:bodyPr>
-          <a:lstStyle/>
-          <a:p>
-            <a:pPr algn="r">
-              <a:lnSpc>
-                <a:spcPct val="110000"/>
-              </a:lnSpc>
-            </a:pPr>
-            <a:r>
-              <a:rPr sz="1800" b="1" i="0">
-                <a:solidFill>
-                  <a:srgbClr val="141414"/>
-                </a:solidFill>
-                <a:latin typeface="Inter"/>
-              </a:rPr>
-              <a:t>PKR 12,000</a:t>
-            </a:r>
-          </a:p>
-        </p:txBody>
-      </p:sp>
-      <p:sp>
-        <p:nvSpPr>
-          <p:cNvPr id="32" name="Rectangle 31"/>
+              <a:t>PKR 15,000</a:t>
+            </a:r>
+          </a:p>
+        </p:txBody>
+      </p:sp>
+      <p:sp>
+        <p:nvSpPr>
+          <p:cNvPr id="30" name="Rounded Rectangle 29"/>
           <p:cNvSpPr/>
           <p:nvPr/>
         </p:nvSpPr>
         <p:spPr>
           <a:xfrm>
-            <a:off x="731520" y="5586984"/>
-            <a:ext cx="10728655" cy="7620"/>
-          </a:xfrm>
-          <a:prstGeom prst="rect">
-            <a:avLst/>
+            <a:off x="7589520" y="3246120"/>
+            <a:ext cx="3867912" cy="2651760"/>
+          </a:xfrm>
+          <a:prstGeom prst="roundRect">
+            <a:avLst>
+              <a:gd name="adj" fmla="val 5000"/>
+            </a:avLst>
           </a:prstGeom>
           <a:solidFill>
-            <a:srgbClr val="E6E1F0"/>
+            <a:srgbClr val="F8F6FD"/>
           </a:solidFill>
-          <a:ln>
-            <a:noFill/>
+          <a:ln w="9525">
+            <a:solidFill>
+              <a:srgbClr val="E6E1F0"/>
+            </a:solidFill>
           </a:ln>
           <a:effectLst/>
         </p:spPr>
@@ -17726,6 +14796,171 @@
           <a:lstStyle/>
           <a:p>
             <a:pPr algn="ctr"/>
+          </a:p>
+        </p:txBody>
+      </p:sp>
+      <p:sp>
+        <p:nvSpPr>
+          <p:cNvPr id="31" name="TextBox 30"/>
+          <p:cNvSpPr txBox="1"/>
+          <p:nvPr/>
+        </p:nvSpPr>
+        <p:spPr>
+          <a:xfrm>
+            <a:off x="7909560" y="3474720"/>
+            <a:ext cx="2743200" cy="274320"/>
+          </a:xfrm>
+          <a:prstGeom prst="rect">
+            <a:avLst/>
+          </a:prstGeom>
+          <a:noFill/>
+        </p:spPr>
+        <p:txBody>
+          <a:bodyPr wrap="square" lIns="0" rIns="0" tIns="0" bIns="0" anchor="t">
+            <a:spAutoFit/>
+          </a:bodyPr>
+          <a:lstStyle/>
+          <a:p>
+            <a:pPr algn="l">
+              <a:lnSpc>
+                <a:spcPct val="110000"/>
+              </a:lnSpc>
+            </a:pPr>
+            <a:r>
+              <a:rPr sz="1000" b="1" i="0">
+                <a:solidFill>
+                  <a:srgbClr val="6A26D8"/>
+                </a:solidFill>
+                <a:latin typeface="Inter"/>
+              </a:rPr>
+              <a:t>OPTIONAL</a:t>
+            </a:r>
+          </a:p>
+        </p:txBody>
+      </p:sp>
+      <p:sp>
+        <p:nvSpPr>
+          <p:cNvPr id="32" name="TextBox 31"/>
+          <p:cNvSpPr txBox="1"/>
+          <p:nvPr/>
+        </p:nvSpPr>
+        <p:spPr>
+          <a:xfrm>
+            <a:off x="7909560" y="3730752"/>
+            <a:ext cx="3383280" cy="457200"/>
+          </a:xfrm>
+          <a:prstGeom prst="rect">
+            <a:avLst/>
+          </a:prstGeom>
+          <a:noFill/>
+        </p:spPr>
+        <p:txBody>
+          <a:bodyPr wrap="square" lIns="0" rIns="0" tIns="0" bIns="0" anchor="t">
+            <a:spAutoFit/>
+          </a:bodyPr>
+          <a:lstStyle/>
+          <a:p>
+            <a:pPr algn="l">
+              <a:lnSpc>
+                <a:spcPct val="110000"/>
+              </a:lnSpc>
+            </a:pPr>
+            <a:r>
+              <a:rPr sz="1600" b="0" i="0">
+                <a:solidFill>
+                  <a:srgbClr val="141414"/>
+                </a:solidFill>
+                <a:latin typeface="Playfair Display"/>
+              </a:rPr>
+              <a:t>Additional professional emails</a:t>
+            </a:r>
+          </a:p>
+        </p:txBody>
+      </p:sp>
+      <p:sp>
+        <p:nvSpPr>
+          <p:cNvPr id="33" name="TextBox 32"/>
+          <p:cNvSpPr txBox="1"/>
+          <p:nvPr/>
+        </p:nvSpPr>
+        <p:spPr>
+          <a:xfrm>
+            <a:off x="7909560" y="4160520"/>
+            <a:ext cx="3383280" cy="548640"/>
+          </a:xfrm>
+          <a:prstGeom prst="rect">
+            <a:avLst/>
+          </a:prstGeom>
+          <a:noFill/>
+        </p:spPr>
+        <p:txBody>
+          <a:bodyPr wrap="square" lIns="0" rIns="0" tIns="0" bIns="0" anchor="t">
+            <a:spAutoFit/>
+          </a:bodyPr>
+          <a:lstStyle/>
+          <a:p>
+            <a:pPr algn="l">
+              <a:lnSpc>
+                <a:spcPct val="110000"/>
+              </a:lnSpc>
+            </a:pPr>
+            <a:r>
+              <a:rPr sz="2400" b="0" i="0">
+                <a:solidFill>
+                  <a:srgbClr val="6A26D8"/>
+                </a:solidFill>
+                <a:latin typeface="Playfair Display"/>
+              </a:rPr>
+              <a:t>PKR 1,500</a:t>
+            </a:r>
+            <a:r>
+              <a:rPr sz="1100" b="0" i="0">
+                <a:solidFill>
+                  <a:srgbClr val="6B6878"/>
+                </a:solidFill>
+                <a:latin typeface="Inter"/>
+              </a:rPr>
+              <a:t>  per account</a:t>
+            </a:r>
+          </a:p>
+        </p:txBody>
+      </p:sp>
+      <p:sp>
+        <p:nvSpPr>
+          <p:cNvPr id="34" name="TextBox 33"/>
+          <p:cNvSpPr txBox="1"/>
+          <p:nvPr/>
+        </p:nvSpPr>
+        <p:spPr>
+          <a:xfrm>
+            <a:off x="7909560" y="4754880"/>
+            <a:ext cx="3291840" cy="1005840"/>
+          </a:xfrm>
+          <a:prstGeom prst="rect">
+            <a:avLst/>
+          </a:prstGeom>
+          <a:noFill/>
+        </p:spPr>
+        <p:txBody>
+          <a:bodyPr wrap="square" lIns="0" rIns="0" tIns="0" bIns="0" anchor="t">
+            <a:spAutoFit/>
+          </a:bodyPr>
+          <a:lstStyle/>
+          <a:p>
+            <a:pPr algn="l">
+              <a:lnSpc>
+                <a:spcPct val="130000"/>
+              </a:lnSpc>
+            </a:pPr>
+            <a:r>
+              <a:rPr sz="1100" b="0" i="0">
+                <a:solidFill>
+                  <a:srgbClr val="6B6878"/>
+                </a:solidFill>
+                <a:latin typeface="Inter"/>
+              </a:rPr>
+              <a:t>One-time setup fee paid to OBD. The mailbox subscription is paid by you directly to the email provider.</a:t>
+            </a:r>
           </a:p>
         </p:txBody>
       </p:sp>
@@ -17883,7 +15118,7 @@
                 </a:solidFill>
                 <a:latin typeface="Inter"/>
               </a:rPr>
-              <a:t>CHOOSE YOUR PACKAGE</a:t>
+              <a:t>SUPPORT</a:t>
             </a:r>
           </a:p>
         </p:txBody>
@@ -18005,7 +15240,7 @@
                 </a:solidFill>
                 <a:latin typeface="Inter"/>
               </a:rPr>
-              <a:t>09 / 13</a:t>
+              <a:t>09 / 11</a:t>
             </a:r>
           </a:p>
         </p:txBody>
@@ -18044,7 +15279,7 @@
                 </a:solidFill>
                 <a:latin typeface="Inter"/>
               </a:rPr>
-              <a:t>08 · DEPLOYMENT OPTIONS</a:t>
+              <a:t>08 · AFTER LAUNCH</a:t>
             </a:r>
           </a:p>
         </p:txBody>
@@ -18083,7 +15318,7 @@
                 </a:solidFill>
                 <a:latin typeface="Playfair Display"/>
               </a:rPr>
-              <a:t>Choose how we </a:t>
+              <a:t>Support you </a:t>
             </a:r>
             <a:r>
               <a:rPr sz="3400" b="0" i="1">
@@ -18092,7 +15327,7 @@
                 </a:solidFill>
                 <a:latin typeface="Playfair Display"/>
               </a:rPr>
-              <a:t>look after you.</a:t>
+              <a:t>can rely on.</a:t>
             </a:r>
           </a:p>
         </p:txBody>
@@ -18193,8 +15428,8 @@
         </p:nvSpPr>
         <p:spPr>
           <a:xfrm>
-            <a:off x="731520" y="2468880"/>
-            <a:ext cx="5257800" cy="3611880"/>
+            <a:off x="731520" y="2514600"/>
+            <a:ext cx="3931920" cy="3429000"/>
           </a:xfrm>
           <a:prstGeom prst="roundRect">
             <a:avLst>
@@ -18202,7 +15437,7 @@
             </a:avLst>
           </a:prstGeom>
           <a:solidFill>
-            <a:srgbClr val="FFFFFF"/>
+            <a:srgbClr val="6A26D8"/>
           </a:solidFill>
           <a:ln w="9525">
             <a:solidFill>
@@ -18235,20 +15470,276 @@
       </p:sp>
       <p:sp>
         <p:nvSpPr>
-          <p:cNvPr id="14" name="Rectangle 13"/>
+          <p:cNvPr id="14" name="TextBox 13"/>
+          <p:cNvSpPr txBox="1"/>
+          <p:nvPr/>
+        </p:nvSpPr>
+        <p:spPr>
+          <a:xfrm>
+            <a:off x="1097280" y="2788920"/>
+            <a:ext cx="3291840" cy="274320"/>
+          </a:xfrm>
+          <a:prstGeom prst="rect">
+            <a:avLst/>
+          </a:prstGeom>
+          <a:noFill/>
+        </p:spPr>
+        <p:txBody>
+          <a:bodyPr wrap="square" lIns="0" rIns="0" tIns="0" bIns="0" anchor="t">
+            <a:spAutoFit/>
+          </a:bodyPr>
+          <a:lstStyle/>
+          <a:p>
+            <a:pPr algn="l">
+              <a:lnSpc>
+                <a:spcPct val="110000"/>
+              </a:lnSpc>
+            </a:pPr>
+            <a:r>
+              <a:rPr sz="950" b="1" i="0">
+                <a:solidFill>
+                  <a:srgbClr val="C9B4FF"/>
+                </a:solidFill>
+                <a:latin typeface="Inter"/>
+              </a:rPr>
+              <a:t>LAUNCH SUPPORT</a:t>
+            </a:r>
+          </a:p>
+        </p:txBody>
+      </p:sp>
+      <p:sp>
+        <p:nvSpPr>
+          <p:cNvPr id="15" name="TextBox 14"/>
+          <p:cNvSpPr txBox="1"/>
+          <p:nvPr/>
+        </p:nvSpPr>
+        <p:spPr>
+          <a:xfrm>
+            <a:off x="1097280" y="3108960"/>
+            <a:ext cx="3291840" cy="914400"/>
+          </a:xfrm>
+          <a:prstGeom prst="rect">
+            <a:avLst/>
+          </a:prstGeom>
+          <a:noFill/>
+        </p:spPr>
+        <p:txBody>
+          <a:bodyPr wrap="square" lIns="0" rIns="0" tIns="0" bIns="0" anchor="t">
+            <a:spAutoFit/>
+          </a:bodyPr>
+          <a:lstStyle/>
+          <a:p>
+            <a:pPr algn="l">
+              <a:lnSpc>
+                <a:spcPct val="110000"/>
+              </a:lnSpc>
+            </a:pPr>
+            <a:r>
+              <a:rPr sz="4000" b="0" i="0">
+                <a:solidFill>
+                  <a:srgbClr val="FFFFFF"/>
+                </a:solidFill>
+                <a:latin typeface="Playfair Display"/>
+              </a:rPr>
+              <a:t>14 days</a:t>
+            </a:r>
+          </a:p>
+        </p:txBody>
+      </p:sp>
+      <p:sp>
+        <p:nvSpPr>
+          <p:cNvPr id="16" name="TextBox 15"/>
+          <p:cNvSpPr txBox="1"/>
+          <p:nvPr/>
+        </p:nvSpPr>
+        <p:spPr>
+          <a:xfrm>
+            <a:off x="1097280" y="4114800"/>
+            <a:ext cx="3200400" cy="1645920"/>
+          </a:xfrm>
+          <a:prstGeom prst="rect">
+            <a:avLst/>
+          </a:prstGeom>
+          <a:noFill/>
+        </p:spPr>
+        <p:txBody>
+          <a:bodyPr wrap="square" lIns="0" rIns="0" tIns="0" bIns="0" anchor="t">
+            <a:spAutoFit/>
+          </a:bodyPr>
+          <a:lstStyle/>
+          <a:p>
+            <a:pPr algn="l">
+              <a:lnSpc>
+                <a:spcPct val="130000"/>
+              </a:lnSpc>
+              <a:spcAft>
+                <a:spcPts val="600"/>
+              </a:spcAft>
+            </a:pPr>
+            <a:r>
+              <a:rPr sz="1150" b="1" i="0">
+                <a:solidFill>
+                  <a:srgbClr val="FFFFFF"/>
+                </a:solidFill>
+                <a:latin typeface="Inter"/>
+              </a:rPr>
+              <a:t>Any issue you report after go-live is fixed at no cost.</a:t>
+            </a:r>
+          </a:p>
+          <a:p>
+            <a:pPr algn="l">
+              <a:lnSpc>
+                <a:spcPct val="130000"/>
+              </a:lnSpc>
+              <a:spcAft>
+                <a:spcPts val="600"/>
+              </a:spcAft>
+            </a:pPr>
+            <a:r>
+              <a:rPr sz="1150" b="0" i="0">
+                <a:solidFill>
+                  <a:srgbClr val="C9B4FF"/>
+                </a:solidFill>
+                <a:latin typeface="Inter"/>
+              </a:rPr>
+              <a:t>Further changes and ongoing maintenance are available on request, quoted in advance.</a:t>
+            </a:r>
+          </a:p>
+        </p:txBody>
+      </p:sp>
+      <p:sp>
+        <p:nvSpPr>
+          <p:cNvPr id="17" name="TextBox 16"/>
+          <p:cNvSpPr txBox="1"/>
+          <p:nvPr/>
+        </p:nvSpPr>
+        <p:spPr>
+          <a:xfrm>
+            <a:off x="4983480" y="2514600"/>
+            <a:ext cx="1828800" cy="274320"/>
+          </a:xfrm>
+          <a:prstGeom prst="rect">
+            <a:avLst/>
+          </a:prstGeom>
+          <a:noFill/>
+        </p:spPr>
+        <p:txBody>
+          <a:bodyPr wrap="square" lIns="0" rIns="0" tIns="0" bIns="0" anchor="t">
+            <a:spAutoFit/>
+          </a:bodyPr>
+          <a:lstStyle/>
+          <a:p>
+            <a:pPr algn="l">
+              <a:lnSpc>
+                <a:spcPct val="110000"/>
+              </a:lnSpc>
+            </a:pPr>
+            <a:r>
+              <a:rPr sz="900" b="1" i="0">
+                <a:solidFill>
+                  <a:srgbClr val="6B6878"/>
+                </a:solidFill>
+                <a:latin typeface="Inter"/>
+              </a:rPr>
+              <a:t>PRIORITY</a:t>
+            </a:r>
+          </a:p>
+        </p:txBody>
+      </p:sp>
+      <p:sp>
+        <p:nvSpPr>
+          <p:cNvPr id="18" name="TextBox 17"/>
+          <p:cNvSpPr txBox="1"/>
+          <p:nvPr/>
+        </p:nvSpPr>
+        <p:spPr>
+          <a:xfrm>
+            <a:off x="6446520" y="2514600"/>
+            <a:ext cx="2743200" cy="274320"/>
+          </a:xfrm>
+          <a:prstGeom prst="rect">
+            <a:avLst/>
+          </a:prstGeom>
+          <a:noFill/>
+        </p:spPr>
+        <p:txBody>
+          <a:bodyPr wrap="square" lIns="0" rIns="0" tIns="0" bIns="0" anchor="t">
+            <a:spAutoFit/>
+          </a:bodyPr>
+          <a:lstStyle/>
+          <a:p>
+            <a:pPr algn="l">
+              <a:lnSpc>
+                <a:spcPct val="110000"/>
+              </a:lnSpc>
+            </a:pPr>
+            <a:r>
+              <a:rPr sz="900" b="1" i="0">
+                <a:solidFill>
+                  <a:srgbClr val="6B6878"/>
+                </a:solidFill>
+                <a:latin typeface="Inter"/>
+              </a:rPr>
+              <a:t>EXAMPLE</a:t>
+            </a:r>
+          </a:p>
+        </p:txBody>
+      </p:sp>
+      <p:sp>
+        <p:nvSpPr>
+          <p:cNvPr id="19" name="TextBox 18"/>
+          <p:cNvSpPr txBox="1"/>
+          <p:nvPr/>
+        </p:nvSpPr>
+        <p:spPr>
+          <a:xfrm>
+            <a:off x="9464040" y="2514600"/>
+            <a:ext cx="2011680" cy="274320"/>
+          </a:xfrm>
+          <a:prstGeom prst="rect">
+            <a:avLst/>
+          </a:prstGeom>
+          <a:noFill/>
+        </p:spPr>
+        <p:txBody>
+          <a:bodyPr wrap="square" lIns="0" rIns="0" tIns="0" bIns="0" anchor="t">
+            <a:spAutoFit/>
+          </a:bodyPr>
+          <a:lstStyle/>
+          <a:p>
+            <a:pPr algn="r">
+              <a:lnSpc>
+                <a:spcPct val="110000"/>
+              </a:lnSpc>
+            </a:pPr>
+            <a:r>
+              <a:rPr sz="900" b="1" i="0">
+                <a:solidFill>
+                  <a:srgbClr val="6B6878"/>
+                </a:solidFill>
+                <a:latin typeface="Inter"/>
+              </a:rPr>
+              <a:t>FIRST RESPONSE</a:t>
+            </a:r>
+          </a:p>
+        </p:txBody>
+      </p:sp>
+      <p:sp>
+        <p:nvSpPr>
+          <p:cNvPr id="20" name="Rectangle 19"/>
           <p:cNvSpPr/>
           <p:nvPr/>
         </p:nvSpPr>
         <p:spPr>
           <a:xfrm>
-            <a:off x="731520" y="2468880"/>
-            <a:ext cx="5257800" cy="82296"/>
+            <a:off x="4983480" y="2807208"/>
+            <a:ext cx="6473952" cy="15240"/>
           </a:xfrm>
           <a:prstGeom prst="rect">
             <a:avLst/>
           </a:prstGeom>
           <a:solidFill>
-            <a:srgbClr val="6A26D8"/>
+            <a:srgbClr val="141414"/>
           </a:solidFill>
           <a:ln>
             <a:noFill/>
@@ -18279,22 +15770,137 @@
       </p:sp>
       <p:sp>
         <p:nvSpPr>
-          <p:cNvPr id="15" name="Rounded Rectangle 14"/>
+          <p:cNvPr id="21" name="TextBox 20"/>
+          <p:cNvSpPr txBox="1"/>
+          <p:nvPr/>
+        </p:nvSpPr>
+        <p:spPr>
+          <a:xfrm>
+            <a:off x="4983480" y="2971800"/>
+            <a:ext cx="1371600" cy="365760"/>
+          </a:xfrm>
+          <a:prstGeom prst="rect">
+            <a:avLst/>
+          </a:prstGeom>
+          <a:noFill/>
+        </p:spPr>
+        <p:txBody>
+          <a:bodyPr wrap="square" lIns="0" rIns="0" tIns="0" bIns="0" anchor="t">
+            <a:spAutoFit/>
+          </a:bodyPr>
+          <a:lstStyle/>
+          <a:p>
+            <a:pPr algn="l">
+              <a:lnSpc>
+                <a:spcPct val="110000"/>
+              </a:lnSpc>
+            </a:pPr>
+            <a:r>
+              <a:rPr sz="1400" b="1" i="0">
+                <a:solidFill>
+                  <a:srgbClr val="6A26D8"/>
+                </a:solidFill>
+                <a:latin typeface="Inter"/>
+              </a:rPr>
+              <a:t>Critical</a:t>
+            </a:r>
+          </a:p>
+        </p:txBody>
+      </p:sp>
+      <p:sp>
+        <p:nvSpPr>
+          <p:cNvPr id="22" name="TextBox 21"/>
+          <p:cNvSpPr txBox="1"/>
+          <p:nvPr/>
+        </p:nvSpPr>
+        <p:spPr>
+          <a:xfrm>
+            <a:off x="6446520" y="2971800"/>
+            <a:ext cx="3017520" cy="365760"/>
+          </a:xfrm>
+          <a:prstGeom prst="rect">
+            <a:avLst/>
+          </a:prstGeom>
+          <a:noFill/>
+        </p:spPr>
+        <p:txBody>
+          <a:bodyPr wrap="square" lIns="0" rIns="0" tIns="0" bIns="0" anchor="t">
+            <a:spAutoFit/>
+          </a:bodyPr>
+          <a:lstStyle/>
+          <a:p>
+            <a:pPr algn="l">
+              <a:lnSpc>
+                <a:spcPct val="110000"/>
+              </a:lnSpc>
+            </a:pPr>
+            <a:r>
+              <a:rPr sz="1300" b="0" i="0">
+                <a:solidFill>
+                  <a:srgbClr val="2A2A2D"/>
+                </a:solidFill>
+                <a:latin typeface="Inter"/>
+              </a:rPr>
+              <a:t>Website or email down</a:t>
+            </a:r>
+          </a:p>
+        </p:txBody>
+      </p:sp>
+      <p:sp>
+        <p:nvSpPr>
+          <p:cNvPr id="23" name="TextBox 22"/>
+          <p:cNvSpPr txBox="1"/>
+          <p:nvPr/>
+        </p:nvSpPr>
+        <p:spPr>
+          <a:xfrm>
+            <a:off x="9464040" y="2971800"/>
+            <a:ext cx="1993392" cy="365760"/>
+          </a:xfrm>
+          <a:prstGeom prst="rect">
+            <a:avLst/>
+          </a:prstGeom>
+          <a:noFill/>
+        </p:spPr>
+        <p:txBody>
+          <a:bodyPr wrap="square" lIns="0" rIns="0" tIns="0" bIns="0" anchor="t">
+            <a:spAutoFit/>
+          </a:bodyPr>
+          <a:lstStyle/>
+          <a:p>
+            <a:pPr algn="r">
+              <a:lnSpc>
+                <a:spcPct val="110000"/>
+              </a:lnSpc>
+            </a:pPr>
+            <a:r>
+              <a:rPr sz="1300" b="0" i="0">
+                <a:solidFill>
+                  <a:srgbClr val="141414"/>
+                </a:solidFill>
+                <a:latin typeface="Inter"/>
+              </a:rPr>
+              <a:t>Same working day</a:t>
+            </a:r>
+          </a:p>
+        </p:txBody>
+      </p:sp>
+      <p:sp>
+        <p:nvSpPr>
+          <p:cNvPr id="24" name="Rectangle 23"/>
           <p:cNvSpPr/>
           <p:nvPr/>
         </p:nvSpPr>
         <p:spPr>
           <a:xfrm>
-            <a:off x="4389120" y="2697480"/>
-            <a:ext cx="1325880" cy="292608"/>
-          </a:xfrm>
-          <a:prstGeom prst="roundRect">
-            <a:avLst>
-              <a:gd name="adj" fmla="val 50000"/>
-            </a:avLst>
+            <a:off x="4983480" y="3383280"/>
+            <a:ext cx="6473952" cy="7620"/>
+          </a:xfrm>
+          <a:prstGeom prst="rect">
+            <a:avLst/>
           </a:prstGeom>
           <a:solidFill>
-            <a:srgbClr val="6A26D8"/>
+            <a:srgbClr val="E6E1F0"/>
           </a:solidFill>
           <a:ln>
             <a:noFill/>
@@ -18325,768 +15931,140 @@
       </p:sp>
       <p:sp>
         <p:nvSpPr>
-          <p:cNvPr id="16" name="TextBox 15"/>
-          <p:cNvSpPr txBox="1"/>
-          <p:nvPr/>
-        </p:nvSpPr>
-        <p:spPr>
-          <a:xfrm>
-            <a:off x="4389120" y="2743200"/>
-            <a:ext cx="1325880" cy="274320"/>
-          </a:xfrm>
-          <a:prstGeom prst="rect">
-            <a:avLst/>
-          </a:prstGeom>
-          <a:noFill/>
-        </p:spPr>
-        <p:txBody>
-          <a:bodyPr wrap="square" lIns="0" rIns="0" tIns="0" bIns="0" anchor="t">
-            <a:spAutoFit/>
-          </a:bodyPr>
-          <a:lstStyle/>
-          <a:p>
-            <a:pPr algn="ctr">
-              <a:lnSpc>
-                <a:spcPct val="110000"/>
-              </a:lnSpc>
-            </a:pPr>
-            <a:r>
-              <a:rPr sz="850" b="1" i="0">
-                <a:solidFill>
-                  <a:srgbClr val="FFFFFF"/>
+          <p:cNvPr id="25" name="TextBox 24"/>
+          <p:cNvSpPr txBox="1"/>
+          <p:nvPr/>
+        </p:nvSpPr>
+        <p:spPr>
+          <a:xfrm>
+            <a:off x="4983480" y="3520440"/>
+            <a:ext cx="1371600" cy="365760"/>
+          </a:xfrm>
+          <a:prstGeom prst="rect">
+            <a:avLst/>
+          </a:prstGeom>
+          <a:noFill/>
+        </p:spPr>
+        <p:txBody>
+          <a:bodyPr wrap="square" lIns="0" rIns="0" tIns="0" bIns="0" anchor="t">
+            <a:spAutoFit/>
+          </a:bodyPr>
+          <a:lstStyle/>
+          <a:p>
+            <a:pPr algn="l">
+              <a:lnSpc>
+                <a:spcPct val="110000"/>
+              </a:lnSpc>
+            </a:pPr>
+            <a:r>
+              <a:rPr sz="1400" b="1" i="0">
+                <a:solidFill>
+                  <a:srgbClr val="141414"/>
                 </a:solidFill>
                 <a:latin typeface="Inter"/>
               </a:rPr>
-              <a:t>RECOMMENDED</a:t>
-            </a:r>
-          </a:p>
-        </p:txBody>
-      </p:sp>
-      <p:sp>
-        <p:nvSpPr>
-          <p:cNvPr id="17" name="TextBox 16"/>
-          <p:cNvSpPr txBox="1"/>
-          <p:nvPr/>
-        </p:nvSpPr>
-        <p:spPr>
-          <a:xfrm>
-            <a:off x="1097280" y="2743200"/>
-            <a:ext cx="1828800" cy="274320"/>
-          </a:xfrm>
-          <a:prstGeom prst="rect">
-            <a:avLst/>
-          </a:prstGeom>
-          <a:noFill/>
-        </p:spPr>
-        <p:txBody>
-          <a:bodyPr wrap="square" lIns="0" rIns="0" tIns="0" bIns="0" anchor="t">
-            <a:spAutoFit/>
-          </a:bodyPr>
-          <a:lstStyle/>
-          <a:p>
-            <a:pPr algn="l">
-              <a:lnSpc>
-                <a:spcPct val="110000"/>
-              </a:lnSpc>
-            </a:pPr>
-            <a:r>
-              <a:rPr sz="1000" b="1" i="0">
-                <a:solidFill>
-                  <a:srgbClr val="6A26D8"/>
+              <a:t>High</a:t>
+            </a:r>
+          </a:p>
+        </p:txBody>
+      </p:sp>
+      <p:sp>
+        <p:nvSpPr>
+          <p:cNvPr id="26" name="TextBox 25"/>
+          <p:cNvSpPr txBox="1"/>
+          <p:nvPr/>
+        </p:nvSpPr>
+        <p:spPr>
+          <a:xfrm>
+            <a:off x="6446520" y="3520440"/>
+            <a:ext cx="3017520" cy="365760"/>
+          </a:xfrm>
+          <a:prstGeom prst="rect">
+            <a:avLst/>
+          </a:prstGeom>
+          <a:noFill/>
+        </p:spPr>
+        <p:txBody>
+          <a:bodyPr wrap="square" lIns="0" rIns="0" tIns="0" bIns="0" anchor="t">
+            <a:spAutoFit/>
+          </a:bodyPr>
+          <a:lstStyle/>
+          <a:p>
+            <a:pPr algn="l">
+              <a:lnSpc>
+                <a:spcPct val="110000"/>
+              </a:lnSpc>
+            </a:pPr>
+            <a:r>
+              <a:rPr sz="1300" b="0" i="0">
+                <a:solidFill>
+                  <a:srgbClr val="2A2A2D"/>
                 </a:solidFill>
                 <a:latin typeface="Inter"/>
               </a:rPr>
-              <a:t>OPTION A</a:t>
-            </a:r>
-          </a:p>
-        </p:txBody>
-      </p:sp>
-      <p:sp>
-        <p:nvSpPr>
-          <p:cNvPr id="18" name="TextBox 17"/>
-          <p:cNvSpPr txBox="1"/>
-          <p:nvPr/>
-        </p:nvSpPr>
-        <p:spPr>
-          <a:xfrm>
-            <a:off x="1097280" y="2999232"/>
-            <a:ext cx="3657600" cy="457200"/>
-          </a:xfrm>
-          <a:prstGeom prst="rect">
-            <a:avLst/>
-          </a:prstGeom>
-          <a:noFill/>
-        </p:spPr>
-        <p:txBody>
-          <a:bodyPr wrap="square" lIns="0" rIns="0" tIns="0" bIns="0" anchor="t">
-            <a:spAutoFit/>
-          </a:bodyPr>
-          <a:lstStyle/>
-          <a:p>
-            <a:pPr algn="l">
-              <a:lnSpc>
-                <a:spcPct val="110000"/>
-              </a:lnSpc>
-            </a:pPr>
-            <a:r>
-              <a:rPr sz="2200" b="0" i="0">
+              <a:t>Key page or form broken</a:t>
+            </a:r>
+          </a:p>
+        </p:txBody>
+      </p:sp>
+      <p:sp>
+        <p:nvSpPr>
+          <p:cNvPr id="27" name="TextBox 26"/>
+          <p:cNvSpPr txBox="1"/>
+          <p:nvPr/>
+        </p:nvSpPr>
+        <p:spPr>
+          <a:xfrm>
+            <a:off x="9464040" y="3520440"/>
+            <a:ext cx="1993392" cy="365760"/>
+          </a:xfrm>
+          <a:prstGeom prst="rect">
+            <a:avLst/>
+          </a:prstGeom>
+          <a:noFill/>
+        </p:spPr>
+        <p:txBody>
+          <a:bodyPr wrap="square" lIns="0" rIns="0" tIns="0" bIns="0" anchor="t">
+            <a:spAutoFit/>
+          </a:bodyPr>
+          <a:lstStyle/>
+          <a:p>
+            <a:pPr algn="r">
+              <a:lnSpc>
+                <a:spcPct val="110000"/>
+              </a:lnSpc>
+            </a:pPr>
+            <a:r>
+              <a:rPr sz="1300" b="0" i="0">
                 <a:solidFill>
                   <a:srgbClr val="141414"/>
                 </a:solidFill>
-                <a:latin typeface="Playfair Display"/>
-              </a:rPr>
-              <a:t>Complete Care</a:t>
-            </a:r>
-          </a:p>
-        </p:txBody>
-      </p:sp>
-      <p:sp>
-        <p:nvSpPr>
-          <p:cNvPr id="19" name="TextBox 18"/>
-          <p:cNvSpPr txBox="1"/>
-          <p:nvPr/>
-        </p:nvSpPr>
-        <p:spPr>
-          <a:xfrm>
-            <a:off x="1097280" y="3474720"/>
-            <a:ext cx="4114800" cy="548640"/>
-          </a:xfrm>
-          <a:prstGeom prst="rect">
-            <a:avLst/>
-          </a:prstGeom>
-          <a:noFill/>
-        </p:spPr>
-        <p:txBody>
-          <a:bodyPr wrap="square" lIns="0" rIns="0" tIns="0" bIns="0" anchor="t">
-            <a:spAutoFit/>
-          </a:bodyPr>
-          <a:lstStyle/>
-          <a:p>
-            <a:pPr algn="l">
-              <a:lnSpc>
-                <a:spcPct val="110000"/>
-              </a:lnSpc>
-            </a:pPr>
-            <a:r>
-              <a:rPr sz="2800" b="0" i="0">
-                <a:solidFill>
-                  <a:srgbClr val="6A26D8"/>
-                </a:solidFill>
-                <a:latin typeface="Playfair Display"/>
-              </a:rPr>
-              <a:t>PKR 20,000</a:t>
-            </a:r>
-          </a:p>
-        </p:txBody>
-      </p:sp>
-      <p:sp>
-        <p:nvSpPr>
-          <p:cNvPr id="20" name="TextBox 19"/>
-          <p:cNvSpPr txBox="1"/>
-          <p:nvPr/>
-        </p:nvSpPr>
-        <p:spPr>
-          <a:xfrm>
-            <a:off x="1097280" y="3977639"/>
-            <a:ext cx="4572000" cy="274320"/>
-          </a:xfrm>
-          <a:prstGeom prst="rect">
-            <a:avLst/>
-          </a:prstGeom>
-          <a:noFill/>
-        </p:spPr>
-        <p:txBody>
-          <a:bodyPr wrap="square" lIns="0" rIns="0" tIns="0" bIns="0" anchor="t">
-            <a:spAutoFit/>
-          </a:bodyPr>
-          <a:lstStyle/>
-          <a:p>
-            <a:pPr algn="l">
-              <a:lnSpc>
-                <a:spcPct val="110000"/>
-              </a:lnSpc>
-            </a:pPr>
-            <a:r>
-              <a:rPr sz="1050" b="0" i="0">
-                <a:solidFill>
-                  <a:srgbClr val="6B6878"/>
-                </a:solidFill>
                 <a:latin typeface="Inter"/>
               </a:rPr>
-              <a:t>Total with development: PKR 35,000</a:t>
-            </a:r>
-          </a:p>
-        </p:txBody>
-      </p:sp>
-      <p:sp>
-        <p:nvSpPr>
-          <p:cNvPr id="21" name="TextBox 20"/>
-          <p:cNvSpPr txBox="1"/>
-          <p:nvPr/>
-        </p:nvSpPr>
-        <p:spPr>
-          <a:xfrm>
-            <a:off x="1097280" y="4343400"/>
-            <a:ext cx="274320" cy="237744"/>
-          </a:xfrm>
-          <a:prstGeom prst="rect">
-            <a:avLst/>
-          </a:prstGeom>
-          <a:noFill/>
-        </p:spPr>
-        <p:txBody>
-          <a:bodyPr wrap="square" lIns="0" rIns="0" tIns="0" bIns="0" anchor="t">
-            <a:spAutoFit/>
-          </a:bodyPr>
-          <a:lstStyle/>
-          <a:p>
-            <a:pPr algn="l">
-              <a:lnSpc>
-                <a:spcPct val="110000"/>
-              </a:lnSpc>
-            </a:pPr>
-            <a:r>
-              <a:rPr sz="1050" b="1" i="0">
-                <a:solidFill>
-                  <a:srgbClr val="6A26D8"/>
-                </a:solidFill>
-                <a:latin typeface="Inter"/>
-              </a:rPr>
-              <a:t>✓</a:t>
-            </a:r>
-          </a:p>
-        </p:txBody>
-      </p:sp>
-      <p:sp>
-        <p:nvSpPr>
-          <p:cNvPr id="22" name="TextBox 21"/>
-          <p:cNvSpPr txBox="1"/>
-          <p:nvPr/>
-        </p:nvSpPr>
-        <p:spPr>
-          <a:xfrm>
-            <a:off x="1371600" y="4343400"/>
-            <a:ext cx="4343400" cy="237744"/>
-          </a:xfrm>
-          <a:prstGeom prst="rect">
-            <a:avLst/>
-          </a:prstGeom>
-          <a:noFill/>
-        </p:spPr>
-        <p:txBody>
-          <a:bodyPr wrap="square" lIns="0" rIns="0" tIns="0" bIns="0" anchor="t">
-            <a:spAutoFit/>
-          </a:bodyPr>
-          <a:lstStyle/>
-          <a:p>
-            <a:pPr algn="l">
-              <a:lnSpc>
-                <a:spcPct val="110000"/>
-              </a:lnSpc>
-            </a:pPr>
-            <a:r>
-              <a:rPr sz="1050" b="0" i="0">
-                <a:solidFill>
-                  <a:srgbClr val="2A2A2D"/>
-                </a:solidFill>
-                <a:latin typeface="Inter"/>
-              </a:rPr>
-              <a:t>Domain &amp; DNS setup</a:t>
-            </a:r>
-          </a:p>
-        </p:txBody>
-      </p:sp>
-      <p:sp>
-        <p:nvSpPr>
-          <p:cNvPr id="23" name="TextBox 22"/>
-          <p:cNvSpPr txBox="1"/>
-          <p:nvPr/>
-        </p:nvSpPr>
-        <p:spPr>
-          <a:xfrm>
-            <a:off x="1097280" y="4581144"/>
-            <a:ext cx="274320" cy="237744"/>
-          </a:xfrm>
-          <a:prstGeom prst="rect">
-            <a:avLst/>
-          </a:prstGeom>
-          <a:noFill/>
-        </p:spPr>
-        <p:txBody>
-          <a:bodyPr wrap="square" lIns="0" rIns="0" tIns="0" bIns="0" anchor="t">
-            <a:spAutoFit/>
-          </a:bodyPr>
-          <a:lstStyle/>
-          <a:p>
-            <a:pPr algn="l">
-              <a:lnSpc>
-                <a:spcPct val="110000"/>
-              </a:lnSpc>
-            </a:pPr>
-            <a:r>
-              <a:rPr sz="1050" b="1" i="0">
-                <a:solidFill>
-                  <a:srgbClr val="6A26D8"/>
-                </a:solidFill>
-                <a:latin typeface="Inter"/>
-              </a:rPr>
-              <a:t>✓</a:t>
-            </a:r>
-          </a:p>
-        </p:txBody>
-      </p:sp>
-      <p:sp>
-        <p:nvSpPr>
-          <p:cNvPr id="24" name="TextBox 23"/>
-          <p:cNvSpPr txBox="1"/>
-          <p:nvPr/>
-        </p:nvSpPr>
-        <p:spPr>
-          <a:xfrm>
-            <a:off x="1371600" y="4581144"/>
-            <a:ext cx="4343400" cy="237744"/>
-          </a:xfrm>
-          <a:prstGeom prst="rect">
-            <a:avLst/>
-          </a:prstGeom>
-          <a:noFill/>
-        </p:spPr>
-        <p:txBody>
-          <a:bodyPr wrap="square" lIns="0" rIns="0" tIns="0" bIns="0" anchor="t">
-            <a:spAutoFit/>
-          </a:bodyPr>
-          <a:lstStyle/>
-          <a:p>
-            <a:pPr algn="l">
-              <a:lnSpc>
-                <a:spcPct val="110000"/>
-              </a:lnSpc>
-            </a:pPr>
-            <a:r>
-              <a:rPr sz="1050" b="0" i="0">
-                <a:solidFill>
-                  <a:srgbClr val="2A2A2D"/>
-                </a:solidFill>
-                <a:latin typeface="Inter"/>
-              </a:rPr>
-              <a:t>Hosting setup and website go-live</a:t>
-            </a:r>
-          </a:p>
-        </p:txBody>
-      </p:sp>
-      <p:sp>
-        <p:nvSpPr>
-          <p:cNvPr id="25" name="TextBox 24"/>
-          <p:cNvSpPr txBox="1"/>
-          <p:nvPr/>
-        </p:nvSpPr>
-        <p:spPr>
-          <a:xfrm>
-            <a:off x="1097280" y="4818888"/>
-            <a:ext cx="274320" cy="237744"/>
-          </a:xfrm>
-          <a:prstGeom prst="rect">
-            <a:avLst/>
-          </a:prstGeom>
-          <a:noFill/>
-        </p:spPr>
-        <p:txBody>
-          <a:bodyPr wrap="square" lIns="0" rIns="0" tIns="0" bIns="0" anchor="t">
-            <a:spAutoFit/>
-          </a:bodyPr>
-          <a:lstStyle/>
-          <a:p>
-            <a:pPr algn="l">
-              <a:lnSpc>
-                <a:spcPct val="110000"/>
-              </a:lnSpc>
-            </a:pPr>
-            <a:r>
-              <a:rPr sz="1050" b="1" i="0">
-                <a:solidFill>
-                  <a:srgbClr val="6A26D8"/>
-                </a:solidFill>
-                <a:latin typeface="Inter"/>
-              </a:rPr>
-              <a:t>✓</a:t>
-            </a:r>
-          </a:p>
-        </p:txBody>
-      </p:sp>
-      <p:sp>
-        <p:nvSpPr>
-          <p:cNvPr id="26" name="TextBox 25"/>
-          <p:cNvSpPr txBox="1"/>
-          <p:nvPr/>
-        </p:nvSpPr>
-        <p:spPr>
-          <a:xfrm>
-            <a:off x="1371600" y="4818888"/>
-            <a:ext cx="4343400" cy="237744"/>
-          </a:xfrm>
-          <a:prstGeom prst="rect">
-            <a:avLst/>
-          </a:prstGeom>
-          <a:noFill/>
-        </p:spPr>
-        <p:txBody>
-          <a:bodyPr wrap="square" lIns="0" rIns="0" tIns="0" bIns="0" anchor="t">
-            <a:spAutoFit/>
-          </a:bodyPr>
-          <a:lstStyle/>
-          <a:p>
-            <a:pPr algn="l">
-              <a:lnSpc>
-                <a:spcPct val="110000"/>
-              </a:lnSpc>
-            </a:pPr>
-            <a:r>
-              <a:rPr sz="1050" b="0" i="0">
-                <a:solidFill>
-                  <a:srgbClr val="2A2A2D"/>
-                </a:solidFill>
-                <a:latin typeface="Inter"/>
-              </a:rPr>
-              <a:t>SSL (HTTPS) and security setup</a:t>
-            </a:r>
-          </a:p>
-        </p:txBody>
-      </p:sp>
-      <p:sp>
-        <p:nvSpPr>
-          <p:cNvPr id="27" name="TextBox 26"/>
-          <p:cNvSpPr txBox="1"/>
-          <p:nvPr/>
-        </p:nvSpPr>
-        <p:spPr>
-          <a:xfrm>
-            <a:off x="1097280" y="5056632"/>
-            <a:ext cx="274320" cy="237744"/>
-          </a:xfrm>
-          <a:prstGeom prst="rect">
-            <a:avLst/>
-          </a:prstGeom>
-          <a:noFill/>
-        </p:spPr>
-        <p:txBody>
-          <a:bodyPr wrap="square" lIns="0" rIns="0" tIns="0" bIns="0" anchor="t">
-            <a:spAutoFit/>
-          </a:bodyPr>
-          <a:lstStyle/>
-          <a:p>
-            <a:pPr algn="l">
-              <a:lnSpc>
-                <a:spcPct val="110000"/>
-              </a:lnSpc>
-            </a:pPr>
-            <a:r>
-              <a:rPr sz="1050" b="1" i="0">
-                <a:solidFill>
-                  <a:srgbClr val="6A26D8"/>
-                </a:solidFill>
-                <a:latin typeface="Inter"/>
-              </a:rPr>
-              <a:t>✓</a:t>
-            </a:r>
-          </a:p>
-        </p:txBody>
-      </p:sp>
-      <p:sp>
-        <p:nvSpPr>
-          <p:cNvPr id="28" name="TextBox 27"/>
-          <p:cNvSpPr txBox="1"/>
-          <p:nvPr/>
-        </p:nvSpPr>
-        <p:spPr>
-          <a:xfrm>
-            <a:off x="1371600" y="5056632"/>
-            <a:ext cx="4343400" cy="237744"/>
-          </a:xfrm>
-          <a:prstGeom prst="rect">
-            <a:avLst/>
-          </a:prstGeom>
-          <a:noFill/>
-        </p:spPr>
-        <p:txBody>
-          <a:bodyPr wrap="square" lIns="0" rIns="0" tIns="0" bIns="0" anchor="t">
-            <a:spAutoFit/>
-          </a:bodyPr>
-          <a:lstStyle/>
-          <a:p>
-            <a:pPr algn="l">
-              <a:lnSpc>
-                <a:spcPct val="110000"/>
-              </a:lnSpc>
-            </a:pPr>
-            <a:r>
-              <a:rPr sz="1050" b="0" i="0">
-                <a:solidFill>
-                  <a:srgbClr val="2A2A2D"/>
-                </a:solidFill>
-                <a:latin typeface="Inter"/>
-              </a:rPr>
-              <a:t>Professional email (e.g. info@gfxt.com)</a:t>
-            </a:r>
-          </a:p>
-        </p:txBody>
-      </p:sp>
-      <p:sp>
-        <p:nvSpPr>
-          <p:cNvPr id="29" name="TextBox 28"/>
-          <p:cNvSpPr txBox="1"/>
-          <p:nvPr/>
-        </p:nvSpPr>
-        <p:spPr>
-          <a:xfrm>
-            <a:off x="1097280" y="5294376"/>
-            <a:ext cx="274320" cy="237744"/>
-          </a:xfrm>
-          <a:prstGeom prst="rect">
-            <a:avLst/>
-          </a:prstGeom>
-          <a:noFill/>
-        </p:spPr>
-        <p:txBody>
-          <a:bodyPr wrap="square" lIns="0" rIns="0" tIns="0" bIns="0" anchor="t">
-            <a:spAutoFit/>
-          </a:bodyPr>
-          <a:lstStyle/>
-          <a:p>
-            <a:pPr algn="l">
-              <a:lnSpc>
-                <a:spcPct val="110000"/>
-              </a:lnSpc>
-            </a:pPr>
-            <a:r>
-              <a:rPr sz="1050" b="1" i="0">
-                <a:solidFill>
-                  <a:srgbClr val="6A26D8"/>
-                </a:solidFill>
-                <a:latin typeface="Inter"/>
-              </a:rPr>
-              <a:t>✓</a:t>
-            </a:r>
-          </a:p>
-        </p:txBody>
-      </p:sp>
-      <p:sp>
-        <p:nvSpPr>
-          <p:cNvPr id="30" name="TextBox 29"/>
-          <p:cNvSpPr txBox="1"/>
-          <p:nvPr/>
-        </p:nvSpPr>
-        <p:spPr>
-          <a:xfrm>
-            <a:off x="1371600" y="5294376"/>
-            <a:ext cx="4343400" cy="237744"/>
-          </a:xfrm>
-          <a:prstGeom prst="rect">
-            <a:avLst/>
-          </a:prstGeom>
-          <a:noFill/>
-        </p:spPr>
-        <p:txBody>
-          <a:bodyPr wrap="square" lIns="0" rIns="0" tIns="0" bIns="0" anchor="t">
-            <a:spAutoFit/>
-          </a:bodyPr>
-          <a:lstStyle/>
-          <a:p>
-            <a:pPr algn="l">
-              <a:lnSpc>
-                <a:spcPct val="110000"/>
-              </a:lnSpc>
-            </a:pPr>
-            <a:r>
-              <a:rPr sz="1050" b="0" i="0">
-                <a:solidFill>
-                  <a:srgbClr val="2A2A2D"/>
-                </a:solidFill>
-                <a:latin typeface="Inter"/>
-              </a:rPr>
-              <a:t>Email set up on your phone and laptop</a:t>
-            </a:r>
-          </a:p>
-        </p:txBody>
-      </p:sp>
-      <p:sp>
-        <p:nvSpPr>
-          <p:cNvPr id="31" name="TextBox 30"/>
-          <p:cNvSpPr txBox="1"/>
-          <p:nvPr/>
-        </p:nvSpPr>
-        <p:spPr>
-          <a:xfrm>
-            <a:off x="1097280" y="5532120"/>
-            <a:ext cx="274320" cy="237744"/>
-          </a:xfrm>
-          <a:prstGeom prst="rect">
-            <a:avLst/>
-          </a:prstGeom>
-          <a:noFill/>
-        </p:spPr>
-        <p:txBody>
-          <a:bodyPr wrap="square" lIns="0" rIns="0" tIns="0" bIns="0" anchor="t">
-            <a:spAutoFit/>
-          </a:bodyPr>
-          <a:lstStyle/>
-          <a:p>
-            <a:pPr algn="l">
-              <a:lnSpc>
-                <a:spcPct val="110000"/>
-              </a:lnSpc>
-            </a:pPr>
-            <a:r>
-              <a:rPr sz="1050" b="1" i="0">
-                <a:solidFill>
-                  <a:srgbClr val="6A26D8"/>
-                </a:solidFill>
-                <a:latin typeface="Inter"/>
-              </a:rPr>
-              <a:t>✓</a:t>
-            </a:r>
-          </a:p>
-        </p:txBody>
-      </p:sp>
-      <p:sp>
-        <p:nvSpPr>
-          <p:cNvPr id="32" name="TextBox 31"/>
-          <p:cNvSpPr txBox="1"/>
-          <p:nvPr/>
-        </p:nvSpPr>
-        <p:spPr>
-          <a:xfrm>
-            <a:off x="1371600" y="5532120"/>
-            <a:ext cx="4343400" cy="237744"/>
-          </a:xfrm>
-          <a:prstGeom prst="rect">
-            <a:avLst/>
-          </a:prstGeom>
-          <a:noFill/>
-        </p:spPr>
-        <p:txBody>
-          <a:bodyPr wrap="square" lIns="0" rIns="0" tIns="0" bIns="0" anchor="t">
-            <a:spAutoFit/>
-          </a:bodyPr>
-          <a:lstStyle/>
-          <a:p>
-            <a:pPr algn="l">
-              <a:lnSpc>
-                <a:spcPct val="110000"/>
-              </a:lnSpc>
-            </a:pPr>
-            <a:r>
-              <a:rPr sz="1050" b="0" i="0">
-                <a:solidFill>
-                  <a:srgbClr val="2A2A2D"/>
-                </a:solidFill>
-                <a:latin typeface="Inter"/>
-              </a:rPr>
-              <a:t>Support &amp; maintenance until 30 September 2027</a:t>
-            </a:r>
-          </a:p>
-        </p:txBody>
-      </p:sp>
-      <p:sp>
-        <p:nvSpPr>
-          <p:cNvPr id="33" name="TextBox 32"/>
-          <p:cNvSpPr txBox="1"/>
-          <p:nvPr/>
-        </p:nvSpPr>
-        <p:spPr>
-          <a:xfrm>
-            <a:off x="1097280" y="5769864"/>
-            <a:ext cx="274320" cy="237744"/>
-          </a:xfrm>
-          <a:prstGeom prst="rect">
-            <a:avLst/>
-          </a:prstGeom>
-          <a:noFill/>
-        </p:spPr>
-        <p:txBody>
-          <a:bodyPr wrap="square" lIns="0" rIns="0" tIns="0" bIns="0" anchor="t">
-            <a:spAutoFit/>
-          </a:bodyPr>
-          <a:lstStyle/>
-          <a:p>
-            <a:pPr algn="l">
-              <a:lnSpc>
-                <a:spcPct val="110000"/>
-              </a:lnSpc>
-            </a:pPr>
-            <a:r>
-              <a:rPr sz="1050" b="1" i="0">
-                <a:solidFill>
-                  <a:srgbClr val="6A26D8"/>
-                </a:solidFill>
-                <a:latin typeface="Inter"/>
-              </a:rPr>
-              <a:t>✓</a:t>
-            </a:r>
-          </a:p>
-        </p:txBody>
-      </p:sp>
-      <p:sp>
-        <p:nvSpPr>
-          <p:cNvPr id="34" name="TextBox 33"/>
-          <p:cNvSpPr txBox="1"/>
-          <p:nvPr/>
-        </p:nvSpPr>
-        <p:spPr>
-          <a:xfrm>
-            <a:off x="1371600" y="5769864"/>
-            <a:ext cx="4343400" cy="237744"/>
-          </a:xfrm>
-          <a:prstGeom prst="rect">
-            <a:avLst/>
-          </a:prstGeom>
-          <a:noFill/>
-        </p:spPr>
-        <p:txBody>
-          <a:bodyPr wrap="square" lIns="0" rIns="0" tIns="0" bIns="0" anchor="t">
-            <a:spAutoFit/>
-          </a:bodyPr>
-          <a:lstStyle/>
-          <a:p>
-            <a:pPr algn="l">
-              <a:lnSpc>
-                <a:spcPct val="110000"/>
-              </a:lnSpc>
-            </a:pPr>
-            <a:r>
-              <a:rPr sz="1050" b="0" i="0">
-                <a:solidFill>
-                  <a:srgbClr val="2A2A2D"/>
-                </a:solidFill>
-                <a:latin typeface="Inter"/>
-              </a:rPr>
-              <a:t>Free minor UI/content changes for 30 days after launch</a:t>
-            </a:r>
-          </a:p>
-        </p:txBody>
-      </p:sp>
-      <p:sp>
-        <p:nvSpPr>
-          <p:cNvPr id="35" name="Rounded Rectangle 34"/>
+              <a:t>Within 1 working day</a:t>
+            </a:r>
+          </a:p>
+        </p:txBody>
+      </p:sp>
+      <p:sp>
+        <p:nvSpPr>
+          <p:cNvPr id="28" name="Rectangle 27"/>
           <p:cNvSpPr/>
           <p:nvPr/>
         </p:nvSpPr>
         <p:spPr>
           <a:xfrm>
-            <a:off x="6172200" y="2468880"/>
-            <a:ext cx="5257800" cy="3611880"/>
-          </a:xfrm>
-          <a:prstGeom prst="roundRect">
-            <a:avLst>
-              <a:gd name="adj" fmla="val 5000"/>
-            </a:avLst>
+            <a:off x="4983480" y="3931920"/>
+            <a:ext cx="6473952" cy="7620"/>
+          </a:xfrm>
+          <a:prstGeom prst="rect">
+            <a:avLst/>
           </a:prstGeom>
           <a:solidFill>
-            <a:srgbClr val="F8F6FD"/>
+            <a:srgbClr val="E6E1F0"/>
           </a:solidFill>
-          <a:ln w="9525">
-            <a:solidFill>
-              <a:srgbClr val="E6E1F0"/>
-            </a:solidFill>
+          <a:ln>
+            <a:noFill/>
           </a:ln>
           <a:effectLst/>
         </p:spPr>
@@ -19114,546 +16092,240 @@
       </p:sp>
       <p:sp>
         <p:nvSpPr>
-          <p:cNvPr id="36" name="TextBox 35"/>
-          <p:cNvSpPr txBox="1"/>
-          <p:nvPr/>
-        </p:nvSpPr>
-        <p:spPr>
-          <a:xfrm>
-            <a:off x="6537960" y="2743200"/>
-            <a:ext cx="1828800" cy="274320"/>
-          </a:xfrm>
-          <a:prstGeom prst="rect">
-            <a:avLst/>
-          </a:prstGeom>
-          <a:noFill/>
-        </p:spPr>
-        <p:txBody>
-          <a:bodyPr wrap="square" lIns="0" rIns="0" tIns="0" bIns="0" anchor="t">
-            <a:spAutoFit/>
-          </a:bodyPr>
-          <a:lstStyle/>
-          <a:p>
-            <a:pPr algn="l">
-              <a:lnSpc>
-                <a:spcPct val="110000"/>
-              </a:lnSpc>
-            </a:pPr>
-            <a:r>
-              <a:rPr sz="1000" b="1" i="0">
-                <a:solidFill>
-                  <a:srgbClr val="6A26D8"/>
+          <p:cNvPr id="29" name="TextBox 28"/>
+          <p:cNvSpPr txBox="1"/>
+          <p:nvPr/>
+        </p:nvSpPr>
+        <p:spPr>
+          <a:xfrm>
+            <a:off x="4983480" y="4069080"/>
+            <a:ext cx="1371600" cy="365760"/>
+          </a:xfrm>
+          <a:prstGeom prst="rect">
+            <a:avLst/>
+          </a:prstGeom>
+          <a:noFill/>
+        </p:spPr>
+        <p:txBody>
+          <a:bodyPr wrap="square" lIns="0" rIns="0" tIns="0" bIns="0" anchor="t">
+            <a:spAutoFit/>
+          </a:bodyPr>
+          <a:lstStyle/>
+          <a:p>
+            <a:pPr algn="l">
+              <a:lnSpc>
+                <a:spcPct val="110000"/>
+              </a:lnSpc>
+            </a:pPr>
+            <a:r>
+              <a:rPr sz="1400" b="1" i="0">
+                <a:solidFill>
+                  <a:srgbClr val="141414"/>
                 </a:solidFill>
                 <a:latin typeface="Inter"/>
               </a:rPr>
-              <a:t>OPTION B</a:t>
-            </a:r>
-          </a:p>
-        </p:txBody>
-      </p:sp>
-      <p:sp>
-        <p:nvSpPr>
-          <p:cNvPr id="37" name="TextBox 36"/>
-          <p:cNvSpPr txBox="1"/>
-          <p:nvPr/>
-        </p:nvSpPr>
-        <p:spPr>
-          <a:xfrm>
-            <a:off x="6537960" y="2999232"/>
-            <a:ext cx="3657600" cy="457200"/>
-          </a:xfrm>
-          <a:prstGeom prst="rect">
-            <a:avLst/>
-          </a:prstGeom>
-          <a:noFill/>
-        </p:spPr>
-        <p:txBody>
-          <a:bodyPr wrap="square" lIns="0" rIns="0" tIns="0" bIns="0" anchor="t">
-            <a:spAutoFit/>
-          </a:bodyPr>
-          <a:lstStyle/>
-          <a:p>
-            <a:pPr algn="l">
-              <a:lnSpc>
-                <a:spcPct val="110000"/>
-              </a:lnSpc>
-            </a:pPr>
-            <a:r>
-              <a:rPr sz="2200" b="0" i="0">
+              <a:t>Normal</a:t>
+            </a:r>
+          </a:p>
+        </p:txBody>
+      </p:sp>
+      <p:sp>
+        <p:nvSpPr>
+          <p:cNvPr id="30" name="TextBox 29"/>
+          <p:cNvSpPr txBox="1"/>
+          <p:nvPr/>
+        </p:nvSpPr>
+        <p:spPr>
+          <a:xfrm>
+            <a:off x="6446520" y="4069080"/>
+            <a:ext cx="3017520" cy="365760"/>
+          </a:xfrm>
+          <a:prstGeom prst="rect">
+            <a:avLst/>
+          </a:prstGeom>
+          <a:noFill/>
+        </p:spPr>
+        <p:txBody>
+          <a:bodyPr wrap="square" lIns="0" rIns="0" tIns="0" bIns="0" anchor="t">
+            <a:spAutoFit/>
+          </a:bodyPr>
+          <a:lstStyle/>
+          <a:p>
+            <a:pPr algn="l">
+              <a:lnSpc>
+                <a:spcPct val="110000"/>
+              </a:lnSpc>
+            </a:pPr>
+            <a:r>
+              <a:rPr sz="1300" b="0" i="0">
+                <a:solidFill>
+                  <a:srgbClr val="2A2A2D"/>
+                </a:solidFill>
+                <a:latin typeface="Inter"/>
+              </a:rPr>
+              <a:t>Question or request</a:t>
+            </a:r>
+          </a:p>
+        </p:txBody>
+      </p:sp>
+      <p:sp>
+        <p:nvSpPr>
+          <p:cNvPr id="31" name="TextBox 30"/>
+          <p:cNvSpPr txBox="1"/>
+          <p:nvPr/>
+        </p:nvSpPr>
+        <p:spPr>
+          <a:xfrm>
+            <a:off x="9464040" y="4069080"/>
+            <a:ext cx="1993392" cy="365760"/>
+          </a:xfrm>
+          <a:prstGeom prst="rect">
+            <a:avLst/>
+          </a:prstGeom>
+          <a:noFill/>
+        </p:spPr>
+        <p:txBody>
+          <a:bodyPr wrap="square" lIns="0" rIns="0" tIns="0" bIns="0" anchor="t">
+            <a:spAutoFit/>
+          </a:bodyPr>
+          <a:lstStyle/>
+          <a:p>
+            <a:pPr algn="r">
+              <a:lnSpc>
+                <a:spcPct val="110000"/>
+              </a:lnSpc>
+            </a:pPr>
+            <a:r>
+              <a:rPr sz="1300" b="0" i="0">
                 <a:solidFill>
                   <a:srgbClr val="141414"/>
                 </a:solidFill>
-                <a:latin typeface="Playfair Display"/>
-              </a:rPr>
-              <a:t>Launch Essentials</a:t>
-            </a:r>
-          </a:p>
-        </p:txBody>
-      </p:sp>
-      <p:sp>
-        <p:nvSpPr>
-          <p:cNvPr id="38" name="TextBox 37"/>
-          <p:cNvSpPr txBox="1"/>
-          <p:nvPr/>
-        </p:nvSpPr>
-        <p:spPr>
-          <a:xfrm>
-            <a:off x="6537960" y="3474720"/>
-            <a:ext cx="4114800" cy="548640"/>
-          </a:xfrm>
-          <a:prstGeom prst="rect">
-            <a:avLst/>
-          </a:prstGeom>
-          <a:noFill/>
-        </p:spPr>
-        <p:txBody>
-          <a:bodyPr wrap="square" lIns="0" rIns="0" tIns="0" bIns="0" anchor="t">
-            <a:spAutoFit/>
-          </a:bodyPr>
-          <a:lstStyle/>
-          <a:p>
-            <a:pPr algn="l">
-              <a:lnSpc>
-                <a:spcPct val="110000"/>
-              </a:lnSpc>
-            </a:pPr>
-            <a:r>
-              <a:rPr sz="2800" b="0" i="0">
-                <a:solidFill>
-                  <a:srgbClr val="6A26D8"/>
-                </a:solidFill>
-                <a:latin typeface="Playfair Display"/>
-              </a:rPr>
-              <a:t>PKR 12,000</a:t>
-            </a:r>
-          </a:p>
-        </p:txBody>
-      </p:sp>
-      <p:sp>
-        <p:nvSpPr>
-          <p:cNvPr id="39" name="TextBox 38"/>
-          <p:cNvSpPr txBox="1"/>
-          <p:nvPr/>
-        </p:nvSpPr>
-        <p:spPr>
-          <a:xfrm>
-            <a:off x="6537960" y="3977639"/>
-            <a:ext cx="4572000" cy="274320"/>
-          </a:xfrm>
-          <a:prstGeom prst="rect">
-            <a:avLst/>
-          </a:prstGeom>
-          <a:noFill/>
-        </p:spPr>
-        <p:txBody>
-          <a:bodyPr wrap="square" lIns="0" rIns="0" tIns="0" bIns="0" anchor="t">
-            <a:spAutoFit/>
-          </a:bodyPr>
-          <a:lstStyle/>
-          <a:p>
-            <a:pPr algn="l">
-              <a:lnSpc>
-                <a:spcPct val="110000"/>
-              </a:lnSpc>
-            </a:pPr>
-            <a:r>
-              <a:rPr sz="1050" b="0" i="0">
+                <a:latin typeface="Inter"/>
+              </a:rPr>
+              <a:t>Within 1 working day</a:t>
+            </a:r>
+          </a:p>
+        </p:txBody>
+      </p:sp>
+      <p:sp>
+        <p:nvSpPr>
+          <p:cNvPr id="32" name="Rectangle 31"/>
+          <p:cNvSpPr/>
+          <p:nvPr/>
+        </p:nvSpPr>
+        <p:spPr>
+          <a:xfrm>
+            <a:off x="4983480" y="4480560"/>
+            <a:ext cx="6473952" cy="7620"/>
+          </a:xfrm>
+          <a:prstGeom prst="rect">
+            <a:avLst/>
+          </a:prstGeom>
+          <a:solidFill>
+            <a:srgbClr val="E6E1F0"/>
+          </a:solidFill>
+          <a:ln>
+            <a:noFill/>
+          </a:ln>
+          <a:effectLst/>
+        </p:spPr>
+        <p:style>
+          <a:lnRef idx="1">
+            <a:schemeClr val="accent1"/>
+          </a:lnRef>
+          <a:fillRef idx="3">
+            <a:schemeClr val="accent1"/>
+          </a:fillRef>
+          <a:effectRef idx="2">
+            <a:schemeClr val="accent1"/>
+          </a:effectRef>
+          <a:fontRef idx="minor">
+            <a:schemeClr val="lt1"/>
+          </a:fontRef>
+        </p:style>
+        <p:txBody>
+          <a:bodyPr rtlCol="0" anchor="ctr"/>
+          <a:lstStyle/>
+          <a:p>
+            <a:pPr algn="ctr"/>
+          </a:p>
+        </p:txBody>
+      </p:sp>
+      <p:sp>
+        <p:nvSpPr>
+          <p:cNvPr id="33" name="TextBox 32"/>
+          <p:cNvSpPr txBox="1"/>
+          <p:nvPr/>
+        </p:nvSpPr>
+        <p:spPr>
+          <a:xfrm>
+            <a:off x="4983480" y="4754880"/>
+            <a:ext cx="6473952" cy="1188720"/>
+          </a:xfrm>
+          <a:prstGeom prst="rect">
+            <a:avLst/>
+          </a:prstGeom>
+          <a:noFill/>
+        </p:spPr>
+        <p:txBody>
+          <a:bodyPr wrap="square" lIns="0" rIns="0" tIns="0" bIns="0" anchor="t">
+            <a:spAutoFit/>
+          </a:bodyPr>
+          <a:lstStyle/>
+          <a:p>
+            <a:pPr algn="l">
+              <a:lnSpc>
+                <a:spcPct val="130000"/>
+              </a:lnSpc>
+              <a:spcAft>
+                <a:spcPts val="600"/>
+              </a:spcAft>
+            </a:pPr>
+            <a:r>
+              <a:rPr sz="1200" b="1" i="0">
+                <a:solidFill>
+                  <a:srgbClr val="141414"/>
+                </a:solidFill>
+                <a:latin typeface="Inter"/>
+              </a:rPr>
+              <a:t>Contact:  </a:t>
+            </a:r>
+            <a:r>
+              <a:rPr sz="1200" b="0" i="0">
                 <a:solidFill>
                   <a:srgbClr val="6B6878"/>
                 </a:solidFill>
                 <a:latin typeface="Inter"/>
               </a:rPr>
-              <a:t>Total with development: PKR 27,000</a:t>
-            </a:r>
-          </a:p>
-        </p:txBody>
-      </p:sp>
-      <p:sp>
-        <p:nvSpPr>
-          <p:cNvPr id="40" name="TextBox 39"/>
-          <p:cNvSpPr txBox="1"/>
-          <p:nvPr/>
-        </p:nvSpPr>
-        <p:spPr>
-          <a:xfrm>
-            <a:off x="6537960" y="4343400"/>
-            <a:ext cx="274320" cy="237744"/>
-          </a:xfrm>
-          <a:prstGeom prst="rect">
-            <a:avLst/>
-          </a:prstGeom>
-          <a:noFill/>
-        </p:spPr>
-        <p:txBody>
-          <a:bodyPr wrap="square" lIns="0" rIns="0" tIns="0" bIns="0" anchor="t">
-            <a:spAutoFit/>
-          </a:bodyPr>
-          <a:lstStyle/>
-          <a:p>
-            <a:pPr algn="l">
-              <a:lnSpc>
-                <a:spcPct val="110000"/>
-              </a:lnSpc>
-            </a:pPr>
-            <a:r>
-              <a:rPr sz="1050" b="1" i="0">
-                <a:solidFill>
-                  <a:srgbClr val="6A26D8"/>
+              <a:t>WhatsApp project group  ·  Hira (Account Manager)  ·  Omer Bin Dawood (escalations)</a:t>
+            </a:r>
+          </a:p>
+          <a:p>
+            <a:pPr algn="l">
+              <a:lnSpc>
+                <a:spcPct val="130000"/>
+              </a:lnSpc>
+              <a:spcAft>
+                <a:spcPts val="600"/>
+              </a:spcAft>
+            </a:pPr>
+            <a:r>
+              <a:rPr sz="1200" b="1" i="0">
+                <a:solidFill>
+                  <a:srgbClr val="141414"/>
                 </a:solidFill>
                 <a:latin typeface="Inter"/>
               </a:rPr>
-              <a:t>✓</a:t>
-            </a:r>
-          </a:p>
-        </p:txBody>
-      </p:sp>
-      <p:sp>
-        <p:nvSpPr>
-          <p:cNvPr id="41" name="TextBox 40"/>
-          <p:cNvSpPr txBox="1"/>
-          <p:nvPr/>
-        </p:nvSpPr>
-        <p:spPr>
-          <a:xfrm>
-            <a:off x="6812280" y="4343400"/>
-            <a:ext cx="4343400" cy="237744"/>
-          </a:xfrm>
-          <a:prstGeom prst="rect">
-            <a:avLst/>
-          </a:prstGeom>
-          <a:noFill/>
-        </p:spPr>
-        <p:txBody>
-          <a:bodyPr wrap="square" lIns="0" rIns="0" tIns="0" bIns="0" anchor="t">
-            <a:spAutoFit/>
-          </a:bodyPr>
-          <a:lstStyle/>
-          <a:p>
-            <a:pPr algn="l">
-              <a:lnSpc>
-                <a:spcPct val="110000"/>
-              </a:lnSpc>
-            </a:pPr>
-            <a:r>
-              <a:rPr sz="1050" b="0" i="0">
-                <a:solidFill>
-                  <a:srgbClr val="2A2A2D"/>
+              <a:t>Hours:  </a:t>
+            </a:r>
+            <a:r>
+              <a:rPr sz="1200" b="0" i="0">
+                <a:solidFill>
+                  <a:srgbClr val="6B6878"/>
                 </a:solidFill>
                 <a:latin typeface="Inter"/>
               </a:rPr>
-              <a:t>Domain &amp; DNS setup</a:t>
-            </a:r>
-          </a:p>
-        </p:txBody>
-      </p:sp>
-      <p:sp>
-        <p:nvSpPr>
-          <p:cNvPr id="42" name="TextBox 41"/>
-          <p:cNvSpPr txBox="1"/>
-          <p:nvPr/>
-        </p:nvSpPr>
-        <p:spPr>
-          <a:xfrm>
-            <a:off x="6537960" y="4581144"/>
-            <a:ext cx="274320" cy="237744"/>
-          </a:xfrm>
-          <a:prstGeom prst="rect">
-            <a:avLst/>
-          </a:prstGeom>
-          <a:noFill/>
-        </p:spPr>
-        <p:txBody>
-          <a:bodyPr wrap="square" lIns="0" rIns="0" tIns="0" bIns="0" anchor="t">
-            <a:spAutoFit/>
-          </a:bodyPr>
-          <a:lstStyle/>
-          <a:p>
-            <a:pPr algn="l">
-              <a:lnSpc>
-                <a:spcPct val="110000"/>
-              </a:lnSpc>
-            </a:pPr>
-            <a:r>
-              <a:rPr sz="1050" b="1" i="0">
-                <a:solidFill>
-                  <a:srgbClr val="6A26D8"/>
-                </a:solidFill>
-                <a:latin typeface="Inter"/>
-              </a:rPr>
-              <a:t>✓</a:t>
-            </a:r>
-          </a:p>
-        </p:txBody>
-      </p:sp>
-      <p:sp>
-        <p:nvSpPr>
-          <p:cNvPr id="43" name="TextBox 42"/>
-          <p:cNvSpPr txBox="1"/>
-          <p:nvPr/>
-        </p:nvSpPr>
-        <p:spPr>
-          <a:xfrm>
-            <a:off x="6812280" y="4581144"/>
-            <a:ext cx="4343400" cy="237744"/>
-          </a:xfrm>
-          <a:prstGeom prst="rect">
-            <a:avLst/>
-          </a:prstGeom>
-          <a:noFill/>
-        </p:spPr>
-        <p:txBody>
-          <a:bodyPr wrap="square" lIns="0" rIns="0" tIns="0" bIns="0" anchor="t">
-            <a:spAutoFit/>
-          </a:bodyPr>
-          <a:lstStyle/>
-          <a:p>
-            <a:pPr algn="l">
-              <a:lnSpc>
-                <a:spcPct val="110000"/>
-              </a:lnSpc>
-            </a:pPr>
-            <a:r>
-              <a:rPr sz="1050" b="0" i="0">
-                <a:solidFill>
-                  <a:srgbClr val="2A2A2D"/>
-                </a:solidFill>
-                <a:latin typeface="Inter"/>
-              </a:rPr>
-              <a:t>Hosting setup and website go-live</a:t>
-            </a:r>
-          </a:p>
-        </p:txBody>
-      </p:sp>
-      <p:sp>
-        <p:nvSpPr>
-          <p:cNvPr id="44" name="TextBox 43"/>
-          <p:cNvSpPr txBox="1"/>
-          <p:nvPr/>
-        </p:nvSpPr>
-        <p:spPr>
-          <a:xfrm>
-            <a:off x="6537960" y="4818888"/>
-            <a:ext cx="274320" cy="237744"/>
-          </a:xfrm>
-          <a:prstGeom prst="rect">
-            <a:avLst/>
-          </a:prstGeom>
-          <a:noFill/>
-        </p:spPr>
-        <p:txBody>
-          <a:bodyPr wrap="square" lIns="0" rIns="0" tIns="0" bIns="0" anchor="t">
-            <a:spAutoFit/>
-          </a:bodyPr>
-          <a:lstStyle/>
-          <a:p>
-            <a:pPr algn="l">
-              <a:lnSpc>
-                <a:spcPct val="110000"/>
-              </a:lnSpc>
-            </a:pPr>
-            <a:r>
-              <a:rPr sz="1050" b="1" i="0">
-                <a:solidFill>
-                  <a:srgbClr val="6A26D8"/>
-                </a:solidFill>
-                <a:latin typeface="Inter"/>
-              </a:rPr>
-              <a:t>✓</a:t>
-            </a:r>
-          </a:p>
-        </p:txBody>
-      </p:sp>
-      <p:sp>
-        <p:nvSpPr>
-          <p:cNvPr id="45" name="TextBox 44"/>
-          <p:cNvSpPr txBox="1"/>
-          <p:nvPr/>
-        </p:nvSpPr>
-        <p:spPr>
-          <a:xfrm>
-            <a:off x="6812280" y="4818888"/>
-            <a:ext cx="4343400" cy="237744"/>
-          </a:xfrm>
-          <a:prstGeom prst="rect">
-            <a:avLst/>
-          </a:prstGeom>
-          <a:noFill/>
-        </p:spPr>
-        <p:txBody>
-          <a:bodyPr wrap="square" lIns="0" rIns="0" tIns="0" bIns="0" anchor="t">
-            <a:spAutoFit/>
-          </a:bodyPr>
-          <a:lstStyle/>
-          <a:p>
-            <a:pPr algn="l">
-              <a:lnSpc>
-                <a:spcPct val="110000"/>
-              </a:lnSpc>
-            </a:pPr>
-            <a:r>
-              <a:rPr sz="1050" b="0" i="0">
-                <a:solidFill>
-                  <a:srgbClr val="2A2A2D"/>
-                </a:solidFill>
-                <a:latin typeface="Inter"/>
-              </a:rPr>
-              <a:t>SSL (HTTPS) and security setup</a:t>
-            </a:r>
-          </a:p>
-        </p:txBody>
-      </p:sp>
-      <p:sp>
-        <p:nvSpPr>
-          <p:cNvPr id="46" name="TextBox 45"/>
-          <p:cNvSpPr txBox="1"/>
-          <p:nvPr/>
-        </p:nvSpPr>
-        <p:spPr>
-          <a:xfrm>
-            <a:off x="6537960" y="5056632"/>
-            <a:ext cx="274320" cy="237744"/>
-          </a:xfrm>
-          <a:prstGeom prst="rect">
-            <a:avLst/>
-          </a:prstGeom>
-          <a:noFill/>
-        </p:spPr>
-        <p:txBody>
-          <a:bodyPr wrap="square" lIns="0" rIns="0" tIns="0" bIns="0" anchor="t">
-            <a:spAutoFit/>
-          </a:bodyPr>
-          <a:lstStyle/>
-          <a:p>
-            <a:pPr algn="l">
-              <a:lnSpc>
-                <a:spcPct val="110000"/>
-              </a:lnSpc>
-            </a:pPr>
-            <a:r>
-              <a:rPr sz="1050" b="1" i="0">
-                <a:solidFill>
-                  <a:srgbClr val="6A26D8"/>
-                </a:solidFill>
-                <a:latin typeface="Inter"/>
-              </a:rPr>
-              <a:t>✓</a:t>
-            </a:r>
-          </a:p>
-        </p:txBody>
-      </p:sp>
-      <p:sp>
-        <p:nvSpPr>
-          <p:cNvPr id="47" name="TextBox 46"/>
-          <p:cNvSpPr txBox="1"/>
-          <p:nvPr/>
-        </p:nvSpPr>
-        <p:spPr>
-          <a:xfrm>
-            <a:off x="6812280" y="5056632"/>
-            <a:ext cx="4343400" cy="237744"/>
-          </a:xfrm>
-          <a:prstGeom prst="rect">
-            <a:avLst/>
-          </a:prstGeom>
-          <a:noFill/>
-        </p:spPr>
-        <p:txBody>
-          <a:bodyPr wrap="square" lIns="0" rIns="0" tIns="0" bIns="0" anchor="t">
-            <a:spAutoFit/>
-          </a:bodyPr>
-          <a:lstStyle/>
-          <a:p>
-            <a:pPr algn="l">
-              <a:lnSpc>
-                <a:spcPct val="110000"/>
-              </a:lnSpc>
-            </a:pPr>
-            <a:r>
-              <a:rPr sz="1050" b="0" i="0">
-                <a:solidFill>
-                  <a:srgbClr val="2A2A2D"/>
-                </a:solidFill>
-                <a:latin typeface="Inter"/>
-              </a:rPr>
-              <a:t>Bug fixes for 14 days after go-live</a:t>
-            </a:r>
-          </a:p>
-        </p:txBody>
-      </p:sp>
-      <p:sp>
-        <p:nvSpPr>
-          <p:cNvPr id="48" name="TextBox 47"/>
-          <p:cNvSpPr txBox="1"/>
-          <p:nvPr/>
-        </p:nvSpPr>
-        <p:spPr>
-          <a:xfrm>
-            <a:off x="6537960" y="5294376"/>
-            <a:ext cx="274320" cy="237744"/>
-          </a:xfrm>
-          <a:prstGeom prst="rect">
-            <a:avLst/>
-          </a:prstGeom>
-          <a:noFill/>
-        </p:spPr>
-        <p:txBody>
-          <a:bodyPr wrap="square" lIns="0" rIns="0" tIns="0" bIns="0" anchor="t">
-            <a:spAutoFit/>
-          </a:bodyPr>
-          <a:lstStyle/>
-          <a:p>
-            <a:pPr algn="l">
-              <a:lnSpc>
-                <a:spcPct val="110000"/>
-              </a:lnSpc>
-            </a:pPr>
-            <a:r>
-              <a:rPr sz="1050" b="1" i="0">
-                <a:solidFill>
-                  <a:srgbClr val="6B6878"/>
-                </a:solidFill>
-                <a:latin typeface="Inter"/>
-              </a:rPr>
-              <a:t>–</a:t>
-            </a:r>
-          </a:p>
-        </p:txBody>
-      </p:sp>
-      <p:sp>
-        <p:nvSpPr>
-          <p:cNvPr id="49" name="TextBox 48"/>
-          <p:cNvSpPr txBox="1"/>
-          <p:nvPr/>
-        </p:nvSpPr>
-        <p:spPr>
-          <a:xfrm>
-            <a:off x="6812280" y="5294376"/>
-            <a:ext cx="4343400" cy="237744"/>
-          </a:xfrm>
-          <a:prstGeom prst="rect">
-            <a:avLst/>
-          </a:prstGeom>
-          <a:noFill/>
-        </p:spPr>
-        <p:txBody>
-          <a:bodyPr wrap="square" lIns="0" rIns="0" tIns="0" bIns="0" anchor="t">
-            <a:spAutoFit/>
-          </a:bodyPr>
-          <a:lstStyle/>
-          <a:p>
-            <a:pPr algn="l">
-              <a:lnSpc>
-                <a:spcPct val="110000"/>
-              </a:lnSpc>
-            </a:pPr>
-            <a:r>
-              <a:rPr sz="1050" b="0" i="0">
-                <a:solidFill>
-                  <a:srgbClr val="6B6878"/>
-                </a:solidFill>
-                <a:latin typeface="Inter"/>
-              </a:rPr>
-              <a:t>No email setup or yearly maintenance</a:t>
+              <a:t>Monday to Saturday, 10:00–19:00 PKT</a:t>
             </a:r>
           </a:p>
         </p:txBody>

--- a/dist/00 - Kickoff Deck.pptx
+++ b/dist/00 - Kickoff Deck.pptx
@@ -3869,7 +3869,7 @@
                 </a:solidFill>
                 <a:latin typeface="Inter"/>
               </a:rPr>
-              <a:t>Omer Bin Dawood</a:t>
+              <a:t>Omer Bin Dawood &amp; Hira Baig</a:t>
             </a:r>
           </a:p>
         </p:txBody>
@@ -5443,7 +5443,7 @@
         <p:spPr>
           <a:xfrm>
             <a:off x="731520" y="5760720"/>
-            <a:ext cx="5486400" cy="365760"/>
+            <a:ext cx="3657600" cy="365760"/>
           </a:xfrm>
           <a:prstGeom prst="rect">
             <a:avLst/>
@@ -5482,7 +5482,7 @@
         <p:spPr>
           <a:xfrm>
             <a:off x="731520" y="6126480"/>
-            <a:ext cx="7589520" cy="365760"/>
+            <a:ext cx="3657600" cy="365760"/>
           </a:xfrm>
           <a:prstGeom prst="rect">
             <a:avLst/>
@@ -5507,7 +5507,85 @@
                 </a:solidFill>
                 <a:latin typeface="Inter"/>
               </a:rPr>
-              <a:t>CEO &amp; Founder, OBD AI Solutions  ·  AI Engineer, DevNeuron (CA, USA)</a:t>
+              <a:t>CEO &amp; Founder, OBD AI Solutions</a:t>
+            </a:r>
+          </a:p>
+        </p:txBody>
+      </p:sp>
+      <p:sp>
+        <p:nvSpPr>
+          <p:cNvPr id="14" name="TextBox 13"/>
+          <p:cNvSpPr txBox="1"/>
+          <p:nvPr/>
+        </p:nvSpPr>
+        <p:spPr>
+          <a:xfrm>
+            <a:off x="4572000" y="5760720"/>
+            <a:ext cx="3657600" cy="365760"/>
+          </a:xfrm>
+          <a:prstGeom prst="rect">
+            <a:avLst/>
+          </a:prstGeom>
+          <a:noFill/>
+        </p:spPr>
+        <p:txBody>
+          <a:bodyPr wrap="square" lIns="0" rIns="0" tIns="0" bIns="0" anchor="t">
+            <a:spAutoFit/>
+          </a:bodyPr>
+          <a:lstStyle/>
+          <a:p>
+            <a:pPr algn="l">
+              <a:lnSpc>
+                <a:spcPct val="110000"/>
+              </a:lnSpc>
+            </a:pPr>
+            <a:r>
+              <a:rPr sz="1800" b="0" i="0">
+                <a:solidFill>
+                  <a:srgbClr val="FFFFFF"/>
+                </a:solidFill>
+                <a:latin typeface="Playfair Display"/>
+              </a:rPr>
+              <a:t>Hira Baig</a:t>
+            </a:r>
+          </a:p>
+        </p:txBody>
+      </p:sp>
+      <p:sp>
+        <p:nvSpPr>
+          <p:cNvPr id="15" name="TextBox 14"/>
+          <p:cNvSpPr txBox="1"/>
+          <p:nvPr/>
+        </p:nvSpPr>
+        <p:spPr>
+          <a:xfrm>
+            <a:off x="4572000" y="6126480"/>
+            <a:ext cx="3657600" cy="365760"/>
+          </a:xfrm>
+          <a:prstGeom prst="rect">
+            <a:avLst/>
+          </a:prstGeom>
+          <a:noFill/>
+        </p:spPr>
+        <p:txBody>
+          <a:bodyPr wrap="square" lIns="0" rIns="0" tIns="0" bIns="0" anchor="t">
+            <a:spAutoFit/>
+          </a:bodyPr>
+          <a:lstStyle/>
+          <a:p>
+            <a:pPr algn="l">
+              <a:lnSpc>
+                <a:spcPct val="110000"/>
+              </a:lnSpc>
+            </a:pPr>
+            <a:r>
+              <a:rPr sz="1050" b="0" i="0">
+                <a:solidFill>
+                  <a:srgbClr val="C9B4FF"/>
+                </a:solidFill>
+                <a:latin typeface="Inter"/>
+              </a:rPr>
+              <a:t>Co-Founder &amp; Partner, OBD AI Solutions</a:t>
             </a:r>
           </a:p>
         </p:txBody>
@@ -8965,7 +9043,7 @@
                 </a:solidFill>
                 <a:latin typeface="Playfair Display"/>
               </a:rPr>
-              <a:t>H</a:t>
+              <a:t>HB</a:t>
             </a:r>
           </a:p>
         </p:txBody>
@@ -9004,7 +9082,7 @@
                 </a:solidFill>
                 <a:latin typeface="Inter"/>
               </a:rPr>
-              <a:t>ACCOUNT MANAGER</a:t>
+              <a:t>CO-FOUNDER &amp; PARTNER</a:t>
             </a:r>
           </a:p>
         </p:txBody>
@@ -9043,7 +9121,7 @@
                 </a:solidFill>
                 <a:latin typeface="Playfair Display"/>
               </a:rPr>
-              <a:t>Hira</a:t>
+              <a:t>Hira Baig</a:t>
             </a:r>
           </a:p>
         </p:txBody>
@@ -9082,7 +9160,23 @@
                 </a:solidFill>
                 <a:latin typeface="Inter"/>
               </a:rPr>
-              <a:t>Client relations, OBD AI Solutions</a:t>
+              <a:t>Co-Founder &amp; Partner, OBD AI Solutions</a:t>
+            </a:r>
+          </a:p>
+          <a:p>
+            <a:pPr algn="l">
+              <a:lnSpc>
+                <a:spcPct val="120000"/>
+              </a:lnSpc>
+            </a:pPr>
+            <a:r>
+              <a:rPr sz="1050" b="0" i="0">
+                <a:solidFill>
+                  <a:srgbClr val="6B6878"/>
+                </a:solidFill>
+                <a:latin typeface="Inter"/>
+              </a:rPr>
+              <a:t>Client relations &amp; operations</a:t>
             </a:r>
           </a:p>
         </p:txBody>
@@ -16297,7 +16391,7 @@
                 </a:solidFill>
                 <a:latin typeface="Inter"/>
               </a:rPr>
-              <a:t>WhatsApp project group  ·  Hira (Account Manager)  ·  Omer Bin Dawood (escalations)</a:t>
+              <a:t>WhatsApp project group  ·  Hira Baig (Co-Founder &amp; Partner)  ·  Omer Bin Dawood (escalations)</a:t>
             </a:r>
           </a:p>
           <a:p>

--- a/dist/00 - Kickoff Deck.pptx
+++ b/dist/00 - Kickoff Deck.pptx
@@ -5507,7 +5507,7 @@
                 </a:solidFill>
                 <a:latin typeface="Inter"/>
               </a:rPr>
-              <a:t>CEO &amp; Founder, OBD AI Solutions</a:t>
+              <a:t>Founder, OBD AI Solutions</a:t>
             </a:r>
           </a:p>
         </p:txBody>
@@ -5585,7 +5585,7 @@
                 </a:solidFill>
                 <a:latin typeface="Inter"/>
               </a:rPr>
-              <a:t>Co-Founder &amp; Partner, OBD AI Solutions</a:t>
+              <a:t>Managing Director, OBD AI Solutions</a:t>
             </a:r>
           </a:p>
         </p:txBody>
@@ -8843,7 +8843,7 @@
                 </a:solidFill>
                 <a:latin typeface="Inter"/>
               </a:rPr>
-              <a:t>CEO &amp; Founder, OBD AI Solutions</a:t>
+              <a:t>Founder, OBD AI Solutions</a:t>
             </a:r>
           </a:p>
           <a:p>
@@ -9082,7 +9082,7 @@
                 </a:solidFill>
                 <a:latin typeface="Inter"/>
               </a:rPr>
-              <a:t>CO-FOUNDER &amp; PARTNER</a:t>
+              <a:t>MANAGING DIRECTOR</a:t>
             </a:r>
           </a:p>
         </p:txBody>
@@ -9160,7 +9160,7 @@
                 </a:solidFill>
                 <a:latin typeface="Inter"/>
               </a:rPr>
-              <a:t>Co-Founder &amp; Partner, OBD AI Solutions</a:t>
+              <a:t>Managing Director, OBD AI Solutions</a:t>
             </a:r>
           </a:p>
           <a:p>
@@ -16391,7 +16391,7 @@
                 </a:solidFill>
                 <a:latin typeface="Inter"/>
               </a:rPr>
-              <a:t>WhatsApp project group  ·  Hira Baig (Co-Founder &amp; Partner)  ·  Omer Bin Dawood (escalations)</a:t>
+              <a:t>WhatsApp project group  ·  Hira Baig (Managing Director)  ·  Omer Bin Dawood (escalations)</a:t>
             </a:r>
           </a:p>
           <a:p>
